--- a/Planning docs/Slides/lesson-7-4-teacher-slides.pptx
+++ b/Planning docs/Slides/lesson-7-4-teacher-slides.pptx
@@ -516,7 +516,7 @@
           <a:p>
             <a:r>
               <a:rPr lang="en-US" dirty="0"/>
-              <a:t>Title slide for Week 7 Day 4. Nonfiction Unit.</a:t>
+              <a:t>Lesson 7.4. Reading: 📰 Read: What Is a Travel Guide?.</a:t>
             </a:r>
             <a:endParaRPr lang="en-US" dirty="0"/>
           </a:p>
@@ -604,7 +604,7 @@
           <a:p>
             <a:r>
               <a:rPr lang="en-US" dirty="0"/>
-              <a:t>Review morphology focus. Have students identify the base word and affix in each example.</a:t>
+              <a:t>Each word appears in the chapters read this week, in the author’s own sentence.</a:t>
             </a:r>
             <a:endParaRPr lang="en-US" dirty="0"/>
           </a:p>
@@ -692,7 +692,7 @@
           <a:p>
             <a:r>
               <a:rPr lang="en-US" dirty="0"/>
-              <a:t>Go through each vocabulary word. For flip cards, have students guess the definition before revealing.</a:t>
+              <a:t>Answers: 4, Fe, 19, Portland</a:t>
             </a:r>
             <a:endParaRPr lang="en-US" dirty="0"/>
           </a:p>
@@ -780,7 +780,7 @@
           <a:p>
             <a:r>
               <a:rPr lang="en-US" dirty="0"/>
-              <a:t>Give students time to sort the words. Use the chat or paper to organize.</a:t>
+              <a:t>Answers: 4, Fe, 19, Portland</a:t>
             </a:r>
             <a:endParaRPr lang="en-US" dirty="0"/>
           </a:p>
@@ -868,7 +868,7 @@
           <a:p>
             <a:r>
               <a:rPr lang="en-US" dirty="0"/>
-              <a:t>Review each column. Ask: what pattern do you see in each group?</a:t>
+              <a:t>add -ing: mailing | double + -ed: stopped, planned | Drop e + -ing: writing, using | Add -ed: traveled, visited | Double + -ing: mapping</a:t>
             </a:r>
             <a:endParaRPr lang="en-US" dirty="0"/>
           </a:p>
@@ -956,7 +956,7 @@
           <a:p>
             <a:r>
               <a:rPr lang="en-US" dirty="0"/>
-              <a:t>Reading focus slide. Use pause-and-think questions during reading. Copywork can be done after reading.</a:t>
+              <a:t>add -ing: mailing | double + -ed: stopped, planned | Drop e + -ing: writing, using | Add -ed: traveled, visited | Double + -ing: mapping</a:t>
             </a:r>
             <a:endParaRPr lang="en-US" dirty="0"/>
           </a:p>
@@ -1044,7 +1044,7 @@
           <a:p>
             <a:r>
               <a:rPr lang="en-US" dirty="0"/>
-              <a:t>Transition to the writing workshop assignment in Canvas.</a:t>
+              <a:t>Read the chapters, then return to the pause questions.</a:t>
             </a:r>
             <a:endParaRPr lang="en-US" dirty="0"/>
           </a:p>
@@ -1132,7 +1132,7 @@
           <a:p>
             <a:r>
               <a:rPr lang="en-US" dirty="0"/>
-              <a:t>Read the prompt aloud once. Give students about 1 minute to read it again silently and think. Remind them: there is no wrong answer — just write what comes to mind. Advance to the writing slide when ready.</a:t>
+              <a:t>Read the prompt aloud. Give students a moment to think before writing.</a:t>
             </a:r>
             <a:endParaRPr lang="en-US" dirty="0"/>
           </a:p>
@@ -1220,7 +1220,7 @@
           <a:p>
             <a:r>
               <a:rPr lang="en-US" dirty="0"/>
-              <a:t>Set a 5-minute timer. Walk the room quietly. If a student stops, gently encourage them: "Keep writing — even one more sentence." The goal is sustained writing, not perfection. Do not interrupt to correct spelling or grammar during this time.</a:t>
+              <a:t>Five minutes of sustained writing. Stamina over polish. Do not correct spelling now.</a:t>
             </a:r>
             <a:endParaRPr lang="en-US" dirty="0"/>
           </a:p>
@@ -1308,7 +1308,7 @@
           <a:p>
             <a:r>
               <a:rPr lang="en-US" dirty="0"/>
-              <a:t>Set a 1-minute timer. Remind students: we are only fixing ONE thing today — Did I include what I want to LEARN, not just what I want to see?. They should also do a quick conventions check (capitals, punctuation, spelling). They do NOT need to rewrite — just fix and improve. Revision = improving ideas; Editing = fixing conventions. Keep them separate in your language.</a:t>
+              <a:t>One fix only. Editing is conventions; revision is ideas. Name which one you are asking for.</a:t>
             </a:r>
             <a:endParaRPr lang="en-US" dirty="0"/>
           </a:p>
@@ -1396,7 +1396,7 @@
           <a:p>
             <a:r>
               <a:rPr lang="en-US" dirty="0"/>
-              <a:t>Call on 3-5 students to share. Respond with genuine interest: "I love how you described that" or "That's a really interesting idea." Avoid correcting grammar or spelling during share time — this is about celebrating writing. If time is short, have 2-3 students share in chat instead.</a:t>
+              <a:t>Two or three volunteers. Praise something specific in each.</a:t>
             </a:r>
             <a:endParaRPr lang="en-US" dirty="0"/>
           </a:p>
@@ -1484,7 +1484,7 @@
           <a:p>
             <a:r>
               <a:rPr lang="en-US" dirty="0"/>
-              <a:t>Review the big question and reading lens with students before reading.</a:t>
+              <a:t>Reading lens: Today, practice: Use text features to understand information.</a:t>
             </a:r>
             <a:endParaRPr lang="en-US" dirty="0"/>
           </a:p>
@@ -1572,7 +1572,8 @@
           <a:p>
             <a:r>
               <a:rPr lang="en-US" dirty="0"/>
-              <a:t>Read the model sentence aloud. Ask students: what do you notice about the punctuation and capitalization?</a:t>
+              <a:t>Corrected: Corrected: 
+Look for: When a travel guide is well written , you can almost feel like you are already there in that place .</a:t>
             </a:r>
             <a:endParaRPr lang="en-US" dirty="0"/>
           </a:p>
@@ -1660,7 +1661,8 @@
           <a:p>
             <a:r>
               <a:rPr lang="en-US" dirty="0"/>
-              <a:t>Give students 1-2 minutes to fix the sentence. Walk the room and check.</a:t>
+              <a:t>Corrected: Corrected: 
+Look for: When a travel guide is well written , you can almost feel like you are already there in that place .</a:t>
             </a:r>
             <a:endParaRPr lang="en-US" dirty="0"/>
           </a:p>
@@ -1748,7 +1750,7 @@
           <a:p>
             <a:r>
               <a:rPr lang="en-US" dirty="0"/>
-              <a:t>Reveal the corrected version. Point out each fix: capitalization, punctuation, spelling.</a:t>
+              <a:t>Break the word into base + word part. Ask what the part adds to the meaning.</a:t>
             </a:r>
             <a:endParaRPr lang="en-US" dirty="0"/>
           </a:p>
@@ -2129,8 +2131,8 @@
         </p:nvSpPr>
         <p:spPr>
           <a:xfrm>
-            <a:off x="457200" y="914400"/>
-            <a:ext cx="8229600" cy="1097280"/>
+            <a:off x="0" y="822960"/>
+            <a:ext cx="9144000" cy="822960"/>
           </a:xfrm>
           <a:prstGeom prst="rect">
             <a:avLst/>
@@ -2146,7 +2148,43 @@
               <a:buNone/>
             </a:pPr>
             <a:r>
-              <a:rPr lang="en-US" sz="4000" b="1" dirty="0">
+              <a:rPr lang="en-US" sz="5200" dirty="0">
+                <a:solidFill>
+                  <a:srgbClr val="000000"/>
+                </a:solidFill>
+              </a:rPr>
+              <a:t>🗺️</a:t>
+            </a:r>
+            <a:endParaRPr lang="en-US" sz="5200" dirty="0"/>
+          </a:p>
+        </p:txBody>
+      </p:sp>
+      <p:sp>
+        <p:nvSpPr>
+          <p:cNvPr id="3" name="Text 1"/>
+          <p:cNvSpPr/>
+          <p:nvPr/>
+        </p:nvSpPr>
+        <p:spPr>
+          <a:xfrm>
+            <a:off x="457200" y="1691640"/>
+            <a:ext cx="8229600" cy="566928"/>
+          </a:xfrm>
+          <a:prstGeom prst="rect">
+            <a:avLst/>
+          </a:prstGeom>
+          <a:noFill/>
+          <a:ln/>
+        </p:spPr>
+        <p:txBody>
+          <a:bodyPr wrap="square" lIns="0" tIns="0" rIns="0" bIns="0" rtlCol="0" anchor="ctr"/>
+          <a:lstStyle/>
+          <a:p>
+            <a:pPr algn="ctr" indent="0" marL="0">
+              <a:buNone/>
+            </a:pPr>
+            <a:r>
+              <a:rPr lang="en-US" sz="2600" b="1" dirty="0">
                 <a:solidFill>
                   <a:srgbClr val="FFFFFF"/>
                 </a:solidFill>
@@ -2154,22 +2192,22 @@
                 <a:ea typeface="Calibri" pitchFamily="34" charset="-122"/>
                 <a:cs typeface="Calibri" pitchFamily="34" charset="-120"/>
               </a:rPr>
-              <a:t>🗺️  Week 7 · Day 4</a:t>
-            </a:r>
-            <a:endParaRPr lang="en-US" sz="4000" dirty="0"/>
-          </a:p>
-        </p:txBody>
-      </p:sp>
-      <p:sp>
-        <p:nvSpPr>
-          <p:cNvPr id="3" name="Text 1"/>
-          <p:cNvSpPr/>
-          <p:nvPr/>
-        </p:nvSpPr>
-        <p:spPr>
-          <a:xfrm>
-            <a:off x="457200" y="2103120"/>
-            <a:ext cx="8229600" cy="731520"/>
+              <a:t>Nonfiction: Maps, Mail &amp; Places</a:t>
+            </a:r>
+            <a:endParaRPr lang="en-US" sz="2600" dirty="0"/>
+          </a:p>
+        </p:txBody>
+      </p:sp>
+      <p:sp>
+        <p:nvSpPr>
+          <p:cNvPr id="4" name="Text 2"/>
+          <p:cNvSpPr/>
+          <p:nvPr/>
+        </p:nvSpPr>
+        <p:spPr>
+          <a:xfrm>
+            <a:off x="457200" y="2331720"/>
+            <a:ext cx="8229600" cy="411480"/>
           </a:xfrm>
           <a:prstGeom prst="rect">
             <a:avLst/>
@@ -2185,7 +2223,7 @@
               <a:buNone/>
             </a:pPr>
             <a:r>
-              <a:rPr lang="en-US" sz="1800" dirty="0">
+              <a:rPr lang="en-US" sz="2000" dirty="0">
                 <a:solidFill>
                   <a:srgbClr val="5CB85C"/>
                 </a:solidFill>
@@ -2193,22 +2231,22 @@
                 <a:ea typeface="Calibri" pitchFamily="34" charset="-122"/>
                 <a:cs typeface="Calibri" pitchFamily="34" charset="-120"/>
               </a:rPr>
-              <a:t>Nonfiction Unit — Lesson 7.4</a:t>
-            </a:r>
-            <a:endParaRPr lang="en-US" sz="1800" dirty="0"/>
-          </a:p>
-        </p:txBody>
-      </p:sp>
-      <p:sp>
-        <p:nvSpPr>
-          <p:cNvPr id="4" name="Text 2"/>
-          <p:cNvSpPr/>
-          <p:nvPr/>
-        </p:nvSpPr>
-        <p:spPr>
-          <a:xfrm>
-            <a:off x="457200" y="4114800"/>
-            <a:ext cx="8229600" cy="457200"/>
+              <a:t>Lesson 7.4  ·  📰 Read: What Is a Travel Guide?</a:t>
+            </a:r>
+            <a:endParaRPr lang="en-US" sz="2000" dirty="0"/>
+          </a:p>
+        </p:txBody>
+      </p:sp>
+      <p:sp>
+        <p:nvSpPr>
+          <p:cNvPr id="5" name="Text 3"/>
+          <p:cNvSpPr/>
+          <p:nvPr/>
+        </p:nvSpPr>
+        <p:spPr>
+          <a:xfrm>
+            <a:off x="457200" y="2880360"/>
+            <a:ext cx="8229600" cy="320040"/>
           </a:xfrm>
           <a:prstGeom prst="rect">
             <a:avLst/>
@@ -2224,17 +2262,17 @@
               <a:buNone/>
             </a:pPr>
             <a:r>
-              <a:rPr lang="en-US" sz="1300" dirty="0">
-                <a:solidFill>
-                  <a:srgbClr val="AAAAAA"/>
-                </a:solidFill>
-                <a:latin typeface="Calibri" pitchFamily="34" charset="0"/>
-                <a:ea typeface="Calibri" pitchFamily="34" charset="-122"/>
-                <a:cs typeface="Calibri" pitchFamily="34" charset="-120"/>
-              </a:rPr>
-              <a:t>Optima Academy Online · 3rd Grade ELA</a:t>
-            </a:r>
-            <a:endParaRPr lang="en-US" sz="1300" dirty="0"/>
+              <a:rPr lang="en-US" sz="1400" dirty="0">
+                <a:solidFill>
+                  <a:srgbClr val="C9BCE4"/>
+                </a:solidFill>
+                <a:latin typeface="Calibri" pitchFamily="34" charset="0"/>
+                <a:ea typeface="Calibri" pitchFamily="34" charset="-122"/>
+                <a:cs typeface="Calibri" pitchFamily="34" charset="-120"/>
+              </a:rPr>
+              <a:t>Grade 3 ELA  ·  Virtue: Diligence</a:t>
+            </a:r>
+            <a:endParaRPr lang="en-US" sz="1400" dirty="0"/>
           </a:p>
         </p:txBody>
       </p:sp>
@@ -2272,65 +2310,62 @@
       </p:grpSpPr>
       <p:sp>
         <p:nvSpPr>
-          <p:cNvPr id="2" name="Text 0"/>
-          <p:cNvSpPr/>
-          <p:nvPr/>
-        </p:nvSpPr>
-        <p:spPr>
-          <a:xfrm>
-            <a:off x="365760" y="164592"/>
-            <a:ext cx="8412480" cy="566928"/>
-          </a:xfrm>
-          <a:prstGeom prst="rect">
-            <a:avLst/>
-          </a:prstGeom>
-          <a:noFill/>
-          <a:ln/>
-        </p:spPr>
-        <p:txBody>
-          <a:bodyPr wrap="square" lIns="0" tIns="0" rIns="0" bIns="0" rtlCol="0" anchor="ctr"/>
-          <a:lstStyle/>
-          <a:p>
-            <a:pPr algn="l" indent="0" marL="0">
-              <a:buNone/>
-            </a:pPr>
-            <a:r>
-              <a:rPr lang="en-US" sz="2800" b="1" dirty="0">
-                <a:solidFill>
-                  <a:srgbClr val="0E1C42"/>
-                </a:solidFill>
-                <a:latin typeface="Calibri" pitchFamily="34" charset="0"/>
-                <a:ea typeface="Calibri" pitchFamily="34" charset="-122"/>
-                <a:cs typeface="Calibri" pitchFamily="34" charset="-120"/>
-              </a:rPr>
-              <a:t>🌱 Morphology: Suffix -ing shows action happening</a:t>
-            </a:r>
-            <a:endParaRPr lang="en-US" sz="2800" dirty="0"/>
-          </a:p>
-        </p:txBody>
-      </p:sp>
-      <p:sp>
-        <p:nvSpPr>
-          <p:cNvPr id="3" name="Shape 1"/>
-          <p:cNvSpPr/>
-          <p:nvPr/>
-        </p:nvSpPr>
-        <p:spPr>
-          <a:xfrm>
-            <a:off x="365760" y="749808"/>
-            <a:ext cx="8412480" cy="0"/>
-          </a:xfrm>
-          <a:prstGeom prst="line">
-            <a:avLst/>
-          </a:prstGeom>
-          <a:noFill/>
-          <a:ln w="19050">
-            <a:solidFill>
-              <a:srgbClr val="8B6FC0"/>
-            </a:solidFill>
-            <a:prstDash val="solid"/>
-          </a:ln>
-        </p:spPr>
+          <p:cNvPr id="2" name="Shape 0"/>
+          <p:cNvSpPr/>
+          <p:nvPr/>
+        </p:nvSpPr>
+        <p:spPr>
+          <a:xfrm>
+            <a:off x="0" y="0"/>
+            <a:ext cx="9144000" cy="566928"/>
+          </a:xfrm>
+          <a:prstGeom prst="rect">
+            <a:avLst/>
+          </a:prstGeom>
+          <a:solidFill>
+            <a:srgbClr val="55C8E8"/>
+          </a:solidFill>
+          <a:ln/>
+        </p:spPr>
+      </p:sp>
+      <p:sp>
+        <p:nvSpPr>
+          <p:cNvPr id="3" name="Text 1"/>
+          <p:cNvSpPr/>
+          <p:nvPr/>
+        </p:nvSpPr>
+        <p:spPr>
+          <a:xfrm>
+            <a:off x="365760" y="54864"/>
+            <a:ext cx="8412480" cy="457200"/>
+          </a:xfrm>
+          <a:prstGeom prst="rect">
+            <a:avLst/>
+          </a:prstGeom>
+          <a:noFill/>
+          <a:ln/>
+        </p:spPr>
+        <p:txBody>
+          <a:bodyPr wrap="square" lIns="0" tIns="0" rIns="0" bIns="0" rtlCol="0" anchor="ctr"/>
+          <a:lstStyle/>
+          <a:p>
+            <a:pPr indent="0" marL="0">
+              <a:buNone/>
+            </a:pPr>
+            <a:r>
+              <a:rPr lang="en-US" sz="2200" b="1" dirty="0">
+                <a:solidFill>
+                  <a:srgbClr val="FFFFFF"/>
+                </a:solidFill>
+                <a:latin typeface="Calibri" pitchFamily="34" charset="0"/>
+                <a:ea typeface="Calibri" pitchFamily="34" charset="-122"/>
+                <a:cs typeface="Calibri" pitchFamily="34" charset="-120"/>
+              </a:rPr>
+              <a:t>🔤  Vocabulary</a:t>
+            </a:r>
+            <a:endParaRPr lang="en-US" sz="2200" dirty="0"/>
+          </a:p>
+        </p:txBody>
       </p:sp>
       <p:sp>
         <p:nvSpPr>
@@ -2340,32 +2375,32 @@
         </p:nvSpPr>
         <p:spPr>
           <a:xfrm>
-            <a:off x="457200" y="1005840"/>
-            <a:ext cx="8046720" cy="292608"/>
-          </a:xfrm>
-          <a:prstGeom prst="rect">
-            <a:avLst/>
-          </a:prstGeom>
-          <a:noFill/>
-          <a:ln/>
-        </p:spPr>
-        <p:txBody>
-          <a:bodyPr wrap="square" lIns="0" tIns="0" rIns="0" bIns="0" rtlCol="0" anchor="ctr"/>
-          <a:lstStyle/>
-          <a:p>
-            <a:pPr indent="0" marL="0">
-              <a:buNone/>
-            </a:pPr>
-            <a:r>
-              <a:rPr lang="en-US" sz="1100" b="1" spc="200" kern="0" dirty="0">
-                <a:solidFill>
-                  <a:srgbClr val="8B6FC0"/>
-                </a:solidFill>
-                <a:latin typeface="Calibri" pitchFamily="34" charset="0"/>
-                <a:ea typeface="Calibri" pitchFamily="34" charset="-122"/>
-                <a:cs typeface="Calibri" pitchFamily="34" charset="-120"/>
-              </a:rPr>
-              <a:t>MATCH THE WORDS</a:t>
+            <a:off x="365760" y="804672"/>
+            <a:ext cx="8229600" cy="237744"/>
+          </a:xfrm>
+          <a:prstGeom prst="rect">
+            <a:avLst/>
+          </a:prstGeom>
+          <a:noFill/>
+          <a:ln/>
+        </p:spPr>
+        <p:txBody>
+          <a:bodyPr wrap="square" lIns="0" tIns="0" rIns="0" bIns="0" rtlCol="0" anchor="ctr"/>
+          <a:lstStyle/>
+          <a:p>
+            <a:pPr indent="0" marL="0">
+              <a:buNone/>
+            </a:pPr>
+            <a:r>
+              <a:rPr lang="en-US" sz="1100" b="1" spc="100" kern="0" dirty="0">
+                <a:solidFill>
+                  <a:srgbClr val="55C8E8"/>
+                </a:solidFill>
+                <a:latin typeface="Calibri" pitchFamily="34" charset="0"/>
+                <a:ea typeface="Calibri" pitchFamily="34" charset="-122"/>
+                <a:cs typeface="Calibri" pitchFamily="34" charset="-120"/>
+              </a:rPr>
+              <a:t>THIS WEEK’S WORDS</a:t>
             </a:r>
             <a:endParaRPr lang="en-US" sz="1100" dirty="0"/>
           </a:p>
@@ -2379,16 +2414,16 @@
         </p:nvSpPr>
         <p:spPr>
           <a:xfrm>
-            <a:off x="457200" y="1371600"/>
-            <a:ext cx="8229600" cy="411480"/>
+            <a:off x="365760" y="1097280"/>
+            <a:ext cx="8412480" cy="658368"/>
           </a:xfrm>
           <a:prstGeom prst="roundRect">
             <a:avLst>
-              <a:gd name="adj" fmla="val 22222"/>
+              <a:gd name="adj" fmla="val 13889"/>
             </a:avLst>
           </a:prstGeom>
           <a:solidFill>
-            <a:srgbClr val="F0E8FF"/>
+            <a:srgbClr val="E5F7FC"/>
           </a:solidFill>
           <a:ln/>
           <a:effectLst>
@@ -2408,24 +2443,38 @@
         </p:nvSpPr>
         <p:spPr>
           <a:xfrm>
-            <a:off x="640080" y="1417320"/>
-            <a:ext cx="7863840" cy="320040"/>
-          </a:xfrm>
-          <a:prstGeom prst="rect">
-            <a:avLst/>
-          </a:prstGeom>
-          <a:noFill/>
-          <a:ln/>
-        </p:spPr>
-        <p:txBody>
-          <a:bodyPr wrap="square" lIns="0" tIns="0" rIns="0" bIns="0" rtlCol="0" anchor="ctr"/>
-          <a:lstStyle/>
-          <a:p>
-            <a:pPr indent="0" marL="0">
-              <a:buNone/>
-            </a:pPr>
-            <a:r>
-              <a:rPr lang="en-US" sz="1500" dirty="0">
+            <a:off x="594360" y="1225296"/>
+            <a:ext cx="7863840" cy="420624"/>
+          </a:xfrm>
+          <a:prstGeom prst="rect">
+            <a:avLst/>
+          </a:prstGeom>
+          <a:noFill/>
+          <a:ln/>
+        </p:spPr>
+        <p:txBody>
+          <a:bodyPr wrap="square" lIns="0" tIns="0" rIns="0" bIns="0" rtlCol="0" anchor="ctr"/>
+          <a:lstStyle/>
+          <a:p>
+            <a:pPr indent="0" marL="0">
+              <a:buNone/>
+            </a:pPr>
+            <a:r>
+              <a:rPr lang="en-US" sz="1700" b="1" dirty="0">
+                <a:solidFill>
+                  <a:srgbClr val="0E1C42"/>
+                </a:solidFill>
+                <a:latin typeface="Calibri" pitchFamily="34" charset="0"/>
+                <a:ea typeface="Calibri" pitchFamily="34" charset="-122"/>
+                <a:cs typeface="Calibri" pitchFamily="34" charset="-120"/>
+              </a:rPr>
+              <a:t>region  </a:t>
+            </a:r>
+            <a:pPr indent="0" marL="0">
+              <a:buNone/>
+            </a:pPr>
+            <a:r>
+              <a:rPr lang="en-US" sz="1400" dirty="0">
                 <a:solidFill>
                   <a:srgbClr val="1E293B"/>
                 </a:solidFill>
@@ -2433,9 +2482,9 @@
                 <a:ea typeface="Calibri" pitchFamily="34" charset="-122"/>
                 <a:cs typeface="Calibri" pitchFamily="34" charset="-120"/>
               </a:rPr>
-              <a:t>traveling → travel</a:t>
-            </a:r>
-            <a:endParaRPr lang="en-US" sz="1500" dirty="0"/>
+              <a:t>A large area of land that shares similar features.</a:t>
+            </a:r>
+            <a:endParaRPr lang="en-US" sz="1700" dirty="0"/>
           </a:p>
         </p:txBody>
       </p:sp>
@@ -2447,16 +2496,16 @@
         </p:nvSpPr>
         <p:spPr>
           <a:xfrm>
-            <a:off x="457200" y="1847088"/>
-            <a:ext cx="8229600" cy="411480"/>
+            <a:off x="365760" y="1828800"/>
+            <a:ext cx="8412480" cy="658368"/>
           </a:xfrm>
           <a:prstGeom prst="roundRect">
             <a:avLst>
-              <a:gd name="adj" fmla="val 22222"/>
+              <a:gd name="adj" fmla="val 13889"/>
             </a:avLst>
           </a:prstGeom>
           <a:solidFill>
-            <a:srgbClr val="F0E8FF"/>
+            <a:srgbClr val="FFFFFF"/>
           </a:solidFill>
           <a:ln/>
           <a:effectLst>
@@ -2476,24 +2525,38 @@
         </p:nvSpPr>
         <p:spPr>
           <a:xfrm>
-            <a:off x="640080" y="1892808"/>
-            <a:ext cx="7863840" cy="320040"/>
-          </a:xfrm>
-          <a:prstGeom prst="rect">
-            <a:avLst/>
-          </a:prstGeom>
-          <a:noFill/>
-          <a:ln/>
-        </p:spPr>
-        <p:txBody>
-          <a:bodyPr wrap="square" lIns="0" tIns="0" rIns="0" bIns="0" rtlCol="0" anchor="ctr"/>
-          <a:lstStyle/>
-          <a:p>
-            <a:pPr indent="0" marL="0">
-              <a:buNone/>
-            </a:pPr>
-            <a:r>
-              <a:rPr lang="en-US" sz="1500" dirty="0">
+            <a:off x="594360" y="1956816"/>
+            <a:ext cx="7863840" cy="420624"/>
+          </a:xfrm>
+          <a:prstGeom prst="rect">
+            <a:avLst/>
+          </a:prstGeom>
+          <a:noFill/>
+          <a:ln/>
+        </p:spPr>
+        <p:txBody>
+          <a:bodyPr wrap="square" lIns="0" tIns="0" rIns="0" bIns="0" rtlCol="0" anchor="ctr"/>
+          <a:lstStyle/>
+          <a:p>
+            <a:pPr indent="0" marL="0">
+              <a:buNone/>
+            </a:pPr>
+            <a:r>
+              <a:rPr lang="en-US" sz="1700" b="1" dirty="0">
+                <a:solidFill>
+                  <a:srgbClr val="0E1C42"/>
+                </a:solidFill>
+                <a:latin typeface="Calibri" pitchFamily="34" charset="0"/>
+                <a:ea typeface="Calibri" pitchFamily="34" charset="-122"/>
+                <a:cs typeface="Calibri" pitchFamily="34" charset="-120"/>
+              </a:rPr>
+              <a:t>climate  </a:t>
+            </a:r>
+            <a:pPr indent="0" marL="0">
+              <a:buNone/>
+            </a:pPr>
+            <a:r>
+              <a:rPr lang="en-US" sz="1400" dirty="0">
                 <a:solidFill>
                   <a:srgbClr val="1E293B"/>
                 </a:solidFill>
@@ -2501,9 +2564,9 @@
                 <a:ea typeface="Calibri" pitchFamily="34" charset="-122"/>
                 <a:cs typeface="Calibri" pitchFamily="34" charset="-120"/>
               </a:rPr>
-              <a:t>writing → write</a:t>
-            </a:r>
-            <a:endParaRPr lang="en-US" sz="1500" dirty="0"/>
+              <a:t>The typical weather in a place over a long time.</a:t>
+            </a:r>
+            <a:endParaRPr lang="en-US" sz="1700" dirty="0"/>
           </a:p>
         </p:txBody>
       </p:sp>
@@ -2515,16 +2578,16 @@
         </p:nvSpPr>
         <p:spPr>
           <a:xfrm>
-            <a:off x="457200" y="2322576"/>
-            <a:ext cx="8229600" cy="411480"/>
+            <a:off x="365760" y="2560320"/>
+            <a:ext cx="8412480" cy="658368"/>
           </a:xfrm>
           <a:prstGeom prst="roundRect">
             <a:avLst>
-              <a:gd name="adj" fmla="val 22222"/>
+              <a:gd name="adj" fmla="val 13889"/>
             </a:avLst>
           </a:prstGeom>
           <a:solidFill>
-            <a:srgbClr val="F0E8FF"/>
+            <a:srgbClr val="E5F7FC"/>
           </a:solidFill>
           <a:ln/>
           <a:effectLst>
@@ -2544,24 +2607,38 @@
         </p:nvSpPr>
         <p:spPr>
           <a:xfrm>
-            <a:off x="640080" y="2368296"/>
-            <a:ext cx="7863840" cy="320040"/>
-          </a:xfrm>
-          <a:prstGeom prst="rect">
-            <a:avLst/>
-          </a:prstGeom>
-          <a:noFill/>
-          <a:ln/>
-        </p:spPr>
-        <p:txBody>
-          <a:bodyPr wrap="square" lIns="0" tIns="0" rIns="0" bIns="0" rtlCol="0" anchor="ctr"/>
-          <a:lstStyle/>
-          <a:p>
-            <a:pPr indent="0" marL="0">
-              <a:buNone/>
-            </a:pPr>
-            <a:r>
-              <a:rPr lang="en-US" sz="1500" dirty="0">
+            <a:off x="594360" y="2688336"/>
+            <a:ext cx="7863840" cy="420624"/>
+          </a:xfrm>
+          <a:prstGeom prst="rect">
+            <a:avLst/>
+          </a:prstGeom>
+          <a:noFill/>
+          <a:ln/>
+        </p:spPr>
+        <p:txBody>
+          <a:bodyPr wrap="square" lIns="0" tIns="0" rIns="0" bIns="0" rtlCol="0" anchor="ctr"/>
+          <a:lstStyle/>
+          <a:p>
+            <a:pPr indent="0" marL="0">
+              <a:buNone/>
+            </a:pPr>
+            <a:r>
+              <a:rPr lang="en-US" sz="1700" b="1" dirty="0">
+                <a:solidFill>
+                  <a:srgbClr val="0E1C42"/>
+                </a:solidFill>
+                <a:latin typeface="Calibri" pitchFamily="34" charset="0"/>
+                <a:ea typeface="Calibri" pitchFamily="34" charset="-122"/>
+                <a:cs typeface="Calibri" pitchFamily="34" charset="-120"/>
+              </a:rPr>
+              <a:t>geography  </a:t>
+            </a:r>
+            <a:pPr indent="0" marL="0">
+              <a:buNone/>
+            </a:pPr>
+            <a:r>
+              <a:rPr lang="en-US" sz="1400" dirty="0">
                 <a:solidFill>
                   <a:srgbClr val="1E293B"/>
                 </a:solidFill>
@@ -2569,9 +2646,9 @@
                 <a:ea typeface="Calibri" pitchFamily="34" charset="-122"/>
                 <a:cs typeface="Calibri" pitchFamily="34" charset="-120"/>
               </a:rPr>
-              <a:t>stopping → stop</a:t>
-            </a:r>
-            <a:endParaRPr lang="en-US" sz="1500" dirty="0"/>
+              <a:t>The study of places, land, and features of the earth.</a:t>
+            </a:r>
+            <a:endParaRPr lang="en-US" sz="1700" dirty="0"/>
           </a:p>
         </p:txBody>
       </p:sp>
@@ -2583,16 +2660,16 @@
         </p:nvSpPr>
         <p:spPr>
           <a:xfrm>
-            <a:off x="457200" y="2798064"/>
-            <a:ext cx="8229600" cy="411480"/>
+            <a:off x="365760" y="3291840"/>
+            <a:ext cx="8412480" cy="658368"/>
           </a:xfrm>
           <a:prstGeom prst="roundRect">
             <a:avLst>
-              <a:gd name="adj" fmla="val 22222"/>
+              <a:gd name="adj" fmla="val 13889"/>
             </a:avLst>
           </a:prstGeom>
           <a:solidFill>
-            <a:srgbClr val="F0E8FF"/>
+            <a:srgbClr val="FFFFFF"/>
           </a:solidFill>
           <a:ln/>
           <a:effectLst>
@@ -2612,24 +2689,38 @@
         </p:nvSpPr>
         <p:spPr>
           <a:xfrm>
-            <a:off x="640080" y="2843784"/>
-            <a:ext cx="7863840" cy="320040"/>
-          </a:xfrm>
-          <a:prstGeom prst="rect">
-            <a:avLst/>
-          </a:prstGeom>
-          <a:noFill/>
-          <a:ln/>
-        </p:spPr>
-        <p:txBody>
-          <a:bodyPr wrap="square" lIns="0" tIns="0" rIns="0" bIns="0" rtlCol="0" anchor="ctr"/>
-          <a:lstStyle/>
-          <a:p>
-            <a:pPr indent="0" marL="0">
-              <a:buNone/>
-            </a:pPr>
-            <a:r>
-              <a:rPr lang="en-US" sz="1500" dirty="0">
+            <a:off x="594360" y="3419856"/>
+            <a:ext cx="7863840" cy="420624"/>
+          </a:xfrm>
+          <a:prstGeom prst="rect">
+            <a:avLst/>
+          </a:prstGeom>
+          <a:noFill/>
+          <a:ln/>
+        </p:spPr>
+        <p:txBody>
+          <a:bodyPr wrap="square" lIns="0" tIns="0" rIns="0" bIns="0" rtlCol="0" anchor="ctr"/>
+          <a:lstStyle/>
+          <a:p>
+            <a:pPr indent="0" marL="0">
+              <a:buNone/>
+            </a:pPr>
+            <a:r>
+              <a:rPr lang="en-US" sz="1700" b="1" dirty="0">
+                <a:solidFill>
+                  <a:srgbClr val="0E1C42"/>
+                </a:solidFill>
+                <a:latin typeface="Calibri" pitchFamily="34" charset="0"/>
+                <a:ea typeface="Calibri" pitchFamily="34" charset="-122"/>
+                <a:cs typeface="Calibri" pitchFamily="34" charset="-120"/>
+              </a:rPr>
+              <a:t>landmark  </a:t>
+            </a:r>
+            <a:pPr indent="0" marL="0">
+              <a:buNone/>
+            </a:pPr>
+            <a:r>
+              <a:rPr lang="en-US" sz="1400" dirty="0">
                 <a:solidFill>
                   <a:srgbClr val="1E293B"/>
                 </a:solidFill>
@@ -2637,87 +2728,9 @@
                 <a:ea typeface="Calibri" pitchFamily="34" charset="-122"/>
                 <a:cs typeface="Calibri" pitchFamily="34" charset="-120"/>
               </a:rPr>
-              <a:t>guiding → guide</a:t>
-            </a:r>
-            <a:endParaRPr lang="en-US" sz="1500" dirty="0"/>
-          </a:p>
-        </p:txBody>
-      </p:sp>
-      <p:sp>
-        <p:nvSpPr>
-          <p:cNvPr id="13" name="Text 11"/>
-          <p:cNvSpPr/>
-          <p:nvPr/>
-        </p:nvSpPr>
-        <p:spPr>
-          <a:xfrm>
-            <a:off x="457200" y="3273552"/>
-            <a:ext cx="8046720" cy="292608"/>
-          </a:xfrm>
-          <a:prstGeom prst="rect">
-            <a:avLst/>
-          </a:prstGeom>
-          <a:noFill/>
-          <a:ln/>
-        </p:spPr>
-        <p:txBody>
-          <a:bodyPr wrap="square" lIns="0" tIns="0" rIns="0" bIns="0" rtlCol="0" anchor="ctr"/>
-          <a:lstStyle/>
-          <a:p>
-            <a:pPr indent="0" marL="0">
-              <a:buNone/>
-            </a:pPr>
-            <a:r>
-              <a:rPr lang="en-US" sz="1100" b="1" spc="200" kern="0" dirty="0">
-                <a:solidFill>
-                  <a:srgbClr val="64748B"/>
-                </a:solidFill>
-                <a:latin typeface="Calibri" pitchFamily="34" charset="0"/>
-                <a:ea typeface="Calibri" pitchFamily="34" charset="-122"/>
-                <a:cs typeface="Calibri" pitchFamily="34" charset="-120"/>
-              </a:rPr>
-              <a:t>CONCEPT EXAMPLES</a:t>
-            </a:r>
-            <a:endParaRPr lang="en-US" sz="1100" dirty="0"/>
-          </a:p>
-        </p:txBody>
-      </p:sp>
-      <p:sp>
-        <p:nvSpPr>
-          <p:cNvPr id="14" name="Text 12"/>
-          <p:cNvSpPr/>
-          <p:nvPr/>
-        </p:nvSpPr>
-        <p:spPr>
-          <a:xfrm>
-            <a:off x="640080" y="3593592"/>
-            <a:ext cx="7863840" cy="320040"/>
-          </a:xfrm>
-          <a:prstGeom prst="rect">
-            <a:avLst/>
-          </a:prstGeom>
-          <a:noFill/>
-          <a:ln/>
-        </p:spPr>
-        <p:txBody>
-          <a:bodyPr wrap="square" lIns="0" tIns="0" rIns="0" bIns="0" rtlCol="0" anchor="ctr"/>
-          <a:lstStyle/>
-          <a:p>
-            <a:pPr indent="0" marL="0">
-              <a:buNone/>
-            </a:pPr>
-            <a:r>
-              <a:rPr lang="en-US" sz="1300" dirty="0">
-                <a:solidFill>
-                  <a:srgbClr val="1E293B"/>
-                </a:solidFill>
-                <a:latin typeface="Calibri" pitchFamily="34" charset="0"/>
-                <a:ea typeface="Calibri" pitchFamily="34" charset="-122"/>
-                <a:cs typeface="Calibri" pitchFamily="34" charset="-120"/>
-              </a:rPr>
-              <a:t>• 📌 Examples</a:t>
-            </a:r>
-            <a:endParaRPr lang="en-US" sz="1300" dirty="0"/>
+              <a:t>A well-known place or object that helps people find their way.</a:t>
+            </a:r>
+            <a:endParaRPr lang="en-US" sz="1700" dirty="0"/>
           </a:p>
         </p:txBody>
       </p:sp>
@@ -2735,7 +2748,7 @@
     <p:bg>
       <p:bgPr>
         <a:solidFill>
-          <a:srgbClr val="FFFFFF"/>
+          <a:srgbClr val="F8FAFC"/>
         </a:solidFill>
       </p:bgPr>
     </p:bg>
@@ -2755,80 +2768,116 @@
       </p:grpSpPr>
       <p:sp>
         <p:nvSpPr>
-          <p:cNvPr id="2" name="Text 0"/>
-          <p:cNvSpPr/>
-          <p:nvPr/>
-        </p:nvSpPr>
-        <p:spPr>
-          <a:xfrm>
-            <a:off x="365760" y="164592"/>
-            <a:ext cx="8412480" cy="566928"/>
-          </a:xfrm>
-          <a:prstGeom prst="rect">
-            <a:avLst/>
-          </a:prstGeom>
-          <a:noFill/>
-          <a:ln/>
-        </p:spPr>
-        <p:txBody>
-          <a:bodyPr wrap="square" lIns="0" tIns="0" rIns="0" bIns="0" rtlCol="0" anchor="ctr"/>
-          <a:lstStyle/>
-          <a:p>
-            <a:pPr algn="l" indent="0" marL="0">
-              <a:buNone/>
-            </a:pPr>
-            <a:r>
-              <a:rPr lang="en-US" sz="2800" b="1" dirty="0">
-                <a:solidFill>
-                  <a:srgbClr val="0E1C42"/>
-                </a:solidFill>
-                <a:latin typeface="Calibri" pitchFamily="34" charset="0"/>
-                <a:ea typeface="Calibri" pitchFamily="34" charset="-122"/>
-                <a:cs typeface="Calibri" pitchFamily="34" charset="-120"/>
-              </a:rPr>
-              <a:t>🔤 Vocabulary</a:t>
-            </a:r>
-            <a:endParaRPr lang="en-US" sz="2800" dirty="0"/>
-          </a:p>
-        </p:txBody>
-      </p:sp>
-      <p:sp>
-        <p:nvSpPr>
-          <p:cNvPr id="3" name="Shape 1"/>
-          <p:cNvSpPr/>
-          <p:nvPr/>
-        </p:nvSpPr>
-        <p:spPr>
-          <a:xfrm>
-            <a:off x="365760" y="749808"/>
-            <a:ext cx="8412480" cy="0"/>
-          </a:xfrm>
-          <a:prstGeom prst="line">
-            <a:avLst/>
-          </a:prstGeom>
-          <a:noFill/>
-          <a:ln w="19050">
-            <a:solidFill>
-              <a:srgbClr val="55C8E8"/>
-            </a:solidFill>
-            <a:prstDash val="solid"/>
-          </a:ln>
-        </p:spPr>
-      </p:sp>
-      <p:sp>
-        <p:nvSpPr>
-          <p:cNvPr id="4" name="Shape 2"/>
-          <p:cNvSpPr/>
-          <p:nvPr/>
-        </p:nvSpPr>
-        <p:spPr>
-          <a:xfrm>
-            <a:off x="457200" y="1005840"/>
-            <a:ext cx="3840480" cy="640080"/>
+          <p:cNvPr id="2" name="Shape 0"/>
+          <p:cNvSpPr/>
+          <p:nvPr/>
+        </p:nvSpPr>
+        <p:spPr>
+          <a:xfrm>
+            <a:off x="0" y="0"/>
+            <a:ext cx="9144000" cy="566928"/>
+          </a:xfrm>
+          <a:prstGeom prst="rect">
+            <a:avLst/>
+          </a:prstGeom>
+          <a:solidFill>
+            <a:srgbClr val="C7922C"/>
+          </a:solidFill>
+          <a:ln/>
+        </p:spPr>
+      </p:sp>
+      <p:sp>
+        <p:nvSpPr>
+          <p:cNvPr id="3" name="Text 1"/>
+          <p:cNvSpPr/>
+          <p:nvPr/>
+        </p:nvSpPr>
+        <p:spPr>
+          <a:xfrm>
+            <a:off x="365760" y="54864"/>
+            <a:ext cx="8412480" cy="457200"/>
+          </a:xfrm>
+          <a:prstGeom prst="rect">
+            <a:avLst/>
+          </a:prstGeom>
+          <a:noFill/>
+          <a:ln/>
+        </p:spPr>
+        <p:txBody>
+          <a:bodyPr wrap="square" lIns="0" tIns="0" rIns="0" bIns="0" rtlCol="0" anchor="ctr"/>
+          <a:lstStyle/>
+          <a:p>
+            <a:pPr indent="0" marL="0">
+              <a:buNone/>
+            </a:pPr>
+            <a:r>
+              <a:rPr lang="en-US" sz="2200" b="1" dirty="0">
+                <a:solidFill>
+                  <a:srgbClr val="FFFFFF"/>
+                </a:solidFill>
+                <a:latin typeface="Calibri" pitchFamily="34" charset="0"/>
+                <a:ea typeface="Calibri" pitchFamily="34" charset="-122"/>
+                <a:cs typeface="Calibri" pitchFamily="34" charset="-120"/>
+              </a:rPr>
+              <a:t>✏️  Grammar</a:t>
+            </a:r>
+            <a:endParaRPr lang="en-US" sz="2200" dirty="0"/>
+          </a:p>
+        </p:txBody>
+      </p:sp>
+      <p:sp>
+        <p:nvSpPr>
+          <p:cNvPr id="4" name="Text 2"/>
+          <p:cNvSpPr/>
+          <p:nvPr/>
+        </p:nvSpPr>
+        <p:spPr>
+          <a:xfrm>
+            <a:off x="365760" y="777240"/>
+            <a:ext cx="8229600" cy="237744"/>
+          </a:xfrm>
+          <a:prstGeom prst="rect">
+            <a:avLst/>
+          </a:prstGeom>
+          <a:noFill/>
+          <a:ln/>
+        </p:spPr>
+        <p:txBody>
+          <a:bodyPr wrap="square" lIns="0" tIns="0" rIns="0" bIns="0" rtlCol="0" anchor="ctr"/>
+          <a:lstStyle/>
+          <a:p>
+            <a:pPr indent="0" marL="0">
+              <a:buNone/>
+            </a:pPr>
+            <a:r>
+              <a:rPr lang="en-US" sz="1100" b="1" spc="100" kern="0" dirty="0">
+                <a:solidFill>
+                  <a:srgbClr val="C7922C"/>
+                </a:solidFill>
+                <a:latin typeface="Calibri" pitchFamily="34" charset="0"/>
+                <a:ea typeface="Calibri" pitchFamily="34" charset="-122"/>
+                <a:cs typeface="Calibri" pitchFamily="34" charset="-120"/>
+              </a:rPr>
+              <a:t>COMMAS IN DATES AND PLACES</a:t>
+            </a:r>
+            <a:endParaRPr lang="en-US" sz="1100" dirty="0"/>
+          </a:p>
+        </p:txBody>
+      </p:sp>
+      <p:sp>
+        <p:nvSpPr>
+          <p:cNvPr id="5" name="Shape 3"/>
+          <p:cNvSpPr/>
+          <p:nvPr/>
+        </p:nvSpPr>
+        <p:spPr>
+          <a:xfrm>
+            <a:off x="365760" y="1078992"/>
+            <a:ext cx="8412480" cy="658368"/>
           </a:xfrm>
           <a:prstGeom prst="roundRect">
             <a:avLst>
-              <a:gd name="adj" fmla="val 14286"/>
+              <a:gd name="adj" fmla="val 13889"/>
             </a:avLst>
           </a:prstGeom>
           <a:solidFill>
@@ -2846,50 +2895,30 @@
       </p:sp>
       <p:sp>
         <p:nvSpPr>
-          <p:cNvPr id="5" name="Text 3"/>
-          <p:cNvSpPr/>
-          <p:nvPr/>
-        </p:nvSpPr>
-        <p:spPr>
-          <a:xfrm>
-            <a:off x="594360" y="1060704"/>
-            <a:ext cx="3566160" cy="530352"/>
-          </a:xfrm>
-          <a:prstGeom prst="rect">
-            <a:avLst/>
-          </a:prstGeom>
-          <a:noFill/>
-          <a:ln/>
-        </p:spPr>
-        <p:txBody>
-          <a:bodyPr wrap="square" lIns="0" tIns="0" rIns="0" bIns="0" rtlCol="0" anchor="ctr"/>
-          <a:lstStyle/>
-          <a:p>
-            <a:pPr indent="0" marL="0">
-              <a:buNone/>
-            </a:pPr>
-            <a:r>
-              <a:rPr lang="en-US" sz="1500" b="1" dirty="0">
-                <a:solidFill>
-                  <a:srgbClr val="0E1C42"/>
-                </a:solidFill>
-                <a:latin typeface="Calibri" pitchFamily="34" charset="0"/>
-                <a:ea typeface="Calibri" pitchFamily="34" charset="-122"/>
-                <a:cs typeface="Calibri" pitchFamily="34" charset="-120"/>
-              </a:rPr>
-              <a:t>region</a:t>
-            </a:r>
-            <a:pPr indent="0" marL="0">
-              <a:buNone/>
-            </a:pPr>
-            <a:endParaRPr lang="en-US" sz="1500" dirty="0"/>
-          </a:p>
-          <a:p>
-            <a:pPr indent="0" marL="0">
-              <a:buNone/>
-            </a:pPr>
-            <a:r>
-              <a:rPr lang="en-US" sz="1200" dirty="0">
+          <p:cNvPr id="6" name="Text 4"/>
+          <p:cNvSpPr/>
+          <p:nvPr/>
+        </p:nvSpPr>
+        <p:spPr>
+          <a:xfrm>
+            <a:off x="594360" y="1225296"/>
+            <a:ext cx="7863840" cy="402336"/>
+          </a:xfrm>
+          <a:prstGeom prst="rect">
+            <a:avLst/>
+          </a:prstGeom>
+          <a:noFill/>
+          <a:ln/>
+        </p:spPr>
+        <p:txBody>
+          <a:bodyPr wrap="square" lIns="0" tIns="0" rIns="0" bIns="0" rtlCol="0" anchor="ctr"/>
+          <a:lstStyle/>
+          <a:p>
+            <a:pPr indent="0" marL="0">
+              <a:buNone/>
+            </a:pPr>
+            <a:r>
+              <a:rPr lang="en-US" sz="1600" dirty="0">
                 <a:solidFill>
                   <a:srgbClr val="1E293B"/>
                 </a:solidFill>
@@ -2897,30 +2926,30 @@
                 <a:ea typeface="Calibri" pitchFamily="34" charset="-122"/>
                 <a:cs typeface="Calibri" pitchFamily="34" charset="-120"/>
               </a:rPr>
-              <a:t>A large area of land that shares similar features.</a:t>
-            </a:r>
-            <a:endParaRPr lang="en-US" sz="1500" dirty="0"/>
-          </a:p>
-        </p:txBody>
-      </p:sp>
-      <p:sp>
-        <p:nvSpPr>
-          <p:cNvPr id="6" name="Shape 4"/>
-          <p:cNvSpPr/>
-          <p:nvPr/>
-        </p:nvSpPr>
-        <p:spPr>
-          <a:xfrm>
-            <a:off x="4572000" y="1005840"/>
-            <a:ext cx="3840480" cy="640080"/>
+              <a:t>The last letter was postmarked July 4 2023.</a:t>
+            </a:r>
+            <a:endParaRPr lang="en-US" sz="1600" dirty="0"/>
+          </a:p>
+        </p:txBody>
+      </p:sp>
+      <p:sp>
+        <p:nvSpPr>
+          <p:cNvPr id="7" name="Shape 5"/>
+          <p:cNvSpPr/>
+          <p:nvPr/>
+        </p:nvSpPr>
+        <p:spPr>
+          <a:xfrm>
+            <a:off x="365760" y="1810512"/>
+            <a:ext cx="8412480" cy="658368"/>
           </a:xfrm>
           <a:prstGeom prst="roundRect">
             <a:avLst>
-              <a:gd name="adj" fmla="val 14286"/>
+              <a:gd name="adj" fmla="val 13889"/>
             </a:avLst>
           </a:prstGeom>
           <a:solidFill>
-            <a:srgbClr val="FEF6E8"/>
+            <a:srgbClr val="FFFFFF"/>
           </a:solidFill>
           <a:ln/>
           <a:effectLst>
@@ -2934,50 +2963,30 @@
       </p:sp>
       <p:sp>
         <p:nvSpPr>
-          <p:cNvPr id="7" name="Text 5"/>
-          <p:cNvSpPr/>
-          <p:nvPr/>
-        </p:nvSpPr>
-        <p:spPr>
-          <a:xfrm>
-            <a:off x="4709160" y="1060704"/>
-            <a:ext cx="3566160" cy="530352"/>
-          </a:xfrm>
-          <a:prstGeom prst="rect">
-            <a:avLst/>
-          </a:prstGeom>
-          <a:noFill/>
-          <a:ln/>
-        </p:spPr>
-        <p:txBody>
-          <a:bodyPr wrap="square" lIns="0" tIns="0" rIns="0" bIns="0" rtlCol="0" anchor="ctr"/>
-          <a:lstStyle/>
-          <a:p>
-            <a:pPr indent="0" marL="0">
-              <a:buNone/>
-            </a:pPr>
-            <a:r>
-              <a:rPr lang="en-US" sz="1500" b="1" dirty="0">
-                <a:solidFill>
-                  <a:srgbClr val="0E1C42"/>
-                </a:solidFill>
-                <a:latin typeface="Calibri" pitchFamily="34" charset="0"/>
-                <a:ea typeface="Calibri" pitchFamily="34" charset="-122"/>
-                <a:cs typeface="Calibri" pitchFamily="34" charset="-120"/>
-              </a:rPr>
-              <a:t>climate</a:t>
-            </a:r>
-            <a:pPr indent="0" marL="0">
-              <a:buNone/>
-            </a:pPr>
-            <a:endParaRPr lang="en-US" sz="1500" dirty="0"/>
-          </a:p>
-          <a:p>
-            <a:pPr indent="0" marL="0">
-              <a:buNone/>
-            </a:pPr>
-            <a:r>
-              <a:rPr lang="en-US" sz="1200" dirty="0">
+          <p:cNvPr id="8" name="Text 6"/>
+          <p:cNvSpPr/>
+          <p:nvPr/>
+        </p:nvSpPr>
+        <p:spPr>
+          <a:xfrm>
+            <a:off x="594360" y="1956816"/>
+            <a:ext cx="7863840" cy="402336"/>
+          </a:xfrm>
+          <a:prstGeom prst="rect">
+            <a:avLst/>
+          </a:prstGeom>
+          <a:noFill/>
+          <a:ln/>
+        </p:spPr>
+        <p:txBody>
+          <a:bodyPr wrap="square" lIns="0" tIns="0" rIns="0" bIns="0" rtlCol="0" anchor="ctr"/>
+          <a:lstStyle/>
+          <a:p>
+            <a:pPr indent="0" marL="0">
+              <a:buNone/>
+            </a:pPr>
+            <a:r>
+              <a:rPr lang="en-US" sz="1600" dirty="0">
                 <a:solidFill>
                   <a:srgbClr val="1E293B"/>
                 </a:solidFill>
@@ -2985,26 +2994,26 @@
                 <a:ea typeface="Calibri" pitchFamily="34" charset="-122"/>
                 <a:cs typeface="Calibri" pitchFamily="34" charset="-120"/>
               </a:rPr>
-              <a:t>The typical weather in a place over a long time.</a:t>
-            </a:r>
-            <a:endParaRPr lang="en-US" sz="1500" dirty="0"/>
-          </a:p>
-        </p:txBody>
-      </p:sp>
-      <p:sp>
-        <p:nvSpPr>
-          <p:cNvPr id="8" name="Shape 6"/>
-          <p:cNvSpPr/>
-          <p:nvPr/>
-        </p:nvSpPr>
-        <p:spPr>
-          <a:xfrm>
-            <a:off x="457200" y="1755648"/>
-            <a:ext cx="3840480" cy="640080"/>
+              <a:t>We stopped in Santa Fe New Mexico overnight.</a:t>
+            </a:r>
+            <a:endParaRPr lang="en-US" sz="1600" dirty="0"/>
+          </a:p>
+        </p:txBody>
+      </p:sp>
+      <p:sp>
+        <p:nvSpPr>
+          <p:cNvPr id="9" name="Shape 7"/>
+          <p:cNvSpPr/>
+          <p:nvPr/>
+        </p:nvSpPr>
+        <p:spPr>
+          <a:xfrm>
+            <a:off x="365760" y="2542032"/>
+            <a:ext cx="8412480" cy="658368"/>
           </a:xfrm>
           <a:prstGeom prst="roundRect">
             <a:avLst>
-              <a:gd name="adj" fmla="val 14286"/>
+              <a:gd name="adj" fmla="val 13889"/>
             </a:avLst>
           </a:prstGeom>
           <a:solidFill>
@@ -3022,50 +3031,30 @@
       </p:sp>
       <p:sp>
         <p:nvSpPr>
-          <p:cNvPr id="9" name="Text 7"/>
-          <p:cNvSpPr/>
-          <p:nvPr/>
-        </p:nvSpPr>
-        <p:spPr>
-          <a:xfrm>
-            <a:off x="594360" y="1810512"/>
-            <a:ext cx="3566160" cy="530352"/>
-          </a:xfrm>
-          <a:prstGeom prst="rect">
-            <a:avLst/>
-          </a:prstGeom>
-          <a:noFill/>
-          <a:ln/>
-        </p:spPr>
-        <p:txBody>
-          <a:bodyPr wrap="square" lIns="0" tIns="0" rIns="0" bIns="0" rtlCol="0" anchor="ctr"/>
-          <a:lstStyle/>
-          <a:p>
-            <a:pPr indent="0" marL="0">
-              <a:buNone/>
-            </a:pPr>
-            <a:r>
-              <a:rPr lang="en-US" sz="1500" b="1" dirty="0">
-                <a:solidFill>
-                  <a:srgbClr val="0E1C42"/>
-                </a:solidFill>
-                <a:latin typeface="Calibri" pitchFamily="34" charset="0"/>
-                <a:ea typeface="Calibri" pitchFamily="34" charset="-122"/>
-                <a:cs typeface="Calibri" pitchFamily="34" charset="-120"/>
-              </a:rPr>
-              <a:t>geography</a:t>
-            </a:r>
-            <a:pPr indent="0" marL="0">
-              <a:buNone/>
-            </a:pPr>
-            <a:endParaRPr lang="en-US" sz="1500" dirty="0"/>
-          </a:p>
-          <a:p>
-            <a:pPr indent="0" marL="0">
-              <a:buNone/>
-            </a:pPr>
-            <a:r>
-              <a:rPr lang="en-US" sz="1200" dirty="0">
+          <p:cNvPr id="10" name="Text 8"/>
+          <p:cNvSpPr/>
+          <p:nvPr/>
+        </p:nvSpPr>
+        <p:spPr>
+          <a:xfrm>
+            <a:off x="594360" y="2688336"/>
+            <a:ext cx="7863840" cy="402336"/>
+          </a:xfrm>
+          <a:prstGeom prst="rect">
+            <a:avLst/>
+          </a:prstGeom>
+          <a:noFill/>
+          <a:ln/>
+        </p:spPr>
+        <p:txBody>
+          <a:bodyPr wrap="square" lIns="0" tIns="0" rIns="0" bIns="0" rtlCol="0" anchor="ctr"/>
+          <a:lstStyle/>
+          <a:p>
+            <a:pPr indent="0" marL="0">
+              <a:buNone/>
+            </a:pPr>
+            <a:r>
+              <a:rPr lang="en-US" sz="1600" dirty="0">
                 <a:solidFill>
                   <a:srgbClr val="1E293B"/>
                 </a:solidFill>
@@ -3073,30 +3062,30 @@
                 <a:ea typeface="Calibri" pitchFamily="34" charset="-122"/>
                 <a:cs typeface="Calibri" pitchFamily="34" charset="-120"/>
               </a:rPr>
-              <a:t>The study of places, land, and features of the earth.</a:t>
-            </a:r>
-            <a:endParaRPr lang="en-US" sz="1500" dirty="0"/>
-          </a:p>
-        </p:txBody>
-      </p:sp>
-      <p:sp>
-        <p:nvSpPr>
-          <p:cNvPr id="10" name="Shape 8"/>
-          <p:cNvSpPr/>
-          <p:nvPr/>
-        </p:nvSpPr>
-        <p:spPr>
-          <a:xfrm>
-            <a:off x="4572000" y="1755648"/>
-            <a:ext cx="3840480" cy="640080"/>
+              <a:t>School starts on August 19 2024 this year.</a:t>
+            </a:r>
+            <a:endParaRPr lang="en-US" sz="1600" dirty="0"/>
+          </a:p>
+        </p:txBody>
+      </p:sp>
+      <p:sp>
+        <p:nvSpPr>
+          <p:cNvPr id="11" name="Shape 9"/>
+          <p:cNvSpPr/>
+          <p:nvPr/>
+        </p:nvSpPr>
+        <p:spPr>
+          <a:xfrm>
+            <a:off x="365760" y="3273552"/>
+            <a:ext cx="8412480" cy="658368"/>
           </a:xfrm>
           <a:prstGeom prst="roundRect">
             <a:avLst>
-              <a:gd name="adj" fmla="val 14286"/>
+              <a:gd name="adj" fmla="val 13889"/>
             </a:avLst>
           </a:prstGeom>
           <a:solidFill>
-            <a:srgbClr val="FEF6E8"/>
+            <a:srgbClr val="FFFFFF"/>
           </a:solidFill>
           <a:ln/>
           <a:effectLst>
@@ -3110,50 +3099,30 @@
       </p:sp>
       <p:sp>
         <p:nvSpPr>
-          <p:cNvPr id="11" name="Text 9"/>
-          <p:cNvSpPr/>
-          <p:nvPr/>
-        </p:nvSpPr>
-        <p:spPr>
-          <a:xfrm>
-            <a:off x="4709160" y="1810512"/>
-            <a:ext cx="3566160" cy="530352"/>
-          </a:xfrm>
-          <a:prstGeom prst="rect">
-            <a:avLst/>
-          </a:prstGeom>
-          <a:noFill/>
-          <a:ln/>
-        </p:spPr>
-        <p:txBody>
-          <a:bodyPr wrap="square" lIns="0" tIns="0" rIns="0" bIns="0" rtlCol="0" anchor="ctr"/>
-          <a:lstStyle/>
-          <a:p>
-            <a:pPr indent="0" marL="0">
-              <a:buNone/>
-            </a:pPr>
-            <a:r>
-              <a:rPr lang="en-US" sz="1500" b="1" dirty="0">
-                <a:solidFill>
-                  <a:srgbClr val="0E1C42"/>
-                </a:solidFill>
-                <a:latin typeface="Calibri" pitchFamily="34" charset="0"/>
-                <a:ea typeface="Calibri" pitchFamily="34" charset="-122"/>
-                <a:cs typeface="Calibri" pitchFamily="34" charset="-120"/>
-              </a:rPr>
-              <a:t>landmark</a:t>
-            </a:r>
-            <a:pPr indent="0" marL="0">
-              <a:buNone/>
-            </a:pPr>
-            <a:endParaRPr lang="en-US" sz="1500" dirty="0"/>
-          </a:p>
-          <a:p>
-            <a:pPr indent="0" marL="0">
-              <a:buNone/>
-            </a:pPr>
-            <a:r>
-              <a:rPr lang="en-US" sz="1200" dirty="0">
+          <p:cNvPr id="12" name="Text 10"/>
+          <p:cNvSpPr/>
+          <p:nvPr/>
+        </p:nvSpPr>
+        <p:spPr>
+          <a:xfrm>
+            <a:off x="594360" y="3419856"/>
+            <a:ext cx="7863840" cy="402336"/>
+          </a:xfrm>
+          <a:prstGeom prst="rect">
+            <a:avLst/>
+          </a:prstGeom>
+          <a:noFill/>
+          <a:ln/>
+        </p:spPr>
+        <p:txBody>
+          <a:bodyPr wrap="square" lIns="0" tIns="0" rIns="0" bIns="0" rtlCol="0" anchor="ctr"/>
+          <a:lstStyle/>
+          <a:p>
+            <a:pPr indent="0" marL="0">
+              <a:buNone/>
+            </a:pPr>
+            <a:r>
+              <a:rPr lang="en-US" sz="1600" dirty="0">
                 <a:solidFill>
                   <a:srgbClr val="1E293B"/>
                 </a:solidFill>
@@ -3161,7 +3130,46 @@
                 <a:ea typeface="Calibri" pitchFamily="34" charset="-122"/>
                 <a:cs typeface="Calibri" pitchFamily="34" charset="-120"/>
               </a:rPr>
-              <a:t>A well-known place or object that helps people find their way.</a:t>
+              <a:t>Her family lives in Portland Maine now.</a:t>
+            </a:r>
+            <a:endParaRPr lang="en-US" sz="1600" dirty="0"/>
+          </a:p>
+        </p:txBody>
+      </p:sp>
+      <p:sp>
+        <p:nvSpPr>
+          <p:cNvPr id="13" name="Text 11"/>
+          <p:cNvSpPr/>
+          <p:nvPr/>
+        </p:nvSpPr>
+        <p:spPr>
+          <a:xfrm>
+            <a:off x="365760" y="4050792"/>
+            <a:ext cx="8412480" cy="365760"/>
+          </a:xfrm>
+          <a:prstGeom prst="rect">
+            <a:avLst/>
+          </a:prstGeom>
+          <a:noFill/>
+          <a:ln/>
+        </p:spPr>
+        <p:txBody>
+          <a:bodyPr wrap="square" lIns="0" tIns="0" rIns="0" bIns="0" rtlCol="0" anchor="ctr"/>
+          <a:lstStyle/>
+          <a:p>
+            <a:pPr indent="0" marL="0">
+              <a:buNone/>
+            </a:pPr>
+            <a:r>
+              <a:rPr lang="en-US" sz="1500" i="1" dirty="0">
+                <a:solidFill>
+                  <a:srgbClr val="64748B"/>
+                </a:solidFill>
+                <a:latin typeface="Calibri" pitchFamily="34" charset="0"/>
+                <a:ea typeface="Calibri" pitchFamily="34" charset="-122"/>
+                <a:cs typeface="Calibri" pitchFamily="34" charset="-120"/>
+              </a:rPr>
+              <a:t>Your turn. Tap the word that a comma should come right after. Tap a word to check — green means you got it.</a:t>
             </a:r>
             <a:endParaRPr lang="en-US" sz="1500" dirty="0"/>
           </a:p>
@@ -3181,7 +3189,7 @@
     <p:bg>
       <p:bgPr>
         <a:solidFill>
-          <a:srgbClr val="E5F7FC"/>
+          <a:srgbClr val="F8FAFC"/>
         </a:solidFill>
       </p:bgPr>
     </p:bg>
@@ -3201,180 +3209,116 @@
       </p:grpSpPr>
       <p:sp>
         <p:nvSpPr>
-          <p:cNvPr id="2" name="Text 0"/>
-          <p:cNvSpPr/>
-          <p:nvPr/>
-        </p:nvSpPr>
-        <p:spPr>
-          <a:xfrm>
-            <a:off x="365760" y="164592"/>
-            <a:ext cx="5943600" cy="566928"/>
-          </a:xfrm>
-          <a:prstGeom prst="rect">
-            <a:avLst/>
-          </a:prstGeom>
-          <a:noFill/>
-          <a:ln/>
-        </p:spPr>
-        <p:txBody>
-          <a:bodyPr wrap="square" lIns="0" tIns="0" rIns="0" bIns="0" rtlCol="0" anchor="ctr"/>
-          <a:lstStyle/>
-          <a:p>
-            <a:pPr algn="l" indent="0" marL="0">
-              <a:buNone/>
-            </a:pPr>
-            <a:r>
-              <a:rPr lang="en-US" sz="2800" b="1" dirty="0">
-                <a:solidFill>
-                  <a:srgbClr val="0E1C42"/>
-                </a:solidFill>
-                <a:latin typeface="Calibri" pitchFamily="34" charset="0"/>
-                <a:ea typeface="Calibri" pitchFamily="34" charset="-122"/>
-                <a:cs typeface="Calibri" pitchFamily="34" charset="-120"/>
-              </a:rPr>
-              <a:t>🔠 Spelling: Adding -ed and -ing to base words</a:t>
-            </a:r>
-            <a:endParaRPr lang="en-US" sz="2800" dirty="0"/>
-          </a:p>
-        </p:txBody>
-      </p:sp>
-      <p:sp>
-        <p:nvSpPr>
-          <p:cNvPr id="3" name="Shape 1"/>
-          <p:cNvSpPr/>
-          <p:nvPr/>
-        </p:nvSpPr>
-        <p:spPr>
-          <a:xfrm>
-            <a:off x="365760" y="749808"/>
-            <a:ext cx="8412480" cy="0"/>
-          </a:xfrm>
-          <a:prstGeom prst="line">
-            <a:avLst/>
-          </a:prstGeom>
-          <a:noFill/>
-          <a:ln w="19050">
-            <a:solidFill>
-              <a:srgbClr val="5CB85C"/>
-            </a:solidFill>
-            <a:prstDash val="solid"/>
-          </a:ln>
-        </p:spPr>
-      </p:sp>
-      <p:sp>
-        <p:nvSpPr>
-          <p:cNvPr id="4" name="Shape 2"/>
-          <p:cNvSpPr/>
-          <p:nvPr/>
-        </p:nvSpPr>
-        <p:spPr>
-          <a:xfrm>
-            <a:off x="6492240" y="173736"/>
-            <a:ext cx="2286000" cy="502920"/>
+          <p:cNvPr id="2" name="Shape 0"/>
+          <p:cNvSpPr/>
+          <p:nvPr/>
+        </p:nvSpPr>
+        <p:spPr>
+          <a:xfrm>
+            <a:off x="0" y="0"/>
+            <a:ext cx="9144000" cy="566928"/>
+          </a:xfrm>
+          <a:prstGeom prst="rect">
+            <a:avLst/>
+          </a:prstGeom>
+          <a:solidFill>
+            <a:srgbClr val="C7922C"/>
+          </a:solidFill>
+          <a:ln/>
+        </p:spPr>
+      </p:sp>
+      <p:sp>
+        <p:nvSpPr>
+          <p:cNvPr id="3" name="Text 1"/>
+          <p:cNvSpPr/>
+          <p:nvPr/>
+        </p:nvSpPr>
+        <p:spPr>
+          <a:xfrm>
+            <a:off x="365760" y="54864"/>
+            <a:ext cx="8412480" cy="457200"/>
+          </a:xfrm>
+          <a:prstGeom prst="rect">
+            <a:avLst/>
+          </a:prstGeom>
+          <a:noFill/>
+          <a:ln/>
+        </p:spPr>
+        <p:txBody>
+          <a:bodyPr wrap="square" lIns="0" tIns="0" rIns="0" bIns="0" rtlCol="0" anchor="ctr"/>
+          <a:lstStyle/>
+          <a:p>
+            <a:pPr indent="0" marL="0">
+              <a:buNone/>
+            </a:pPr>
+            <a:r>
+              <a:rPr lang="en-US" sz="2200" b="1" dirty="0">
+                <a:solidFill>
+                  <a:srgbClr val="FFFFFF"/>
+                </a:solidFill>
+                <a:latin typeface="Calibri" pitchFamily="34" charset="0"/>
+                <a:ea typeface="Calibri" pitchFamily="34" charset="-122"/>
+                <a:cs typeface="Calibri" pitchFamily="34" charset="-120"/>
+              </a:rPr>
+              <a:t>✏️  Grammar</a:t>
+            </a:r>
+            <a:endParaRPr lang="en-US" sz="2200" dirty="0"/>
+          </a:p>
+        </p:txBody>
+      </p:sp>
+      <p:sp>
+        <p:nvSpPr>
+          <p:cNvPr id="4" name="Text 2"/>
+          <p:cNvSpPr/>
+          <p:nvPr/>
+        </p:nvSpPr>
+        <p:spPr>
+          <a:xfrm>
+            <a:off x="365760" y="777240"/>
+            <a:ext cx="8229600" cy="237744"/>
+          </a:xfrm>
+          <a:prstGeom prst="rect">
+            <a:avLst/>
+          </a:prstGeom>
+          <a:noFill/>
+          <a:ln/>
+        </p:spPr>
+        <p:txBody>
+          <a:bodyPr wrap="square" lIns="0" tIns="0" rIns="0" bIns="0" rtlCol="0" anchor="ctr"/>
+          <a:lstStyle/>
+          <a:p>
+            <a:pPr indent="0" marL="0">
+              <a:buNone/>
+            </a:pPr>
+            <a:r>
+              <a:rPr lang="en-US" sz="1100" b="1" spc="100" kern="0" dirty="0">
+                <a:solidFill>
+                  <a:srgbClr val="C7922C"/>
+                </a:solidFill>
+                <a:latin typeface="Calibri" pitchFamily="34" charset="0"/>
+                <a:ea typeface="Calibri" pitchFamily="34" charset="-122"/>
+                <a:cs typeface="Calibri" pitchFamily="34" charset="-120"/>
+              </a:rPr>
+              <a:t>COMMAS IN DATES AND PLACES</a:t>
+            </a:r>
+            <a:endParaRPr lang="en-US" sz="1100" dirty="0"/>
+          </a:p>
+        </p:txBody>
+      </p:sp>
+      <p:sp>
+        <p:nvSpPr>
+          <p:cNvPr id="5" name="Shape 3"/>
+          <p:cNvSpPr/>
+          <p:nvPr/>
+        </p:nvSpPr>
+        <p:spPr>
+          <a:xfrm>
+            <a:off x="365760" y="1078992"/>
+            <a:ext cx="8412480" cy="658368"/>
           </a:xfrm>
           <a:prstGeom prst="roundRect">
             <a:avLst>
-              <a:gd name="adj" fmla="val 21818"/>
-            </a:avLst>
-          </a:prstGeom>
-          <a:solidFill>
-            <a:srgbClr val="5CB85C"/>
-          </a:solidFill>
-          <a:ln/>
-        </p:spPr>
-      </p:sp>
-      <p:sp>
-        <p:nvSpPr>
-          <p:cNvPr id="5" name="Text 3"/>
-          <p:cNvSpPr/>
-          <p:nvPr/>
-        </p:nvSpPr>
-        <p:spPr>
-          <a:xfrm>
-            <a:off x="6492240" y="173736"/>
-            <a:ext cx="2286000" cy="502920"/>
-          </a:xfrm>
-          <a:prstGeom prst="rect">
-            <a:avLst/>
-          </a:prstGeom>
-          <a:noFill/>
-          <a:ln/>
-        </p:spPr>
-        <p:txBody>
-          <a:bodyPr wrap="square" lIns="0" tIns="0" rIns="0" bIns="0" rtlCol="0" anchor="ctr"/>
-          <a:lstStyle/>
-          <a:p>
-            <a:pPr algn="ctr" indent="0" marL="0">
-              <a:buNone/>
-            </a:pPr>
-            <a:r>
-              <a:rPr lang="en-US" sz="1100" b="1" dirty="0">
-                <a:solidFill>
-                  <a:srgbClr val="0E1C42"/>
-                </a:solidFill>
-                <a:latin typeface="Calibri" pitchFamily="34" charset="0"/>
-                <a:ea typeface="Calibri" pitchFamily="34" charset="-122"/>
-                <a:cs typeface="Calibri" pitchFamily="34" charset="-120"/>
-              </a:rPr>
-              <a:t>CHAT PROMPT</a:t>
-            </a:r>
-            <a:endParaRPr lang="en-US" sz="1100" dirty="0"/>
-          </a:p>
-        </p:txBody>
-      </p:sp>
-      <p:sp>
-        <p:nvSpPr>
-          <p:cNvPr id="6" name="Text 4"/>
-          <p:cNvSpPr/>
-          <p:nvPr/>
-        </p:nvSpPr>
-        <p:spPr>
-          <a:xfrm>
-            <a:off x="457200" y="1005840"/>
-            <a:ext cx="8046720" cy="292608"/>
-          </a:xfrm>
-          <a:prstGeom prst="rect">
-            <a:avLst/>
-          </a:prstGeom>
-          <a:noFill/>
-          <a:ln/>
-        </p:spPr>
-        <p:txBody>
-          <a:bodyPr wrap="square" lIns="0" tIns="0" rIns="0" bIns="0" rtlCol="0" anchor="ctr"/>
-          <a:lstStyle/>
-          <a:p>
-            <a:pPr indent="0" marL="0">
-              <a:buNone/>
-            </a:pPr>
-            <a:r>
-              <a:rPr lang="en-US" sz="1100" b="1" spc="200" kern="0" dirty="0">
-                <a:solidFill>
-                  <a:srgbClr val="C7922C"/>
-                </a:solidFill>
-                <a:latin typeface="Calibri" pitchFamily="34" charset="0"/>
-                <a:ea typeface="Calibri" pitchFamily="34" charset="-122"/>
-                <a:cs typeface="Calibri" pitchFamily="34" charset="-120"/>
-              </a:rPr>
-              <a:t>WORD BANK — Sort these words!</a:t>
-            </a:r>
-            <a:endParaRPr lang="en-US" sz="1100" dirty="0"/>
-          </a:p>
-        </p:txBody>
-      </p:sp>
-      <p:sp>
-        <p:nvSpPr>
-          <p:cNvPr id="7" name="Shape 5"/>
-          <p:cNvSpPr/>
-          <p:nvPr/>
-        </p:nvSpPr>
-        <p:spPr>
-          <a:xfrm>
-            <a:off x="457200" y="1371600"/>
-            <a:ext cx="8229600" cy="914400"/>
-          </a:xfrm>
-          <a:prstGeom prst="roundRect">
-            <a:avLst>
-              <a:gd name="adj" fmla="val 10000"/>
+              <a:gd name="adj" fmla="val 13889"/>
             </a:avLst>
           </a:prstGeom>
           <a:solidFill>
@@ -3392,38 +3336,66 @@
       </p:sp>
       <p:sp>
         <p:nvSpPr>
-          <p:cNvPr id="8" name="Text 6"/>
-          <p:cNvSpPr/>
-          <p:nvPr/>
-        </p:nvSpPr>
-        <p:spPr>
-          <a:xfrm>
-            <a:off x="640080" y="1463040"/>
-            <a:ext cx="7863840" cy="731520"/>
-          </a:xfrm>
-          <a:prstGeom prst="rect">
-            <a:avLst/>
-          </a:prstGeom>
-          <a:noFill/>
-          <a:ln/>
-        </p:spPr>
-        <p:txBody>
-          <a:bodyPr wrap="square" lIns="0" tIns="0" rIns="0" bIns="0" rtlCol="0" anchor="ctr"/>
-          <a:lstStyle/>
-          <a:p>
-            <a:pPr algn="ctr" indent="0" marL="0">
+          <p:cNvPr id="6" name="Text 4"/>
+          <p:cNvSpPr/>
+          <p:nvPr/>
+        </p:nvSpPr>
+        <p:spPr>
+          <a:xfrm>
+            <a:off x="594360" y="1225296"/>
+            <a:ext cx="7863840" cy="402336"/>
+          </a:xfrm>
+          <a:prstGeom prst="rect">
+            <a:avLst/>
+          </a:prstGeom>
+          <a:noFill/>
+          <a:ln/>
+        </p:spPr>
+        <p:txBody>
+          <a:bodyPr wrap="square" lIns="0" tIns="0" rIns="0" bIns="0" rtlCol="0" anchor="ctr"/>
+          <a:lstStyle/>
+          <a:p>
+            <a:pPr indent="0" marL="0">
               <a:buNone/>
             </a:pPr>
             <a:r>
               <a:rPr lang="en-US" sz="1600" dirty="0">
                 <a:solidFill>
-                  <a:srgbClr val="0E1C42"/>
-                </a:solidFill>
-                <a:latin typeface="Calibri" pitchFamily="34" charset="0"/>
-                <a:ea typeface="Calibri" pitchFamily="34" charset="-122"/>
-                <a:cs typeface="Calibri" pitchFamily="34" charset="-120"/>
-              </a:rPr>
-              <a:t>mailing     stopped     planned     writing     using     traveled     visited     mapping</a:t>
+                  <a:srgbClr val="1E293B"/>
+                </a:solidFill>
+                <a:latin typeface="Calibri" pitchFamily="34" charset="0"/>
+                <a:ea typeface="Calibri" pitchFamily="34" charset="-122"/>
+                <a:cs typeface="Calibri" pitchFamily="34" charset="-120"/>
+              </a:rPr>
+              <a:t>The last letter was postmarked July </a:t>
+            </a:r>
+            <a:pPr indent="0" marL="0">
+              <a:buNone/>
+            </a:pPr>
+            <a:r>
+              <a:rPr lang="en-US" sz="1600" b="1" dirty="0">
+                <a:solidFill>
+                  <a:srgbClr val="34B76F"/>
+                </a:solidFill>
+                <a:latin typeface="Calibri" pitchFamily="34" charset="0"/>
+                <a:ea typeface="Calibri" pitchFamily="34" charset="-122"/>
+                <a:cs typeface="Calibri" pitchFamily="34" charset="-120"/>
+              </a:rPr>
+              <a:t>4</a:t>
+            </a:r>
+            <a:pPr indent="0" marL="0">
+              <a:buNone/>
+            </a:pPr>
+            <a:r>
+              <a:rPr lang="en-US" sz="1600" dirty="0">
+                <a:solidFill>
+                  <a:srgbClr val="1E293B"/>
+                </a:solidFill>
+                <a:latin typeface="Calibri" pitchFamily="34" charset="0"/>
+                <a:ea typeface="Calibri" pitchFamily="34" charset="-122"/>
+                <a:cs typeface="Calibri" pitchFamily="34" charset="-120"/>
+              </a:rPr>
+              <a:t> 2023.</a:t>
             </a:r>
             <a:endParaRPr lang="en-US" sz="1600" dirty="0"/>
           </a:p>
@@ -3431,22 +3403,22 @@
       </p:sp>
       <p:sp>
         <p:nvSpPr>
-          <p:cNvPr id="9" name="Shape 7"/>
-          <p:cNvSpPr/>
-          <p:nvPr/>
-        </p:nvSpPr>
-        <p:spPr>
-          <a:xfrm>
-            <a:off x="457200" y="2468880"/>
-            <a:ext cx="3794760" cy="457200"/>
+          <p:cNvPr id="7" name="Shape 5"/>
+          <p:cNvSpPr/>
+          <p:nvPr/>
+        </p:nvSpPr>
+        <p:spPr>
+          <a:xfrm>
+            <a:off x="365760" y="1810512"/>
+            <a:ext cx="8412480" cy="658368"/>
           </a:xfrm>
           <a:prstGeom prst="roundRect">
             <a:avLst>
-              <a:gd name="adj" fmla="val 20000"/>
+              <a:gd name="adj" fmla="val 13889"/>
             </a:avLst>
           </a:prstGeom>
           <a:solidFill>
-            <a:srgbClr val="F0E8FF"/>
+            <a:srgbClr val="FFFFFF"/>
           </a:solidFill>
           <a:ln/>
           <a:effectLst>
@@ -3460,61 +3432,89 @@
       </p:sp>
       <p:sp>
         <p:nvSpPr>
-          <p:cNvPr id="10" name="Text 8"/>
-          <p:cNvSpPr/>
-          <p:nvPr/>
-        </p:nvSpPr>
-        <p:spPr>
-          <a:xfrm>
-            <a:off x="548640" y="2514600"/>
-            <a:ext cx="3611880" cy="365760"/>
-          </a:xfrm>
-          <a:prstGeom prst="rect">
-            <a:avLst/>
-          </a:prstGeom>
-          <a:noFill/>
-          <a:ln/>
-        </p:spPr>
-        <p:txBody>
-          <a:bodyPr wrap="square" lIns="0" tIns="0" rIns="0" bIns="0" rtlCol="0" anchor="ctr"/>
-          <a:lstStyle/>
-          <a:p>
-            <a:pPr algn="ctr" indent="0" marL="0">
-              <a:buNone/>
-            </a:pPr>
-            <a:r>
-              <a:rPr lang="en-US" sz="1400" b="1" dirty="0">
-                <a:solidFill>
-                  <a:srgbClr val="0E1C42"/>
-                </a:solidFill>
-                <a:latin typeface="Calibri" pitchFamily="34" charset="0"/>
-                <a:ea typeface="Calibri" pitchFamily="34" charset="-122"/>
-                <a:cs typeface="Calibri" pitchFamily="34" charset="-120"/>
-              </a:rPr>
-              <a:t>add -ing</a:t>
-            </a:r>
-            <a:endParaRPr lang="en-US" sz="1400" dirty="0"/>
-          </a:p>
-        </p:txBody>
-      </p:sp>
-      <p:sp>
-        <p:nvSpPr>
-          <p:cNvPr id="11" name="Shape 9"/>
-          <p:cNvSpPr/>
-          <p:nvPr/>
-        </p:nvSpPr>
-        <p:spPr>
-          <a:xfrm>
-            <a:off x="4480560" y="2468880"/>
-            <a:ext cx="3794760" cy="457200"/>
+          <p:cNvPr id="8" name="Text 6"/>
+          <p:cNvSpPr/>
+          <p:nvPr/>
+        </p:nvSpPr>
+        <p:spPr>
+          <a:xfrm>
+            <a:off x="594360" y="1956816"/>
+            <a:ext cx="7863840" cy="402336"/>
+          </a:xfrm>
+          <a:prstGeom prst="rect">
+            <a:avLst/>
+          </a:prstGeom>
+          <a:noFill/>
+          <a:ln/>
+        </p:spPr>
+        <p:txBody>
+          <a:bodyPr wrap="square" lIns="0" tIns="0" rIns="0" bIns="0" rtlCol="0" anchor="ctr"/>
+          <a:lstStyle/>
+          <a:p>
+            <a:pPr indent="0" marL="0">
+              <a:buNone/>
+            </a:pPr>
+            <a:r>
+              <a:rPr lang="en-US" sz="1600" dirty="0">
+                <a:solidFill>
+                  <a:srgbClr val="1E293B"/>
+                </a:solidFill>
+                <a:latin typeface="Calibri" pitchFamily="34" charset="0"/>
+                <a:ea typeface="Calibri" pitchFamily="34" charset="-122"/>
+                <a:cs typeface="Calibri" pitchFamily="34" charset="-120"/>
+              </a:rPr>
+              <a:t>We stopped in Santa </a:t>
+            </a:r>
+            <a:pPr indent="0" marL="0">
+              <a:buNone/>
+            </a:pPr>
+            <a:r>
+              <a:rPr lang="en-US" sz="1600" b="1" dirty="0">
+                <a:solidFill>
+                  <a:srgbClr val="34B76F"/>
+                </a:solidFill>
+                <a:latin typeface="Calibri" pitchFamily="34" charset="0"/>
+                <a:ea typeface="Calibri" pitchFamily="34" charset="-122"/>
+                <a:cs typeface="Calibri" pitchFamily="34" charset="-120"/>
+              </a:rPr>
+              <a:t>Fe</a:t>
+            </a:r>
+            <a:pPr indent="0" marL="0">
+              <a:buNone/>
+            </a:pPr>
+            <a:r>
+              <a:rPr lang="en-US" sz="1600" dirty="0">
+                <a:solidFill>
+                  <a:srgbClr val="1E293B"/>
+                </a:solidFill>
+                <a:latin typeface="Calibri" pitchFamily="34" charset="0"/>
+                <a:ea typeface="Calibri" pitchFamily="34" charset="-122"/>
+                <a:cs typeface="Calibri" pitchFamily="34" charset="-120"/>
+              </a:rPr>
+              <a:t> New Mexico overnight.</a:t>
+            </a:r>
+            <a:endParaRPr lang="en-US" sz="1600" dirty="0"/>
+          </a:p>
+        </p:txBody>
+      </p:sp>
+      <p:sp>
+        <p:nvSpPr>
+          <p:cNvPr id="9" name="Shape 7"/>
+          <p:cNvSpPr/>
+          <p:nvPr/>
+        </p:nvSpPr>
+        <p:spPr>
+          <a:xfrm>
+            <a:off x="365760" y="2542032"/>
+            <a:ext cx="8412480" cy="658368"/>
           </a:xfrm>
           <a:prstGeom prst="roundRect">
             <a:avLst>
-              <a:gd name="adj" fmla="val 20000"/>
+              <a:gd name="adj" fmla="val 13889"/>
             </a:avLst>
           </a:prstGeom>
           <a:solidFill>
-            <a:srgbClr val="F0E8FF"/>
+            <a:srgbClr val="FEF6E8"/>
           </a:solidFill>
           <a:ln/>
           <a:effectLst>
@@ -3528,40 +3528,203 @@
       </p:sp>
       <p:sp>
         <p:nvSpPr>
+          <p:cNvPr id="10" name="Text 8"/>
+          <p:cNvSpPr/>
+          <p:nvPr/>
+        </p:nvSpPr>
+        <p:spPr>
+          <a:xfrm>
+            <a:off x="594360" y="2688336"/>
+            <a:ext cx="7863840" cy="402336"/>
+          </a:xfrm>
+          <a:prstGeom prst="rect">
+            <a:avLst/>
+          </a:prstGeom>
+          <a:noFill/>
+          <a:ln/>
+        </p:spPr>
+        <p:txBody>
+          <a:bodyPr wrap="square" lIns="0" tIns="0" rIns="0" bIns="0" rtlCol="0" anchor="ctr"/>
+          <a:lstStyle/>
+          <a:p>
+            <a:pPr indent="0" marL="0">
+              <a:buNone/>
+            </a:pPr>
+            <a:r>
+              <a:rPr lang="en-US" sz="1600" dirty="0">
+                <a:solidFill>
+                  <a:srgbClr val="1E293B"/>
+                </a:solidFill>
+                <a:latin typeface="Calibri" pitchFamily="34" charset="0"/>
+                <a:ea typeface="Calibri" pitchFamily="34" charset="-122"/>
+                <a:cs typeface="Calibri" pitchFamily="34" charset="-120"/>
+              </a:rPr>
+              <a:t>School starts on August </a:t>
+            </a:r>
+            <a:pPr indent="0" marL="0">
+              <a:buNone/>
+            </a:pPr>
+            <a:r>
+              <a:rPr lang="en-US" sz="1600" b="1" dirty="0">
+                <a:solidFill>
+                  <a:srgbClr val="34B76F"/>
+                </a:solidFill>
+                <a:latin typeface="Calibri" pitchFamily="34" charset="0"/>
+                <a:ea typeface="Calibri" pitchFamily="34" charset="-122"/>
+                <a:cs typeface="Calibri" pitchFamily="34" charset="-120"/>
+              </a:rPr>
+              <a:t>19</a:t>
+            </a:r>
+            <a:pPr indent="0" marL="0">
+              <a:buNone/>
+            </a:pPr>
+            <a:r>
+              <a:rPr lang="en-US" sz="1600" dirty="0">
+                <a:solidFill>
+                  <a:srgbClr val="1E293B"/>
+                </a:solidFill>
+                <a:latin typeface="Calibri" pitchFamily="34" charset="0"/>
+                <a:ea typeface="Calibri" pitchFamily="34" charset="-122"/>
+                <a:cs typeface="Calibri" pitchFamily="34" charset="-120"/>
+              </a:rPr>
+              <a:t> 2024 this year.</a:t>
+            </a:r>
+            <a:endParaRPr lang="en-US" sz="1600" dirty="0"/>
+          </a:p>
+        </p:txBody>
+      </p:sp>
+      <p:sp>
+        <p:nvSpPr>
+          <p:cNvPr id="11" name="Shape 9"/>
+          <p:cNvSpPr/>
+          <p:nvPr/>
+        </p:nvSpPr>
+        <p:spPr>
+          <a:xfrm>
+            <a:off x="365760" y="3273552"/>
+            <a:ext cx="8412480" cy="658368"/>
+          </a:xfrm>
+          <a:prstGeom prst="roundRect">
+            <a:avLst>
+              <a:gd name="adj" fmla="val 13889"/>
+            </a:avLst>
+          </a:prstGeom>
+          <a:solidFill>
+            <a:srgbClr val="FFFFFF"/>
+          </a:solidFill>
+          <a:ln/>
+          <a:effectLst>
+            <a:outerShdw sx="100000" sy="100000" kx="0" ky="0" algn="bl" rotWithShape="0" blurRad="101600" dist="38100" dir="2700000">
+              <a:srgbClr val="000000">
+                <a:alpha val="12000"/>
+              </a:srgbClr>
+            </a:outerShdw>
+          </a:effectLst>
+        </p:spPr>
+      </p:sp>
+      <p:sp>
+        <p:nvSpPr>
           <p:cNvPr id="12" name="Text 10"/>
           <p:cNvSpPr/>
           <p:nvPr/>
         </p:nvSpPr>
         <p:spPr>
           <a:xfrm>
-            <a:off x="4572000" y="2514600"/>
-            <a:ext cx="3611880" cy="365760"/>
-          </a:xfrm>
-          <a:prstGeom prst="rect">
-            <a:avLst/>
-          </a:prstGeom>
-          <a:noFill/>
-          <a:ln/>
-        </p:spPr>
-        <p:txBody>
-          <a:bodyPr wrap="square" lIns="0" tIns="0" rIns="0" bIns="0" rtlCol="0" anchor="ctr"/>
-          <a:lstStyle/>
-          <a:p>
-            <a:pPr algn="ctr" indent="0" marL="0">
-              <a:buNone/>
-            </a:pPr>
-            <a:r>
-              <a:rPr lang="en-US" sz="1400" b="1" dirty="0">
-                <a:solidFill>
-                  <a:srgbClr val="0E1C42"/>
-                </a:solidFill>
-                <a:latin typeface="Calibri" pitchFamily="34" charset="0"/>
-                <a:ea typeface="Calibri" pitchFamily="34" charset="-122"/>
-                <a:cs typeface="Calibri" pitchFamily="34" charset="-120"/>
-              </a:rPr>
-              <a:t>double + -ed</a:t>
-            </a:r>
-            <a:endParaRPr lang="en-US" sz="1400" dirty="0"/>
+            <a:off x="594360" y="3419856"/>
+            <a:ext cx="7863840" cy="402336"/>
+          </a:xfrm>
+          <a:prstGeom prst="rect">
+            <a:avLst/>
+          </a:prstGeom>
+          <a:noFill/>
+          <a:ln/>
+        </p:spPr>
+        <p:txBody>
+          <a:bodyPr wrap="square" lIns="0" tIns="0" rIns="0" bIns="0" rtlCol="0" anchor="ctr"/>
+          <a:lstStyle/>
+          <a:p>
+            <a:pPr indent="0" marL="0">
+              <a:buNone/>
+            </a:pPr>
+            <a:r>
+              <a:rPr lang="en-US" sz="1600" dirty="0">
+                <a:solidFill>
+                  <a:srgbClr val="1E293B"/>
+                </a:solidFill>
+                <a:latin typeface="Calibri" pitchFamily="34" charset="0"/>
+                <a:ea typeface="Calibri" pitchFamily="34" charset="-122"/>
+                <a:cs typeface="Calibri" pitchFamily="34" charset="-120"/>
+              </a:rPr>
+              <a:t>Her family lives in </a:t>
+            </a:r>
+            <a:pPr indent="0" marL="0">
+              <a:buNone/>
+            </a:pPr>
+            <a:r>
+              <a:rPr lang="en-US" sz="1600" b="1" dirty="0">
+                <a:solidFill>
+                  <a:srgbClr val="34B76F"/>
+                </a:solidFill>
+                <a:latin typeface="Calibri" pitchFamily="34" charset="0"/>
+                <a:ea typeface="Calibri" pitchFamily="34" charset="-122"/>
+                <a:cs typeface="Calibri" pitchFamily="34" charset="-120"/>
+              </a:rPr>
+              <a:t>Portland</a:t>
+            </a:r>
+            <a:pPr indent="0" marL="0">
+              <a:buNone/>
+            </a:pPr>
+            <a:r>
+              <a:rPr lang="en-US" sz="1600" dirty="0">
+                <a:solidFill>
+                  <a:srgbClr val="1E293B"/>
+                </a:solidFill>
+                <a:latin typeface="Calibri" pitchFamily="34" charset="0"/>
+                <a:ea typeface="Calibri" pitchFamily="34" charset="-122"/>
+                <a:cs typeface="Calibri" pitchFamily="34" charset="-120"/>
+              </a:rPr>
+              <a:t> Maine now.</a:t>
+            </a:r>
+            <a:endParaRPr lang="en-US" sz="1600" dirty="0"/>
+          </a:p>
+        </p:txBody>
+      </p:sp>
+      <p:sp>
+        <p:nvSpPr>
+          <p:cNvPr id="13" name="Text 11"/>
+          <p:cNvSpPr/>
+          <p:nvPr/>
+        </p:nvSpPr>
+        <p:spPr>
+          <a:xfrm>
+            <a:off x="365760" y="4050792"/>
+            <a:ext cx="8412480" cy="365760"/>
+          </a:xfrm>
+          <a:prstGeom prst="rect">
+            <a:avLst/>
+          </a:prstGeom>
+          <a:noFill/>
+          <a:ln/>
+        </p:spPr>
+        <p:txBody>
+          <a:bodyPr wrap="square" lIns="0" tIns="0" rIns="0" bIns="0" rtlCol="0" anchor="ctr"/>
+          <a:lstStyle/>
+          <a:p>
+            <a:pPr indent="0" marL="0">
+              <a:buNone/>
+            </a:pPr>
+            <a:r>
+              <a:rPr lang="en-US" sz="1500" b="1" dirty="0">
+                <a:solidFill>
+                  <a:srgbClr val="34B76F"/>
+                </a:solidFill>
+                <a:latin typeface="Calibri" pitchFamily="34" charset="0"/>
+                <a:ea typeface="Calibri" pitchFamily="34" charset="-122"/>
+                <a:cs typeface="Calibri" pitchFamily="34" charset="-120"/>
+              </a:rPr>
+              <a:t>✅  Answers revealed</a:t>
+            </a:r>
+            <a:endParaRPr lang="en-US" sz="1500" dirty="0"/>
           </a:p>
         </p:txBody>
       </p:sp>
@@ -3579,7 +3742,7 @@
     <p:bg>
       <p:bgPr>
         <a:solidFill>
-          <a:srgbClr val="E5F7FC"/>
+          <a:srgbClr val="F8FAFC"/>
         </a:solidFill>
       </p:bgPr>
     </p:bg>
@@ -3599,30 +3762,89 @@
       </p:grpSpPr>
       <p:sp>
         <p:nvSpPr>
-          <p:cNvPr id="2" name="Text 0"/>
-          <p:cNvSpPr/>
-          <p:nvPr/>
-        </p:nvSpPr>
-        <p:spPr>
-          <a:xfrm>
-            <a:off x="365760" y="164592"/>
-            <a:ext cx="5943600" cy="566928"/>
-          </a:xfrm>
-          <a:prstGeom prst="rect">
-            <a:avLst/>
-          </a:prstGeom>
-          <a:noFill/>
-          <a:ln/>
-        </p:spPr>
-        <p:txBody>
-          <a:bodyPr wrap="square" lIns="0" tIns="0" rIns="0" bIns="0" rtlCol="0" anchor="ctr"/>
-          <a:lstStyle/>
-          <a:p>
-            <a:pPr algn="l" indent="0" marL="0">
-              <a:buNone/>
-            </a:pPr>
-            <a:r>
-              <a:rPr lang="en-US" sz="2800" b="1" dirty="0">
+          <p:cNvPr id="2" name="Shape 0"/>
+          <p:cNvSpPr/>
+          <p:nvPr/>
+        </p:nvSpPr>
+        <p:spPr>
+          <a:xfrm>
+            <a:off x="0" y="0"/>
+            <a:ext cx="9144000" cy="566928"/>
+          </a:xfrm>
+          <a:prstGeom prst="rect">
+            <a:avLst/>
+          </a:prstGeom>
+          <a:solidFill>
+            <a:srgbClr val="0E1C42"/>
+          </a:solidFill>
+          <a:ln/>
+        </p:spPr>
+      </p:sp>
+      <p:sp>
+        <p:nvSpPr>
+          <p:cNvPr id="3" name="Text 1"/>
+          <p:cNvSpPr/>
+          <p:nvPr/>
+        </p:nvSpPr>
+        <p:spPr>
+          <a:xfrm>
+            <a:off x="365760" y="54864"/>
+            <a:ext cx="8412480" cy="457200"/>
+          </a:xfrm>
+          <a:prstGeom prst="rect">
+            <a:avLst/>
+          </a:prstGeom>
+          <a:noFill/>
+          <a:ln/>
+        </p:spPr>
+        <p:txBody>
+          <a:bodyPr wrap="square" lIns="0" tIns="0" rIns="0" bIns="0" rtlCol="0" anchor="ctr"/>
+          <a:lstStyle/>
+          <a:p>
+            <a:pPr indent="0" marL="0">
+              <a:buNone/>
+            </a:pPr>
+            <a:r>
+              <a:rPr lang="en-US" sz="2200" b="1" dirty="0">
+                <a:solidFill>
+                  <a:srgbClr val="FFFFFF"/>
+                </a:solidFill>
+                <a:latin typeface="Calibri" pitchFamily="34" charset="0"/>
+                <a:ea typeface="Calibri" pitchFamily="34" charset="-122"/>
+                <a:cs typeface="Calibri" pitchFamily="34" charset="-120"/>
+              </a:rPr>
+              <a:t>🔠  Spelling</a:t>
+            </a:r>
+            <a:endParaRPr lang="en-US" sz="2200" dirty="0"/>
+          </a:p>
+        </p:txBody>
+      </p:sp>
+      <p:sp>
+        <p:nvSpPr>
+          <p:cNvPr id="4" name="Text 2"/>
+          <p:cNvSpPr/>
+          <p:nvPr/>
+        </p:nvSpPr>
+        <p:spPr>
+          <a:xfrm>
+            <a:off x="365760" y="777240"/>
+            <a:ext cx="8229600" cy="237744"/>
+          </a:xfrm>
+          <a:prstGeom prst="rect">
+            <a:avLst/>
+          </a:prstGeom>
+          <a:noFill/>
+          <a:ln/>
+        </p:spPr>
+        <p:txBody>
+          <a:bodyPr wrap="square" lIns="0" tIns="0" rIns="0" bIns="0" rtlCol="0" anchor="ctr"/>
+          <a:lstStyle/>
+          <a:p>
+            <a:pPr indent="0" marL="0">
+              <a:buNone/>
+            </a:pPr>
+            <a:r>
+              <a:rPr lang="en-US" sz="1100" b="1" spc="100" kern="0" dirty="0">
                 <a:solidFill>
                   <a:srgbClr val="0E1C42"/>
                 </a:solidFill>
@@ -3630,116 +3852,76 @@
                 <a:ea typeface="Calibri" pitchFamily="34" charset="-122"/>
                 <a:cs typeface="Calibri" pitchFamily="34" charset="-120"/>
               </a:rPr>
-              <a:t>🔠 Spelling: Adding -ed and -ing to base words — Sorted</a:t>
-            </a:r>
-            <a:endParaRPr lang="en-US" sz="2800" dirty="0"/>
-          </a:p>
-        </p:txBody>
-      </p:sp>
-      <p:sp>
-        <p:nvSpPr>
-          <p:cNvPr id="3" name="Shape 1"/>
-          <p:cNvSpPr/>
-          <p:nvPr/>
-        </p:nvSpPr>
-        <p:spPr>
-          <a:xfrm>
-            <a:off x="365760" y="749808"/>
-            <a:ext cx="8412480" cy="0"/>
-          </a:xfrm>
-          <a:prstGeom prst="line">
-            <a:avLst/>
-          </a:prstGeom>
-          <a:noFill/>
+              <a:t>ADDING -ED AND -ING TO BASE WORDS</a:t>
+            </a:r>
+            <a:endParaRPr lang="en-US" sz="1100" dirty="0"/>
+          </a:p>
+        </p:txBody>
+      </p:sp>
+      <p:sp>
+        <p:nvSpPr>
+          <p:cNvPr id="5" name="Text 3"/>
+          <p:cNvSpPr/>
+          <p:nvPr/>
+        </p:nvSpPr>
+        <p:spPr>
+          <a:xfrm>
+            <a:off x="365760" y="1078992"/>
+            <a:ext cx="8229600" cy="237744"/>
+          </a:xfrm>
+          <a:prstGeom prst="rect">
+            <a:avLst/>
+          </a:prstGeom>
+          <a:noFill/>
+          <a:ln/>
+        </p:spPr>
+        <p:txBody>
+          <a:bodyPr wrap="square" lIns="0" tIns="0" rIns="0" bIns="0" rtlCol="0" anchor="ctr"/>
+          <a:lstStyle/>
+          <a:p>
+            <a:pPr indent="0" marL="0">
+              <a:buNone/>
+            </a:pPr>
+            <a:r>
+              <a:rPr lang="en-US" sz="1100" b="1" spc="100" kern="0" dirty="0">
+                <a:solidFill>
+                  <a:srgbClr val="64748B"/>
+                </a:solidFill>
+                <a:latin typeface="Calibri" pitchFamily="34" charset="0"/>
+                <a:ea typeface="Calibri" pitchFamily="34" charset="-122"/>
+                <a:cs typeface="Calibri" pitchFamily="34" charset="-120"/>
+              </a:rPr>
+              <a:t>WORD BANK</a:t>
+            </a:r>
+            <a:endParaRPr lang="en-US" sz="1100" dirty="0"/>
+          </a:p>
+        </p:txBody>
+      </p:sp>
+      <p:sp>
+        <p:nvSpPr>
+          <p:cNvPr id="6" name="Shape 4"/>
+          <p:cNvSpPr/>
+          <p:nvPr/>
+        </p:nvSpPr>
+        <p:spPr>
+          <a:xfrm>
+            <a:off x="365760" y="1353312"/>
+            <a:ext cx="8412480" cy="1005840"/>
+          </a:xfrm>
+          <a:prstGeom prst="roundRect">
+            <a:avLst>
+              <a:gd name="adj" fmla="val 9091"/>
+            </a:avLst>
+          </a:prstGeom>
+          <a:solidFill>
+            <a:srgbClr val="FFFFFF"/>
+          </a:solidFill>
           <a:ln w="19050">
             <a:solidFill>
-              <a:srgbClr val="5CB85C"/>
+              <a:srgbClr val="0E1C42"/>
             </a:solidFill>
             <a:prstDash val="solid"/>
           </a:ln>
-        </p:spPr>
-      </p:sp>
-      <p:sp>
-        <p:nvSpPr>
-          <p:cNvPr id="4" name="Shape 2"/>
-          <p:cNvSpPr/>
-          <p:nvPr/>
-        </p:nvSpPr>
-        <p:spPr>
-          <a:xfrm>
-            <a:off x="6492240" y="173736"/>
-            <a:ext cx="2286000" cy="502920"/>
-          </a:xfrm>
-          <a:prstGeom prst="roundRect">
-            <a:avLst>
-              <a:gd name="adj" fmla="val 21818"/>
-            </a:avLst>
-          </a:prstGeom>
-          <a:solidFill>
-            <a:srgbClr val="5CB85C"/>
-          </a:solidFill>
-          <a:ln/>
-        </p:spPr>
-      </p:sp>
-      <p:sp>
-        <p:nvSpPr>
-          <p:cNvPr id="5" name="Text 3"/>
-          <p:cNvSpPr/>
-          <p:nvPr/>
-        </p:nvSpPr>
-        <p:spPr>
-          <a:xfrm>
-            <a:off x="6492240" y="173736"/>
-            <a:ext cx="2286000" cy="502920"/>
-          </a:xfrm>
-          <a:prstGeom prst="rect">
-            <a:avLst/>
-          </a:prstGeom>
-          <a:noFill/>
-          <a:ln/>
-        </p:spPr>
-        <p:txBody>
-          <a:bodyPr wrap="square" lIns="0" tIns="0" rIns="0" bIns="0" rtlCol="0" anchor="ctr"/>
-          <a:lstStyle/>
-          <a:p>
-            <a:pPr algn="ctr" indent="0" marL="0">
-              <a:buNone/>
-            </a:pPr>
-            <a:r>
-              <a:rPr lang="en-US" sz="1100" b="1" dirty="0">
-                <a:solidFill>
-                  <a:srgbClr val="0E1C42"/>
-                </a:solidFill>
-                <a:latin typeface="Calibri" pitchFamily="34" charset="0"/>
-                <a:ea typeface="Calibri" pitchFamily="34" charset="-122"/>
-                <a:cs typeface="Calibri" pitchFamily="34" charset="-120"/>
-              </a:rPr>
-              <a:t>CHAT PROMPT</a:t>
-            </a:r>
-            <a:endParaRPr lang="en-US" sz="1100" dirty="0"/>
-          </a:p>
-        </p:txBody>
-      </p:sp>
-      <p:sp>
-        <p:nvSpPr>
-          <p:cNvPr id="6" name="Shape 4"/>
-          <p:cNvSpPr/>
-          <p:nvPr/>
-        </p:nvSpPr>
-        <p:spPr>
-          <a:xfrm>
-            <a:off x="457200" y="1005840"/>
-            <a:ext cx="3794760" cy="457200"/>
-          </a:xfrm>
-          <a:prstGeom prst="roundRect">
-            <a:avLst>
-              <a:gd name="adj" fmla="val 20000"/>
-            </a:avLst>
-          </a:prstGeom>
-          <a:solidFill>
-            <a:srgbClr val="F0E8FF"/>
-          </a:solidFill>
-          <a:ln/>
           <a:effectLst>
             <a:outerShdw sx="100000" sy="100000" kx="0" ky="0" algn="bl" rotWithShape="0" blurRad="101600" dist="38100" dir="2700000">
               <a:srgbClr val="000000">
@@ -3757,24 +3939,24 @@
         </p:nvSpPr>
         <p:spPr>
           <a:xfrm>
-            <a:off x="548640" y="1051560"/>
-            <a:ext cx="3611880" cy="365760"/>
-          </a:xfrm>
-          <a:prstGeom prst="rect">
-            <a:avLst/>
-          </a:prstGeom>
-          <a:noFill/>
-          <a:ln/>
-        </p:spPr>
-        <p:txBody>
-          <a:bodyPr wrap="square" lIns="0" tIns="0" rIns="0" bIns="0" rtlCol="0" anchor="ctr"/>
-          <a:lstStyle/>
-          <a:p>
-            <a:pPr algn="ctr" indent="0" marL="0">
-              <a:buNone/>
-            </a:pPr>
-            <a:r>
-              <a:rPr lang="en-US" sz="1400" b="1" dirty="0">
+            <a:off x="594360" y="1481328"/>
+            <a:ext cx="7955280" cy="749808"/>
+          </a:xfrm>
+          <a:prstGeom prst="rect">
+            <a:avLst/>
+          </a:prstGeom>
+          <a:noFill/>
+          <a:ln/>
+        </p:spPr>
+        <p:txBody>
+          <a:bodyPr wrap="square" lIns="0" tIns="0" rIns="0" bIns="0" rtlCol="0" anchor="ctr"/>
+          <a:lstStyle/>
+          <a:p>
+            <a:pPr indent="0" marL="0">
+              <a:buNone/>
+            </a:pPr>
+            <a:r>
+              <a:rPr lang="en-US" sz="1700" dirty="0">
                 <a:solidFill>
                   <a:srgbClr val="0E1C42"/>
                 </a:solidFill>
@@ -3782,9 +3964,9 @@
                 <a:ea typeface="Calibri" pitchFamily="34" charset="-122"/>
                 <a:cs typeface="Calibri" pitchFamily="34" charset="-120"/>
               </a:rPr>
-              <a:t>add -ing</a:t>
-            </a:r>
-            <a:endParaRPr lang="en-US" sz="1400" dirty="0"/>
+              <a:t>mailing   ·   stopped   ·   planned   ·   writing   ·   using   ·   traveled   ·   visited   ·   mapping</a:t>
+            </a:r>
+            <a:endParaRPr lang="en-US" sz="1700" dirty="0"/>
           </a:p>
         </p:txBody>
       </p:sp>
@@ -3796,180 +3978,34 @@
         </p:nvSpPr>
         <p:spPr>
           <a:xfrm>
-            <a:off x="548640" y="1554480"/>
-            <a:ext cx="3611880" cy="320040"/>
-          </a:xfrm>
-          <a:prstGeom prst="rect">
-            <a:avLst/>
-          </a:prstGeom>
-          <a:noFill/>
-          <a:ln/>
-        </p:spPr>
-        <p:txBody>
-          <a:bodyPr wrap="square" lIns="0" tIns="0" rIns="0" bIns="0" rtlCol="0" anchor="ctr"/>
-          <a:lstStyle/>
-          <a:p>
-            <a:pPr algn="ctr" indent="0" marL="0">
-              <a:buNone/>
-            </a:pPr>
-            <a:r>
-              <a:rPr lang="en-US" sz="1400" b="1" dirty="0">
-                <a:solidFill>
-                  <a:srgbClr val="34B76F"/>
-                </a:solidFill>
-                <a:latin typeface="Calibri" pitchFamily="34" charset="0"/>
-                <a:ea typeface="Calibri" pitchFamily="34" charset="-122"/>
-                <a:cs typeface="Calibri" pitchFamily="34" charset="-120"/>
-              </a:rPr>
-              <a:t>mailing</a:t>
-            </a:r>
-            <a:endParaRPr lang="en-US" sz="1400" dirty="0"/>
-          </a:p>
-        </p:txBody>
-      </p:sp>
-      <p:sp>
-        <p:nvSpPr>
-          <p:cNvPr id="9" name="Shape 7"/>
-          <p:cNvSpPr/>
-          <p:nvPr/>
-        </p:nvSpPr>
-        <p:spPr>
-          <a:xfrm>
-            <a:off x="4480560" y="1005840"/>
-            <a:ext cx="3794760" cy="457200"/>
-          </a:xfrm>
-          <a:prstGeom prst="roundRect">
-            <a:avLst>
-              <a:gd name="adj" fmla="val 20000"/>
-            </a:avLst>
-          </a:prstGeom>
-          <a:solidFill>
-            <a:srgbClr val="F0E8FF"/>
-          </a:solidFill>
-          <a:ln/>
-          <a:effectLst>
-            <a:outerShdw sx="100000" sy="100000" kx="0" ky="0" algn="bl" rotWithShape="0" blurRad="101600" dist="38100" dir="2700000">
-              <a:srgbClr val="000000">
-                <a:alpha val="12000"/>
-              </a:srgbClr>
-            </a:outerShdw>
-          </a:effectLst>
-        </p:spPr>
-      </p:sp>
-      <p:sp>
-        <p:nvSpPr>
-          <p:cNvPr id="10" name="Text 8"/>
-          <p:cNvSpPr/>
-          <p:nvPr/>
-        </p:nvSpPr>
-        <p:spPr>
-          <a:xfrm>
-            <a:off x="4572000" y="1051560"/>
-            <a:ext cx="3611880" cy="365760"/>
-          </a:xfrm>
-          <a:prstGeom prst="rect">
-            <a:avLst/>
-          </a:prstGeom>
-          <a:noFill/>
-          <a:ln/>
-        </p:spPr>
-        <p:txBody>
-          <a:bodyPr wrap="square" lIns="0" tIns="0" rIns="0" bIns="0" rtlCol="0" anchor="ctr"/>
-          <a:lstStyle/>
-          <a:p>
-            <a:pPr algn="ctr" indent="0" marL="0">
-              <a:buNone/>
-            </a:pPr>
-            <a:r>
-              <a:rPr lang="en-US" sz="1400" b="1" dirty="0">
-                <a:solidFill>
-                  <a:srgbClr val="0E1C42"/>
-                </a:solidFill>
-                <a:latin typeface="Calibri" pitchFamily="34" charset="0"/>
-                <a:ea typeface="Calibri" pitchFamily="34" charset="-122"/>
-                <a:cs typeface="Calibri" pitchFamily="34" charset="-120"/>
-              </a:rPr>
-              <a:t>double + -ed</a:t>
-            </a:r>
-            <a:endParaRPr lang="en-US" sz="1400" dirty="0"/>
-          </a:p>
-        </p:txBody>
-      </p:sp>
-      <p:sp>
-        <p:nvSpPr>
-          <p:cNvPr id="11" name="Text 9"/>
-          <p:cNvSpPr/>
-          <p:nvPr/>
-        </p:nvSpPr>
-        <p:spPr>
-          <a:xfrm>
-            <a:off x="4572000" y="1554480"/>
-            <a:ext cx="3611880" cy="320040"/>
-          </a:xfrm>
-          <a:prstGeom prst="rect">
-            <a:avLst/>
-          </a:prstGeom>
-          <a:noFill/>
-          <a:ln/>
-        </p:spPr>
-        <p:txBody>
-          <a:bodyPr wrap="square" lIns="0" tIns="0" rIns="0" bIns="0" rtlCol="0" anchor="ctr"/>
-          <a:lstStyle/>
-          <a:p>
-            <a:pPr algn="ctr" indent="0" marL="0">
-              <a:buNone/>
-            </a:pPr>
-            <a:r>
-              <a:rPr lang="en-US" sz="1400" b="1" dirty="0">
-                <a:solidFill>
-                  <a:srgbClr val="34B76F"/>
-                </a:solidFill>
-                <a:latin typeface="Calibri" pitchFamily="34" charset="0"/>
-                <a:ea typeface="Calibri" pitchFamily="34" charset="-122"/>
-                <a:cs typeface="Calibri" pitchFamily="34" charset="-120"/>
-              </a:rPr>
-              <a:t>stopped</a:t>
-            </a:r>
-            <a:endParaRPr lang="en-US" sz="1400" dirty="0"/>
-          </a:p>
-        </p:txBody>
-      </p:sp>
-      <p:sp>
-        <p:nvSpPr>
-          <p:cNvPr id="12" name="Text 10"/>
-          <p:cNvSpPr/>
-          <p:nvPr/>
-        </p:nvSpPr>
-        <p:spPr>
-          <a:xfrm>
-            <a:off x="4572000" y="1901952"/>
-            <a:ext cx="3611880" cy="320040"/>
-          </a:xfrm>
-          <a:prstGeom prst="rect">
-            <a:avLst/>
-          </a:prstGeom>
-          <a:noFill/>
-          <a:ln/>
-        </p:spPr>
-        <p:txBody>
-          <a:bodyPr wrap="square" lIns="0" tIns="0" rIns="0" bIns="0" rtlCol="0" anchor="ctr"/>
-          <a:lstStyle/>
-          <a:p>
-            <a:pPr algn="ctr" indent="0" marL="0">
-              <a:buNone/>
-            </a:pPr>
-            <a:r>
-              <a:rPr lang="en-US" sz="1400" b="1" dirty="0">
-                <a:solidFill>
-                  <a:srgbClr val="34B76F"/>
-                </a:solidFill>
-                <a:latin typeface="Calibri" pitchFamily="34" charset="0"/>
-                <a:ea typeface="Calibri" pitchFamily="34" charset="-122"/>
-                <a:cs typeface="Calibri" pitchFamily="34" charset="-120"/>
-              </a:rPr>
-              <a:t>planned</a:t>
-            </a:r>
-            <a:endParaRPr lang="en-US" sz="1400" dirty="0"/>
+            <a:off x="365760" y="2514600"/>
+            <a:ext cx="8412480" cy="457200"/>
+          </a:xfrm>
+          <a:prstGeom prst="rect">
+            <a:avLst/>
+          </a:prstGeom>
+          <a:noFill/>
+          <a:ln/>
+        </p:spPr>
+        <p:txBody>
+          <a:bodyPr wrap="square" lIns="0" tIns="0" rIns="0" bIns="0" rtlCol="0" anchor="ctr"/>
+          <a:lstStyle/>
+          <a:p>
+            <a:pPr indent="0" marL="0">
+              <a:buNone/>
+            </a:pPr>
+            <a:r>
+              <a:rPr lang="en-US" sz="1500" i="1" dirty="0">
+                <a:solidFill>
+                  <a:srgbClr val="64748B"/>
+                </a:solidFill>
+                <a:latin typeface="Calibri" pitchFamily="34" charset="0"/>
+                <a:ea typeface="Calibri" pitchFamily="34" charset="-122"/>
+                <a:cs typeface="Calibri" pitchFamily="34" charset="-120"/>
+              </a:rPr>
+              <a:t>Which column does each word belong in?  Columns: add -ing  |  double + -ed  |  Drop e + -ing  |  Add -ed  |  Double + -ing</a:t>
+            </a:r>
+            <a:endParaRPr lang="en-US" sz="1500" dirty="0"/>
           </a:p>
         </p:txBody>
       </p:sp>
@@ -3987,7 +4023,7 @@
     <p:bg>
       <p:bgPr>
         <a:solidFill>
-          <a:srgbClr val="FFFFFF"/>
+          <a:srgbClr val="F8FAFC"/>
         </a:solidFill>
       </p:bgPr>
     </p:bg>
@@ -4007,30 +4043,89 @@
       </p:grpSpPr>
       <p:sp>
         <p:nvSpPr>
-          <p:cNvPr id="2" name="Text 0"/>
-          <p:cNvSpPr/>
-          <p:nvPr/>
-        </p:nvSpPr>
-        <p:spPr>
-          <a:xfrm>
-            <a:off x="365760" y="164592"/>
-            <a:ext cx="8412480" cy="566928"/>
-          </a:xfrm>
-          <a:prstGeom prst="rect">
-            <a:avLst/>
-          </a:prstGeom>
-          <a:noFill/>
-          <a:ln/>
-        </p:spPr>
-        <p:txBody>
-          <a:bodyPr wrap="square" lIns="0" tIns="0" rIns="0" bIns="0" rtlCol="0" anchor="ctr"/>
-          <a:lstStyle/>
-          <a:p>
-            <a:pPr algn="l" indent="0" marL="0">
-              <a:buNone/>
-            </a:pPr>
-            <a:r>
-              <a:rPr lang="en-US" sz="2800" b="1" dirty="0">
+          <p:cNvPr id="2" name="Shape 0"/>
+          <p:cNvSpPr/>
+          <p:nvPr/>
+        </p:nvSpPr>
+        <p:spPr>
+          <a:xfrm>
+            <a:off x="0" y="0"/>
+            <a:ext cx="9144000" cy="566928"/>
+          </a:xfrm>
+          <a:prstGeom prst="rect">
+            <a:avLst/>
+          </a:prstGeom>
+          <a:solidFill>
+            <a:srgbClr val="0E1C42"/>
+          </a:solidFill>
+          <a:ln/>
+        </p:spPr>
+      </p:sp>
+      <p:sp>
+        <p:nvSpPr>
+          <p:cNvPr id="3" name="Text 1"/>
+          <p:cNvSpPr/>
+          <p:nvPr/>
+        </p:nvSpPr>
+        <p:spPr>
+          <a:xfrm>
+            <a:off x="365760" y="54864"/>
+            <a:ext cx="8412480" cy="457200"/>
+          </a:xfrm>
+          <a:prstGeom prst="rect">
+            <a:avLst/>
+          </a:prstGeom>
+          <a:noFill/>
+          <a:ln/>
+        </p:spPr>
+        <p:txBody>
+          <a:bodyPr wrap="square" lIns="0" tIns="0" rIns="0" bIns="0" rtlCol="0" anchor="ctr"/>
+          <a:lstStyle/>
+          <a:p>
+            <a:pPr indent="0" marL="0">
+              <a:buNone/>
+            </a:pPr>
+            <a:r>
+              <a:rPr lang="en-US" sz="2200" b="1" dirty="0">
+                <a:solidFill>
+                  <a:srgbClr val="FFFFFF"/>
+                </a:solidFill>
+                <a:latin typeface="Calibri" pitchFamily="34" charset="0"/>
+                <a:ea typeface="Calibri" pitchFamily="34" charset="-122"/>
+                <a:cs typeface="Calibri" pitchFamily="34" charset="-120"/>
+              </a:rPr>
+              <a:t>🔠  Spelling</a:t>
+            </a:r>
+            <a:endParaRPr lang="en-US" sz="2200" dirty="0"/>
+          </a:p>
+        </p:txBody>
+      </p:sp>
+      <p:sp>
+        <p:nvSpPr>
+          <p:cNvPr id="4" name="Text 2"/>
+          <p:cNvSpPr/>
+          <p:nvPr/>
+        </p:nvSpPr>
+        <p:spPr>
+          <a:xfrm>
+            <a:off x="365760" y="777240"/>
+            <a:ext cx="8229600" cy="237744"/>
+          </a:xfrm>
+          <a:prstGeom prst="rect">
+            <a:avLst/>
+          </a:prstGeom>
+          <a:noFill/>
+          <a:ln/>
+        </p:spPr>
+        <p:txBody>
+          <a:bodyPr wrap="square" lIns="0" tIns="0" rIns="0" bIns="0" rtlCol="0" anchor="ctr"/>
+          <a:lstStyle/>
+          <a:p>
+            <a:pPr indent="0" marL="0">
+              <a:buNone/>
+            </a:pPr>
+            <a:r>
+              <a:rPr lang="en-US" sz="1100" b="1" spc="100" kern="0" dirty="0">
                 <a:solidFill>
                   <a:srgbClr val="0E1C42"/>
                 </a:solidFill>
@@ -4038,34 +4133,707 @@
                 <a:ea typeface="Calibri" pitchFamily="34" charset="-122"/>
                 <a:cs typeface="Calibri" pitchFamily="34" charset="-120"/>
               </a:rPr>
-              <a:t>📕 Reading Focus</a:t>
-            </a:r>
-            <a:endParaRPr lang="en-US" sz="2800" dirty="0"/>
-          </a:p>
-        </p:txBody>
-      </p:sp>
-      <p:sp>
-        <p:nvSpPr>
-          <p:cNvPr id="3" name="Shape 1"/>
-          <p:cNvSpPr/>
-          <p:nvPr/>
-        </p:nvSpPr>
-        <p:spPr>
-          <a:xfrm>
-            <a:off x="365760" y="749808"/>
-            <a:ext cx="8412480" cy="0"/>
-          </a:xfrm>
-          <a:prstGeom prst="line">
-            <a:avLst/>
-          </a:prstGeom>
-          <a:noFill/>
-          <a:ln w="19050">
-            <a:solidFill>
-              <a:srgbClr val="55C8E8"/>
-            </a:solidFill>
-            <a:prstDash val="solid"/>
-          </a:ln>
-        </p:spPr>
+              <a:t>ADDING -ED AND -ING TO BASE WORDS</a:t>
+            </a:r>
+            <a:endParaRPr lang="en-US" sz="1100" dirty="0"/>
+          </a:p>
+        </p:txBody>
+      </p:sp>
+      <p:sp>
+        <p:nvSpPr>
+          <p:cNvPr id="5" name="Shape 3"/>
+          <p:cNvSpPr/>
+          <p:nvPr/>
+        </p:nvSpPr>
+        <p:spPr>
+          <a:xfrm>
+            <a:off x="411480" y="1078992"/>
+            <a:ext cx="1591056" cy="457200"/>
+          </a:xfrm>
+          <a:prstGeom prst="roundRect">
+            <a:avLst>
+              <a:gd name="adj" fmla="val 16000"/>
+            </a:avLst>
+          </a:prstGeom>
+          <a:solidFill>
+            <a:srgbClr val="0E1C42"/>
+          </a:solidFill>
+          <a:ln/>
+        </p:spPr>
+      </p:sp>
+      <p:sp>
+        <p:nvSpPr>
+          <p:cNvPr id="6" name="Text 4"/>
+          <p:cNvSpPr/>
+          <p:nvPr/>
+        </p:nvSpPr>
+        <p:spPr>
+          <a:xfrm>
+            <a:off x="457200" y="1133856"/>
+            <a:ext cx="1499616" cy="347472"/>
+          </a:xfrm>
+          <a:prstGeom prst="rect">
+            <a:avLst/>
+          </a:prstGeom>
+          <a:noFill/>
+          <a:ln/>
+        </p:spPr>
+        <p:txBody>
+          <a:bodyPr wrap="square" lIns="0" tIns="0" rIns="0" bIns="0" rtlCol="0" anchor="ctr"/>
+          <a:lstStyle/>
+          <a:p>
+            <a:pPr algn="ctr" indent="0" marL="0">
+              <a:buNone/>
+            </a:pPr>
+            <a:r>
+              <a:rPr lang="en-US" sz="1300" b="1" dirty="0">
+                <a:solidFill>
+                  <a:srgbClr val="FFFFFF"/>
+                </a:solidFill>
+                <a:latin typeface="Calibri" pitchFamily="34" charset="0"/>
+                <a:ea typeface="Calibri" pitchFamily="34" charset="-122"/>
+                <a:cs typeface="Calibri" pitchFamily="34" charset="-120"/>
+              </a:rPr>
+              <a:t>add -ing</a:t>
+            </a:r>
+            <a:endParaRPr lang="en-US" sz="1300" dirty="0"/>
+          </a:p>
+        </p:txBody>
+      </p:sp>
+      <p:sp>
+        <p:nvSpPr>
+          <p:cNvPr id="7" name="Shape 5"/>
+          <p:cNvSpPr/>
+          <p:nvPr/>
+        </p:nvSpPr>
+        <p:spPr>
+          <a:xfrm>
+            <a:off x="411480" y="1591056"/>
+            <a:ext cx="1591056" cy="2103120"/>
+          </a:xfrm>
+          <a:prstGeom prst="roundRect">
+            <a:avLst>
+              <a:gd name="adj" fmla="val 5747"/>
+            </a:avLst>
+          </a:prstGeom>
+          <a:solidFill>
+            <a:srgbClr val="FFFFFF"/>
+          </a:solidFill>
+          <a:ln/>
+          <a:effectLst>
+            <a:outerShdw sx="100000" sy="100000" kx="0" ky="0" algn="bl" rotWithShape="0" blurRad="101600" dist="38100" dir="2700000">
+              <a:srgbClr val="000000">
+                <a:alpha val="12000"/>
+              </a:srgbClr>
+            </a:outerShdw>
+          </a:effectLst>
+        </p:spPr>
+      </p:sp>
+      <p:sp>
+        <p:nvSpPr>
+          <p:cNvPr id="8" name="Text 6"/>
+          <p:cNvSpPr/>
+          <p:nvPr/>
+        </p:nvSpPr>
+        <p:spPr>
+          <a:xfrm>
+            <a:off x="502920" y="1700784"/>
+            <a:ext cx="1408176" cy="1883664"/>
+          </a:xfrm>
+          <a:prstGeom prst="rect">
+            <a:avLst/>
+          </a:prstGeom>
+          <a:noFill/>
+          <a:ln/>
+        </p:spPr>
+        <p:txBody>
+          <a:bodyPr wrap="square" lIns="0" tIns="0" rIns="0" bIns="0" rtlCol="0" anchor="ctr"/>
+          <a:lstStyle/>
+          <a:p>
+            <a:pPr algn="ctr" indent="0" marL="0">
+              <a:buNone/>
+            </a:pPr>
+            <a:r>
+              <a:rPr lang="en-US" sz="1400" dirty="0">
+                <a:solidFill>
+                  <a:srgbClr val="1E293B"/>
+                </a:solidFill>
+                <a:latin typeface="Calibri" pitchFamily="34" charset="0"/>
+                <a:ea typeface="Calibri" pitchFamily="34" charset="-122"/>
+                <a:cs typeface="Calibri" pitchFamily="34" charset="-120"/>
+              </a:rPr>
+              <a:t>mailing</a:t>
+            </a:r>
+            <a:endParaRPr lang="en-US" sz="1400" dirty="0"/>
+          </a:p>
+        </p:txBody>
+      </p:sp>
+      <p:sp>
+        <p:nvSpPr>
+          <p:cNvPr id="9" name="Shape 7"/>
+          <p:cNvSpPr/>
+          <p:nvPr/>
+        </p:nvSpPr>
+        <p:spPr>
+          <a:xfrm>
+            <a:off x="2093976" y="1078992"/>
+            <a:ext cx="1591056" cy="457200"/>
+          </a:xfrm>
+          <a:prstGeom prst="roundRect">
+            <a:avLst>
+              <a:gd name="adj" fmla="val 16000"/>
+            </a:avLst>
+          </a:prstGeom>
+          <a:solidFill>
+            <a:srgbClr val="0E1C42"/>
+          </a:solidFill>
+          <a:ln/>
+        </p:spPr>
+      </p:sp>
+      <p:sp>
+        <p:nvSpPr>
+          <p:cNvPr id="10" name="Text 8"/>
+          <p:cNvSpPr/>
+          <p:nvPr/>
+        </p:nvSpPr>
+        <p:spPr>
+          <a:xfrm>
+            <a:off x="2139696" y="1133856"/>
+            <a:ext cx="1499616" cy="347472"/>
+          </a:xfrm>
+          <a:prstGeom prst="rect">
+            <a:avLst/>
+          </a:prstGeom>
+          <a:noFill/>
+          <a:ln/>
+        </p:spPr>
+        <p:txBody>
+          <a:bodyPr wrap="square" lIns="0" tIns="0" rIns="0" bIns="0" rtlCol="0" anchor="ctr"/>
+          <a:lstStyle/>
+          <a:p>
+            <a:pPr algn="ctr" indent="0" marL="0">
+              <a:buNone/>
+            </a:pPr>
+            <a:r>
+              <a:rPr lang="en-US" sz="1300" b="1" dirty="0">
+                <a:solidFill>
+                  <a:srgbClr val="FFFFFF"/>
+                </a:solidFill>
+                <a:latin typeface="Calibri" pitchFamily="34" charset="0"/>
+                <a:ea typeface="Calibri" pitchFamily="34" charset="-122"/>
+                <a:cs typeface="Calibri" pitchFamily="34" charset="-120"/>
+              </a:rPr>
+              <a:t>double + -ed</a:t>
+            </a:r>
+            <a:endParaRPr lang="en-US" sz="1300" dirty="0"/>
+          </a:p>
+        </p:txBody>
+      </p:sp>
+      <p:sp>
+        <p:nvSpPr>
+          <p:cNvPr id="11" name="Shape 9"/>
+          <p:cNvSpPr/>
+          <p:nvPr/>
+        </p:nvSpPr>
+        <p:spPr>
+          <a:xfrm>
+            <a:off x="2093976" y="1591056"/>
+            <a:ext cx="1591056" cy="2103120"/>
+          </a:xfrm>
+          <a:prstGeom prst="roundRect">
+            <a:avLst>
+              <a:gd name="adj" fmla="val 5747"/>
+            </a:avLst>
+          </a:prstGeom>
+          <a:solidFill>
+            <a:srgbClr val="FFFFFF"/>
+          </a:solidFill>
+          <a:ln/>
+          <a:effectLst>
+            <a:outerShdw sx="100000" sy="100000" kx="0" ky="0" algn="bl" rotWithShape="0" blurRad="101600" dist="38100" dir="2700000">
+              <a:srgbClr val="000000">
+                <a:alpha val="12000"/>
+              </a:srgbClr>
+            </a:outerShdw>
+          </a:effectLst>
+        </p:spPr>
+      </p:sp>
+      <p:sp>
+        <p:nvSpPr>
+          <p:cNvPr id="12" name="Text 10"/>
+          <p:cNvSpPr/>
+          <p:nvPr/>
+        </p:nvSpPr>
+        <p:spPr>
+          <a:xfrm>
+            <a:off x="2185416" y="1700784"/>
+            <a:ext cx="1408176" cy="1883664"/>
+          </a:xfrm>
+          <a:prstGeom prst="rect">
+            <a:avLst/>
+          </a:prstGeom>
+          <a:noFill/>
+          <a:ln/>
+        </p:spPr>
+        <p:txBody>
+          <a:bodyPr wrap="square" lIns="0" tIns="0" rIns="0" bIns="0" rtlCol="0" anchor="ctr"/>
+          <a:lstStyle/>
+          <a:p>
+            <a:pPr algn="ctr" indent="0" marL="0">
+              <a:buNone/>
+            </a:pPr>
+            <a:r>
+              <a:rPr lang="en-US" sz="1400" dirty="0">
+                <a:solidFill>
+                  <a:srgbClr val="1E293B"/>
+                </a:solidFill>
+                <a:latin typeface="Calibri" pitchFamily="34" charset="0"/>
+                <a:ea typeface="Calibri" pitchFamily="34" charset="-122"/>
+                <a:cs typeface="Calibri" pitchFamily="34" charset="-120"/>
+              </a:rPr>
+              <a:t>stopped</a:t>
+            </a:r>
+            <a:endParaRPr lang="en-US" sz="1400" dirty="0"/>
+          </a:p>
+          <a:p>
+            <a:pPr algn="ctr" indent="0" marL="0">
+              <a:buNone/>
+            </a:pPr>
+            <a:r>
+              <a:rPr lang="en-US" sz="1400" dirty="0">
+                <a:solidFill>
+                  <a:srgbClr val="1E293B"/>
+                </a:solidFill>
+                <a:latin typeface="Calibri" pitchFamily="34" charset="0"/>
+                <a:ea typeface="Calibri" pitchFamily="34" charset="-122"/>
+                <a:cs typeface="Calibri" pitchFamily="34" charset="-120"/>
+              </a:rPr>
+              <a:t>planned</a:t>
+            </a:r>
+            <a:endParaRPr lang="en-US" sz="1400" dirty="0"/>
+          </a:p>
+        </p:txBody>
+      </p:sp>
+      <p:sp>
+        <p:nvSpPr>
+          <p:cNvPr id="13" name="Shape 11"/>
+          <p:cNvSpPr/>
+          <p:nvPr/>
+        </p:nvSpPr>
+        <p:spPr>
+          <a:xfrm>
+            <a:off x="3776472" y="1078992"/>
+            <a:ext cx="1591056" cy="457200"/>
+          </a:xfrm>
+          <a:prstGeom prst="roundRect">
+            <a:avLst>
+              <a:gd name="adj" fmla="val 16000"/>
+            </a:avLst>
+          </a:prstGeom>
+          <a:solidFill>
+            <a:srgbClr val="0E1C42"/>
+          </a:solidFill>
+          <a:ln/>
+        </p:spPr>
+      </p:sp>
+      <p:sp>
+        <p:nvSpPr>
+          <p:cNvPr id="14" name="Text 12"/>
+          <p:cNvSpPr/>
+          <p:nvPr/>
+        </p:nvSpPr>
+        <p:spPr>
+          <a:xfrm>
+            <a:off x="3822192" y="1133856"/>
+            <a:ext cx="1499616" cy="347472"/>
+          </a:xfrm>
+          <a:prstGeom prst="rect">
+            <a:avLst/>
+          </a:prstGeom>
+          <a:noFill/>
+          <a:ln/>
+        </p:spPr>
+        <p:txBody>
+          <a:bodyPr wrap="square" lIns="0" tIns="0" rIns="0" bIns="0" rtlCol="0" anchor="ctr"/>
+          <a:lstStyle/>
+          <a:p>
+            <a:pPr algn="ctr" indent="0" marL="0">
+              <a:buNone/>
+            </a:pPr>
+            <a:r>
+              <a:rPr lang="en-US" sz="1300" b="1" dirty="0">
+                <a:solidFill>
+                  <a:srgbClr val="FFFFFF"/>
+                </a:solidFill>
+                <a:latin typeface="Calibri" pitchFamily="34" charset="0"/>
+                <a:ea typeface="Calibri" pitchFamily="34" charset="-122"/>
+                <a:cs typeface="Calibri" pitchFamily="34" charset="-120"/>
+              </a:rPr>
+              <a:t>Drop e + -ing</a:t>
+            </a:r>
+            <a:endParaRPr lang="en-US" sz="1300" dirty="0"/>
+          </a:p>
+        </p:txBody>
+      </p:sp>
+      <p:sp>
+        <p:nvSpPr>
+          <p:cNvPr id="15" name="Shape 13"/>
+          <p:cNvSpPr/>
+          <p:nvPr/>
+        </p:nvSpPr>
+        <p:spPr>
+          <a:xfrm>
+            <a:off x="3776472" y="1591056"/>
+            <a:ext cx="1591056" cy="2103120"/>
+          </a:xfrm>
+          <a:prstGeom prst="roundRect">
+            <a:avLst>
+              <a:gd name="adj" fmla="val 5747"/>
+            </a:avLst>
+          </a:prstGeom>
+          <a:solidFill>
+            <a:srgbClr val="FFFFFF"/>
+          </a:solidFill>
+          <a:ln/>
+          <a:effectLst>
+            <a:outerShdw sx="100000" sy="100000" kx="0" ky="0" algn="bl" rotWithShape="0" blurRad="101600" dist="38100" dir="2700000">
+              <a:srgbClr val="000000">
+                <a:alpha val="12000"/>
+              </a:srgbClr>
+            </a:outerShdw>
+          </a:effectLst>
+        </p:spPr>
+      </p:sp>
+      <p:sp>
+        <p:nvSpPr>
+          <p:cNvPr id="16" name="Text 14"/>
+          <p:cNvSpPr/>
+          <p:nvPr/>
+        </p:nvSpPr>
+        <p:spPr>
+          <a:xfrm>
+            <a:off x="3867912" y="1700784"/>
+            <a:ext cx="1408176" cy="1883664"/>
+          </a:xfrm>
+          <a:prstGeom prst="rect">
+            <a:avLst/>
+          </a:prstGeom>
+          <a:noFill/>
+          <a:ln/>
+        </p:spPr>
+        <p:txBody>
+          <a:bodyPr wrap="square" lIns="0" tIns="0" rIns="0" bIns="0" rtlCol="0" anchor="ctr"/>
+          <a:lstStyle/>
+          <a:p>
+            <a:pPr algn="ctr" indent="0" marL="0">
+              <a:buNone/>
+            </a:pPr>
+            <a:r>
+              <a:rPr lang="en-US" sz="1400" dirty="0">
+                <a:solidFill>
+                  <a:srgbClr val="1E293B"/>
+                </a:solidFill>
+                <a:latin typeface="Calibri" pitchFamily="34" charset="0"/>
+                <a:ea typeface="Calibri" pitchFamily="34" charset="-122"/>
+                <a:cs typeface="Calibri" pitchFamily="34" charset="-120"/>
+              </a:rPr>
+              <a:t>writing</a:t>
+            </a:r>
+            <a:endParaRPr lang="en-US" sz="1400" dirty="0"/>
+          </a:p>
+          <a:p>
+            <a:pPr algn="ctr" indent="0" marL="0">
+              <a:buNone/>
+            </a:pPr>
+            <a:r>
+              <a:rPr lang="en-US" sz="1400" dirty="0">
+                <a:solidFill>
+                  <a:srgbClr val="1E293B"/>
+                </a:solidFill>
+                <a:latin typeface="Calibri" pitchFamily="34" charset="0"/>
+                <a:ea typeface="Calibri" pitchFamily="34" charset="-122"/>
+                <a:cs typeface="Calibri" pitchFamily="34" charset="-120"/>
+              </a:rPr>
+              <a:t>using</a:t>
+            </a:r>
+            <a:endParaRPr lang="en-US" sz="1400" dirty="0"/>
+          </a:p>
+        </p:txBody>
+      </p:sp>
+      <p:sp>
+        <p:nvSpPr>
+          <p:cNvPr id="17" name="Shape 15"/>
+          <p:cNvSpPr/>
+          <p:nvPr/>
+        </p:nvSpPr>
+        <p:spPr>
+          <a:xfrm>
+            <a:off x="5458968" y="1078992"/>
+            <a:ext cx="1591056" cy="457200"/>
+          </a:xfrm>
+          <a:prstGeom prst="roundRect">
+            <a:avLst>
+              <a:gd name="adj" fmla="val 16000"/>
+            </a:avLst>
+          </a:prstGeom>
+          <a:solidFill>
+            <a:srgbClr val="0E1C42"/>
+          </a:solidFill>
+          <a:ln/>
+        </p:spPr>
+      </p:sp>
+      <p:sp>
+        <p:nvSpPr>
+          <p:cNvPr id="18" name="Text 16"/>
+          <p:cNvSpPr/>
+          <p:nvPr/>
+        </p:nvSpPr>
+        <p:spPr>
+          <a:xfrm>
+            <a:off x="5504688" y="1133856"/>
+            <a:ext cx="1499616" cy="347472"/>
+          </a:xfrm>
+          <a:prstGeom prst="rect">
+            <a:avLst/>
+          </a:prstGeom>
+          <a:noFill/>
+          <a:ln/>
+        </p:spPr>
+        <p:txBody>
+          <a:bodyPr wrap="square" lIns="0" tIns="0" rIns="0" bIns="0" rtlCol="0" anchor="ctr"/>
+          <a:lstStyle/>
+          <a:p>
+            <a:pPr algn="ctr" indent="0" marL="0">
+              <a:buNone/>
+            </a:pPr>
+            <a:r>
+              <a:rPr lang="en-US" sz="1300" b="1" dirty="0">
+                <a:solidFill>
+                  <a:srgbClr val="FFFFFF"/>
+                </a:solidFill>
+                <a:latin typeface="Calibri" pitchFamily="34" charset="0"/>
+                <a:ea typeface="Calibri" pitchFamily="34" charset="-122"/>
+                <a:cs typeface="Calibri" pitchFamily="34" charset="-120"/>
+              </a:rPr>
+              <a:t>Add -ed</a:t>
+            </a:r>
+            <a:endParaRPr lang="en-US" sz="1300" dirty="0"/>
+          </a:p>
+        </p:txBody>
+      </p:sp>
+      <p:sp>
+        <p:nvSpPr>
+          <p:cNvPr id="19" name="Shape 17"/>
+          <p:cNvSpPr/>
+          <p:nvPr/>
+        </p:nvSpPr>
+        <p:spPr>
+          <a:xfrm>
+            <a:off x="5458968" y="1591056"/>
+            <a:ext cx="1591056" cy="2103120"/>
+          </a:xfrm>
+          <a:prstGeom prst="roundRect">
+            <a:avLst>
+              <a:gd name="adj" fmla="val 5747"/>
+            </a:avLst>
+          </a:prstGeom>
+          <a:solidFill>
+            <a:srgbClr val="FFFFFF"/>
+          </a:solidFill>
+          <a:ln/>
+          <a:effectLst>
+            <a:outerShdw sx="100000" sy="100000" kx="0" ky="0" algn="bl" rotWithShape="0" blurRad="101600" dist="38100" dir="2700000">
+              <a:srgbClr val="000000">
+                <a:alpha val="12000"/>
+              </a:srgbClr>
+            </a:outerShdw>
+          </a:effectLst>
+        </p:spPr>
+      </p:sp>
+      <p:sp>
+        <p:nvSpPr>
+          <p:cNvPr id="20" name="Text 18"/>
+          <p:cNvSpPr/>
+          <p:nvPr/>
+        </p:nvSpPr>
+        <p:spPr>
+          <a:xfrm>
+            <a:off x="5550408" y="1700784"/>
+            <a:ext cx="1408176" cy="1883664"/>
+          </a:xfrm>
+          <a:prstGeom prst="rect">
+            <a:avLst/>
+          </a:prstGeom>
+          <a:noFill/>
+          <a:ln/>
+        </p:spPr>
+        <p:txBody>
+          <a:bodyPr wrap="square" lIns="0" tIns="0" rIns="0" bIns="0" rtlCol="0" anchor="ctr"/>
+          <a:lstStyle/>
+          <a:p>
+            <a:pPr algn="ctr" indent="0" marL="0">
+              <a:buNone/>
+            </a:pPr>
+            <a:r>
+              <a:rPr lang="en-US" sz="1400" dirty="0">
+                <a:solidFill>
+                  <a:srgbClr val="1E293B"/>
+                </a:solidFill>
+                <a:latin typeface="Calibri" pitchFamily="34" charset="0"/>
+                <a:ea typeface="Calibri" pitchFamily="34" charset="-122"/>
+                <a:cs typeface="Calibri" pitchFamily="34" charset="-120"/>
+              </a:rPr>
+              <a:t>traveled</a:t>
+            </a:r>
+            <a:endParaRPr lang="en-US" sz="1400" dirty="0"/>
+          </a:p>
+          <a:p>
+            <a:pPr algn="ctr" indent="0" marL="0">
+              <a:buNone/>
+            </a:pPr>
+            <a:r>
+              <a:rPr lang="en-US" sz="1400" dirty="0">
+                <a:solidFill>
+                  <a:srgbClr val="1E293B"/>
+                </a:solidFill>
+                <a:latin typeface="Calibri" pitchFamily="34" charset="0"/>
+                <a:ea typeface="Calibri" pitchFamily="34" charset="-122"/>
+                <a:cs typeface="Calibri" pitchFamily="34" charset="-120"/>
+              </a:rPr>
+              <a:t>visited</a:t>
+            </a:r>
+            <a:endParaRPr lang="en-US" sz="1400" dirty="0"/>
+          </a:p>
+        </p:txBody>
+      </p:sp>
+      <p:sp>
+        <p:nvSpPr>
+          <p:cNvPr id="21" name="Shape 19"/>
+          <p:cNvSpPr/>
+          <p:nvPr/>
+        </p:nvSpPr>
+        <p:spPr>
+          <a:xfrm>
+            <a:off x="7141464" y="1078992"/>
+            <a:ext cx="1591056" cy="457200"/>
+          </a:xfrm>
+          <a:prstGeom prst="roundRect">
+            <a:avLst>
+              <a:gd name="adj" fmla="val 16000"/>
+            </a:avLst>
+          </a:prstGeom>
+          <a:solidFill>
+            <a:srgbClr val="0E1C42"/>
+          </a:solidFill>
+          <a:ln/>
+        </p:spPr>
+      </p:sp>
+      <p:sp>
+        <p:nvSpPr>
+          <p:cNvPr id="22" name="Text 20"/>
+          <p:cNvSpPr/>
+          <p:nvPr/>
+        </p:nvSpPr>
+        <p:spPr>
+          <a:xfrm>
+            <a:off x="7187184" y="1133856"/>
+            <a:ext cx="1499616" cy="347472"/>
+          </a:xfrm>
+          <a:prstGeom prst="rect">
+            <a:avLst/>
+          </a:prstGeom>
+          <a:noFill/>
+          <a:ln/>
+        </p:spPr>
+        <p:txBody>
+          <a:bodyPr wrap="square" lIns="0" tIns="0" rIns="0" bIns="0" rtlCol="0" anchor="ctr"/>
+          <a:lstStyle/>
+          <a:p>
+            <a:pPr algn="ctr" indent="0" marL="0">
+              <a:buNone/>
+            </a:pPr>
+            <a:r>
+              <a:rPr lang="en-US" sz="1300" b="1" dirty="0">
+                <a:solidFill>
+                  <a:srgbClr val="FFFFFF"/>
+                </a:solidFill>
+                <a:latin typeface="Calibri" pitchFamily="34" charset="0"/>
+                <a:ea typeface="Calibri" pitchFamily="34" charset="-122"/>
+                <a:cs typeface="Calibri" pitchFamily="34" charset="-120"/>
+              </a:rPr>
+              <a:t>Double + -ing</a:t>
+            </a:r>
+            <a:endParaRPr lang="en-US" sz="1300" dirty="0"/>
+          </a:p>
+        </p:txBody>
+      </p:sp>
+      <p:sp>
+        <p:nvSpPr>
+          <p:cNvPr id="23" name="Shape 21"/>
+          <p:cNvSpPr/>
+          <p:nvPr/>
+        </p:nvSpPr>
+        <p:spPr>
+          <a:xfrm>
+            <a:off x="7141464" y="1591056"/>
+            <a:ext cx="1591056" cy="2103120"/>
+          </a:xfrm>
+          <a:prstGeom prst="roundRect">
+            <a:avLst>
+              <a:gd name="adj" fmla="val 5747"/>
+            </a:avLst>
+          </a:prstGeom>
+          <a:solidFill>
+            <a:srgbClr val="FFFFFF"/>
+          </a:solidFill>
+          <a:ln/>
+          <a:effectLst>
+            <a:outerShdw sx="100000" sy="100000" kx="0" ky="0" algn="bl" rotWithShape="0" blurRad="101600" dist="38100" dir="2700000">
+              <a:srgbClr val="000000">
+                <a:alpha val="12000"/>
+              </a:srgbClr>
+            </a:outerShdw>
+          </a:effectLst>
+        </p:spPr>
+      </p:sp>
+      <p:sp>
+        <p:nvSpPr>
+          <p:cNvPr id="24" name="Text 22"/>
+          <p:cNvSpPr/>
+          <p:nvPr/>
+        </p:nvSpPr>
+        <p:spPr>
+          <a:xfrm>
+            <a:off x="7232904" y="1700784"/>
+            <a:ext cx="1408176" cy="1883664"/>
+          </a:xfrm>
+          <a:prstGeom prst="rect">
+            <a:avLst/>
+          </a:prstGeom>
+          <a:noFill/>
+          <a:ln/>
+        </p:spPr>
+        <p:txBody>
+          <a:bodyPr wrap="square" lIns="0" tIns="0" rIns="0" bIns="0" rtlCol="0" anchor="ctr"/>
+          <a:lstStyle/>
+          <a:p>
+            <a:pPr algn="ctr" indent="0" marL="0">
+              <a:buNone/>
+            </a:pPr>
+            <a:r>
+              <a:rPr lang="en-US" sz="1400" dirty="0">
+                <a:solidFill>
+                  <a:srgbClr val="1E293B"/>
+                </a:solidFill>
+                <a:latin typeface="Calibri" pitchFamily="34" charset="0"/>
+                <a:ea typeface="Calibri" pitchFamily="34" charset="-122"/>
+                <a:cs typeface="Calibri" pitchFamily="34" charset="-120"/>
+              </a:rPr>
+              <a:t>mapping</a:t>
+            </a:r>
+            <a:endParaRPr lang="en-US" sz="1400" dirty="0"/>
+          </a:p>
+        </p:txBody>
       </p:sp>
     </p:spTree>
   </p:cSld>
@@ -4101,30 +4869,89 @@
       </p:grpSpPr>
       <p:sp>
         <p:nvSpPr>
-          <p:cNvPr id="2" name="Text 0"/>
-          <p:cNvSpPr/>
-          <p:nvPr/>
-        </p:nvSpPr>
-        <p:spPr>
-          <a:xfrm>
-            <a:off x="365760" y="164592"/>
-            <a:ext cx="8412480" cy="566928"/>
-          </a:xfrm>
-          <a:prstGeom prst="rect">
-            <a:avLst/>
-          </a:prstGeom>
-          <a:noFill/>
-          <a:ln/>
-        </p:spPr>
-        <p:txBody>
-          <a:bodyPr wrap="square" lIns="0" tIns="0" rIns="0" bIns="0" rtlCol="0" anchor="ctr"/>
-          <a:lstStyle/>
-          <a:p>
-            <a:pPr algn="l" indent="0" marL="0">
-              <a:buNone/>
-            </a:pPr>
-            <a:r>
-              <a:rPr lang="en-US" sz="2800" b="1" dirty="0">
+          <p:cNvPr id="2" name="Shape 0"/>
+          <p:cNvSpPr/>
+          <p:nvPr/>
+        </p:nvSpPr>
+        <p:spPr>
+          <a:xfrm>
+            <a:off x="0" y="0"/>
+            <a:ext cx="9144000" cy="566928"/>
+          </a:xfrm>
+          <a:prstGeom prst="rect">
+            <a:avLst/>
+          </a:prstGeom>
+          <a:solidFill>
+            <a:srgbClr val="5CB85C"/>
+          </a:solidFill>
+          <a:ln/>
+        </p:spPr>
+      </p:sp>
+      <p:sp>
+        <p:nvSpPr>
+          <p:cNvPr id="3" name="Text 1"/>
+          <p:cNvSpPr/>
+          <p:nvPr/>
+        </p:nvSpPr>
+        <p:spPr>
+          <a:xfrm>
+            <a:off x="365760" y="54864"/>
+            <a:ext cx="8412480" cy="457200"/>
+          </a:xfrm>
+          <a:prstGeom prst="rect">
+            <a:avLst/>
+          </a:prstGeom>
+          <a:noFill/>
+          <a:ln/>
+        </p:spPr>
+        <p:txBody>
+          <a:bodyPr wrap="square" lIns="0" tIns="0" rIns="0" bIns="0" rtlCol="0" anchor="ctr"/>
+          <a:lstStyle/>
+          <a:p>
+            <a:pPr indent="0" marL="0">
+              <a:buNone/>
+            </a:pPr>
+            <a:r>
+              <a:rPr lang="en-US" sz="2200" b="1" dirty="0">
+                <a:solidFill>
+                  <a:srgbClr val="FFFFFF"/>
+                </a:solidFill>
+                <a:latin typeface="Calibri" pitchFamily="34" charset="0"/>
+                <a:ea typeface="Calibri" pitchFamily="34" charset="-122"/>
+                <a:cs typeface="Calibri" pitchFamily="34" charset="-120"/>
+              </a:rPr>
+              <a:t>📕  Read</a:t>
+            </a:r>
+            <a:endParaRPr lang="en-US" sz="2200" dirty="0"/>
+          </a:p>
+        </p:txBody>
+      </p:sp>
+      <p:sp>
+        <p:nvSpPr>
+          <p:cNvPr id="4" name="Text 2"/>
+          <p:cNvSpPr/>
+          <p:nvPr/>
+        </p:nvSpPr>
+        <p:spPr>
+          <a:xfrm>
+            <a:off x="365760" y="868680"/>
+            <a:ext cx="8412480" cy="502920"/>
+          </a:xfrm>
+          <a:prstGeom prst="rect">
+            <a:avLst/>
+          </a:prstGeom>
+          <a:noFill/>
+          <a:ln/>
+        </p:spPr>
+        <p:txBody>
+          <a:bodyPr wrap="square" lIns="0" tIns="0" rIns="0" bIns="0" rtlCol="0" anchor="ctr"/>
+          <a:lstStyle/>
+          <a:p>
+            <a:pPr indent="0" marL="0">
+              <a:buNone/>
+            </a:pPr>
+            <a:r>
+              <a:rPr lang="en-US" sz="2600" b="1" dirty="0">
                 <a:solidFill>
                   <a:srgbClr val="0E1C42"/>
                 </a:solidFill>
@@ -4132,61 +4959,77 @@
                 <a:ea typeface="Calibri" pitchFamily="34" charset="-122"/>
                 <a:cs typeface="Calibri" pitchFamily="34" charset="-120"/>
               </a:rPr>
-              <a:t>🪶 Writing Connection</a:t>
-            </a:r>
-            <a:endParaRPr lang="en-US" sz="2800" dirty="0"/>
-          </a:p>
-        </p:txBody>
-      </p:sp>
-      <p:sp>
-        <p:nvSpPr>
-          <p:cNvPr id="3" name="Shape 1"/>
-          <p:cNvSpPr/>
-          <p:nvPr/>
-        </p:nvSpPr>
-        <p:spPr>
-          <a:xfrm>
-            <a:off x="365760" y="749808"/>
-            <a:ext cx="8412480" cy="0"/>
-          </a:xfrm>
-          <a:prstGeom prst="line">
-            <a:avLst/>
-          </a:prstGeom>
-          <a:noFill/>
-          <a:ln w="19050">
-            <a:solidFill>
-              <a:srgbClr val="34B76F"/>
-            </a:solidFill>
-            <a:prstDash val="solid"/>
-          </a:ln>
-        </p:spPr>
-      </p:sp>
-      <p:sp>
-        <p:nvSpPr>
-          <p:cNvPr id="4" name="Text 2"/>
-          <p:cNvSpPr/>
-          <p:nvPr/>
-        </p:nvSpPr>
-        <p:spPr>
-          <a:xfrm>
-            <a:off x="640080" y="1371600"/>
-            <a:ext cx="7863840" cy="457200"/>
-          </a:xfrm>
-          <a:prstGeom prst="rect">
-            <a:avLst/>
-          </a:prstGeom>
-          <a:noFill/>
-          <a:ln/>
-        </p:spPr>
-        <p:txBody>
-          <a:bodyPr wrap="square" lIns="0" tIns="0" rIns="0" bIns="0" rtlCol="0" anchor="ctr"/>
-          <a:lstStyle/>
-          <a:p>
-            <a:pPr indent="0" marL="0">
-              <a:buNone/>
-            </a:pPr>
-            <a:r>
-              <a:rPr lang="en-US" sz="1600" dirty="0">
+              <a:t>📰 Read: What Is a Travel Guide?</a:t>
+            </a:r>
+            <a:endParaRPr lang="en-US" sz="2600" dirty="0"/>
+          </a:p>
+        </p:txBody>
+      </p:sp>
+      <p:sp>
+        <p:nvSpPr>
+          <p:cNvPr id="5" name="Text 3"/>
+          <p:cNvSpPr/>
+          <p:nvPr/>
+        </p:nvSpPr>
+        <p:spPr>
+          <a:xfrm>
+            <a:off x="365760" y="1463040"/>
+            <a:ext cx="8229600" cy="237744"/>
+          </a:xfrm>
+          <a:prstGeom prst="rect">
+            <a:avLst/>
+          </a:prstGeom>
+          <a:noFill/>
+          <a:ln/>
+        </p:spPr>
+        <p:txBody>
+          <a:bodyPr wrap="square" lIns="0" tIns="0" rIns="0" bIns="0" rtlCol="0" anchor="ctr"/>
+          <a:lstStyle/>
+          <a:p>
+            <a:pPr indent="0" marL="0">
+              <a:buNone/>
+            </a:pPr>
+            <a:r>
+              <a:rPr lang="en-US" sz="1100" b="1" spc="100" kern="0" dirty="0">
+                <a:solidFill>
+                  <a:srgbClr val="C7922C"/>
+                </a:solidFill>
+                <a:latin typeface="Calibri" pitchFamily="34" charset="0"/>
+                <a:ea typeface="Calibri" pitchFamily="34" charset="-122"/>
+                <a:cs typeface="Calibri" pitchFamily="34" charset="-120"/>
+              </a:rPr>
+              <a:t>PAUSE &amp; THINK</a:t>
+            </a:r>
+            <a:endParaRPr lang="en-US" sz="1100" dirty="0"/>
+          </a:p>
+        </p:txBody>
+      </p:sp>
+      <p:sp>
+        <p:nvSpPr>
+          <p:cNvPr id="6" name="Text 4"/>
+          <p:cNvSpPr/>
+          <p:nvPr/>
+        </p:nvSpPr>
+        <p:spPr>
+          <a:xfrm>
+            <a:off x="365760" y="1719072"/>
+            <a:ext cx="8412480" cy="914400"/>
+          </a:xfrm>
+          <a:prstGeom prst="rect">
+            <a:avLst/>
+          </a:prstGeom>
+          <a:noFill/>
+          <a:ln/>
+        </p:spPr>
+        <p:txBody>
+          <a:bodyPr wrap="square" lIns="0" tIns="0" rIns="0" bIns="0" rtlCol="0" anchor="ctr"/>
+          <a:lstStyle/>
+          <a:p>
+            <a:pPr indent="0" marL="0">
+              <a:buNone/>
+            </a:pPr>
+            <a:r>
+              <a:rPr lang="en-US" sz="1500" dirty="0">
                 <a:solidFill>
                   <a:srgbClr val="1E293B"/>
                 </a:solidFill>
@@ -4194,48 +5037,9 @@
                 <a:ea typeface="Calibri" pitchFamily="34" charset="-122"/>
                 <a:cs typeface="Calibri" pitchFamily="34" charset="-120"/>
               </a:rPr>
-              <a:t>Open your writing assignment in Canvas.</a:t>
-            </a:r>
-            <a:endParaRPr lang="en-US" sz="1600" dirty="0"/>
-          </a:p>
-        </p:txBody>
-      </p:sp>
-      <p:sp>
-        <p:nvSpPr>
-          <p:cNvPr id="5" name="Text 3"/>
-          <p:cNvSpPr/>
-          <p:nvPr/>
-        </p:nvSpPr>
-        <p:spPr>
-          <a:xfrm>
-            <a:off x="640080" y="2011680"/>
-            <a:ext cx="7863840" cy="457200"/>
-          </a:xfrm>
-          <a:prstGeom prst="rect">
-            <a:avLst/>
-          </a:prstGeom>
-          <a:noFill/>
-          <a:ln/>
-        </p:spPr>
-        <p:txBody>
-          <a:bodyPr wrap="square" lIns="0" tIns="0" rIns="0" bIns="0" rtlCol="0" anchor="ctr"/>
-          <a:lstStyle/>
-          <a:p>
-            <a:pPr indent="0" marL="0">
-              <a:buNone/>
-            </a:pPr>
-            <a:r>
-              <a:rPr lang="en-US" sz="1400" dirty="0">
-                <a:solidFill>
-                  <a:srgbClr val="64748B"/>
-                </a:solidFill>
-                <a:latin typeface="Calibri" pitchFamily="34" charset="0"/>
-                <a:ea typeface="Calibri" pitchFamily="34" charset="-122"/>
-                <a:cs typeface="Calibri" pitchFamily="34" charset="-120"/>
-              </a:rPr>
-              <a:t>Follow the writing prompt for today's workshop.</a:t>
-            </a:r>
-            <a:endParaRPr lang="en-US" sz="1400" dirty="0"/>
+              <a:t>•  The text says a well-written travel guide makes you feel like you’re already there. What kind of details create that feeling?</a:t>
+            </a:r>
+            <a:endParaRPr lang="en-US" sz="1500" dirty="0"/>
           </a:p>
         </p:txBody>
       </p:sp>
@@ -4273,65 +5077,62 @@
       </p:grpSpPr>
       <p:sp>
         <p:nvSpPr>
-          <p:cNvPr id="2" name="Text 0"/>
-          <p:cNvSpPr/>
-          <p:nvPr/>
-        </p:nvSpPr>
-        <p:spPr>
-          <a:xfrm>
-            <a:off x="365760" y="164592"/>
-            <a:ext cx="8412480" cy="566928"/>
-          </a:xfrm>
-          <a:prstGeom prst="rect">
-            <a:avLst/>
-          </a:prstGeom>
-          <a:noFill/>
-          <a:ln/>
-        </p:spPr>
-        <p:txBody>
-          <a:bodyPr wrap="square" lIns="0" tIns="0" rIns="0" bIns="0" rtlCol="0" anchor="ctr"/>
-          <a:lstStyle/>
-          <a:p>
-            <a:pPr algn="l" indent="0" marL="0">
-              <a:buNone/>
-            </a:pPr>
-            <a:r>
-              <a:rPr lang="en-US" sz="2800" b="1" dirty="0">
-                <a:solidFill>
-                  <a:srgbClr val="0E1C42"/>
-                </a:solidFill>
-                <a:latin typeface="Calibri" pitchFamily="34" charset="0"/>
-                <a:ea typeface="Calibri" pitchFamily="34" charset="-122"/>
-                <a:cs typeface="Calibri" pitchFamily="34" charset="-120"/>
-              </a:rPr>
-              <a:t>✏️ 10-Minute Write</a:t>
-            </a:r>
-            <a:endParaRPr lang="en-US" sz="2800" dirty="0"/>
-          </a:p>
-        </p:txBody>
-      </p:sp>
-      <p:sp>
-        <p:nvSpPr>
-          <p:cNvPr id="3" name="Shape 1"/>
-          <p:cNvSpPr/>
-          <p:nvPr/>
-        </p:nvSpPr>
-        <p:spPr>
-          <a:xfrm>
-            <a:off x="365760" y="749808"/>
-            <a:ext cx="8412480" cy="0"/>
-          </a:xfrm>
-          <a:prstGeom prst="line">
-            <a:avLst/>
-          </a:prstGeom>
-          <a:noFill/>
-          <a:ln w="19050">
-            <a:solidFill>
-              <a:srgbClr val="C7922C"/>
-            </a:solidFill>
-            <a:prstDash val="solid"/>
-          </a:ln>
-        </p:spPr>
+          <p:cNvPr id="2" name="Shape 0"/>
+          <p:cNvSpPr/>
+          <p:nvPr/>
+        </p:nvSpPr>
+        <p:spPr>
+          <a:xfrm>
+            <a:off x="0" y="0"/>
+            <a:ext cx="9144000" cy="566928"/>
+          </a:xfrm>
+          <a:prstGeom prst="rect">
+            <a:avLst/>
+          </a:prstGeom>
+          <a:solidFill>
+            <a:srgbClr val="C7922C"/>
+          </a:solidFill>
+          <a:ln/>
+        </p:spPr>
+      </p:sp>
+      <p:sp>
+        <p:nvSpPr>
+          <p:cNvPr id="3" name="Text 1"/>
+          <p:cNvSpPr/>
+          <p:nvPr/>
+        </p:nvSpPr>
+        <p:spPr>
+          <a:xfrm>
+            <a:off x="365760" y="54864"/>
+            <a:ext cx="8412480" cy="457200"/>
+          </a:xfrm>
+          <a:prstGeom prst="rect">
+            <a:avLst/>
+          </a:prstGeom>
+          <a:noFill/>
+          <a:ln/>
+        </p:spPr>
+        <p:txBody>
+          <a:bodyPr wrap="square" lIns="0" tIns="0" rIns="0" bIns="0" rtlCol="0" anchor="ctr"/>
+          <a:lstStyle/>
+          <a:p>
+            <a:pPr indent="0" marL="0">
+              <a:buNone/>
+            </a:pPr>
+            <a:r>
+              <a:rPr lang="en-US" sz="2200" b="1" dirty="0">
+                <a:solidFill>
+                  <a:srgbClr val="FFFFFF"/>
+                </a:solidFill>
+                <a:latin typeface="Calibri" pitchFamily="34" charset="0"/>
+                <a:ea typeface="Calibri" pitchFamily="34" charset="-122"/>
+                <a:cs typeface="Calibri" pitchFamily="34" charset="-120"/>
+              </a:rPr>
+              <a:t>✍️  10-Minute Write</a:t>
+            </a:r>
+            <a:endParaRPr lang="en-US" sz="2200" dirty="0"/>
+          </a:p>
+        </p:txBody>
       </p:sp>
       <p:sp>
         <p:nvSpPr>
@@ -4341,24 +5142,24 @@
         </p:nvSpPr>
         <p:spPr>
           <a:xfrm>
-            <a:off x="457200" y="1005840"/>
-            <a:ext cx="8046720" cy="292608"/>
-          </a:xfrm>
-          <a:prstGeom prst="rect">
-            <a:avLst/>
-          </a:prstGeom>
-          <a:noFill/>
-          <a:ln/>
-        </p:spPr>
-        <p:txBody>
-          <a:bodyPr wrap="square" lIns="0" tIns="0" rIns="0" bIns="0" rtlCol="0" anchor="ctr"/>
-          <a:lstStyle/>
-          <a:p>
-            <a:pPr indent="0" marL="0">
-              <a:buNone/>
-            </a:pPr>
-            <a:r>
-              <a:rPr lang="en-US" sz="1100" b="1" spc="200" kern="0" dirty="0">
+            <a:off x="365760" y="822960"/>
+            <a:ext cx="8229600" cy="237744"/>
+          </a:xfrm>
+          <a:prstGeom prst="rect">
+            <a:avLst/>
+          </a:prstGeom>
+          <a:noFill/>
+          <a:ln/>
+        </p:spPr>
+        <p:txBody>
+          <a:bodyPr wrap="square" lIns="0" tIns="0" rIns="0" bIns="0" rtlCol="0" anchor="ctr"/>
+          <a:lstStyle/>
+          <a:p>
+            <a:pPr indent="0" marL="0">
+              <a:buNone/>
+            </a:pPr>
+            <a:r>
+              <a:rPr lang="en-US" sz="1100" b="1" spc="100" kern="0" dirty="0">
                 <a:solidFill>
                   <a:srgbClr val="C7922C"/>
                 </a:solidFill>
@@ -4366,7 +5167,7 @@
                 <a:ea typeface="Calibri" pitchFamily="34" charset="-122"/>
                 <a:cs typeface="Calibri" pitchFamily="34" charset="-120"/>
               </a:rPr>
-              <a:t>📖 READ THE PROMPT — 1 MINUTE</a:t>
+              <a:t>READ THE PROMPT — 1 MINUTE</a:t>
             </a:r>
             <a:endParaRPr lang="en-US" sz="1100" dirty="0"/>
           </a:p>
@@ -4380,18 +5181,18 @@
         </p:nvSpPr>
         <p:spPr>
           <a:xfrm>
-            <a:off x="457200" y="1417320"/>
-            <a:ext cx="8229600" cy="1645920"/>
+            <a:off x="365760" y="1143000"/>
+            <a:ext cx="8412480" cy="1737360"/>
           </a:xfrm>
           <a:prstGeom prst="roundRect">
             <a:avLst>
-              <a:gd name="adj" fmla="val 5556"/>
+              <a:gd name="adj" fmla="val 5263"/>
             </a:avLst>
           </a:prstGeom>
           <a:solidFill>
             <a:srgbClr val="FEF6E8"/>
           </a:solidFill>
-          <a:ln w="12700">
+          <a:ln w="19050">
             <a:solidFill>
               <a:srgbClr val="C7922C"/>
             </a:solidFill>
@@ -4414,24 +5215,24 @@
         </p:nvSpPr>
         <p:spPr>
           <a:xfrm>
-            <a:off x="640080" y="1527048"/>
-            <a:ext cx="7863840" cy="1417320"/>
-          </a:xfrm>
-          <a:prstGeom prst="rect">
-            <a:avLst/>
-          </a:prstGeom>
-          <a:noFill/>
-          <a:ln/>
-        </p:spPr>
-        <p:txBody>
-          <a:bodyPr wrap="square" lIns="0" tIns="0" rIns="0" bIns="0" rtlCol="0" anchor="ctr"/>
-          <a:lstStyle/>
-          <a:p>
-            <a:pPr indent="0" marL="0">
-              <a:buNone/>
-            </a:pPr>
-            <a:r>
-              <a:rPr lang="en-US" sz="1800" i="1" dirty="0">
+            <a:off x="594360" y="1271016"/>
+            <a:ext cx="7955280" cy="1481328"/>
+          </a:xfrm>
+          <a:prstGeom prst="rect">
+            <a:avLst/>
+          </a:prstGeom>
+          <a:noFill/>
+          <a:ln/>
+        </p:spPr>
+        <p:txBody>
+          <a:bodyPr wrap="square" lIns="0" tIns="0" rIns="0" bIns="0" rtlCol="0" anchor="ctr"/>
+          <a:lstStyle/>
+          <a:p>
+            <a:pPr indent="0" marL="0">
+              <a:buNone/>
+            </a:pPr>
+            <a:r>
+              <a:rPr lang="en-US" sz="1700" dirty="0">
                 <a:solidFill>
                   <a:srgbClr val="1E293B"/>
                 </a:solidFill>
@@ -4439,9 +5240,9 @@
                 <a:ea typeface="Calibri" pitchFamily="34" charset="-122"/>
                 <a:cs typeface="Calibri" pitchFamily="34" charset="-120"/>
               </a:rPr>
-              <a:t>If you could travel anywhere in the world and write about it, where would you go? What would you want to learn there? Start with: 'I would pack my bag and fly to... because I want to find out...'</a:t>
-            </a:r>
-            <a:endParaRPr lang="en-US" sz="1800" dirty="0"/>
+              <a:t>Write the opening of a travel guide for the place you live. Make someone want to come.</a:t>
+            </a:r>
+            <a:endParaRPr lang="en-US" sz="1700" dirty="0"/>
           </a:p>
         </p:txBody>
       </p:sp>
@@ -4453,76 +5254,34 @@
         </p:nvSpPr>
         <p:spPr>
           <a:xfrm>
-            <a:off x="640080" y="3246120"/>
-            <a:ext cx="7863840" cy="457200"/>
-          </a:xfrm>
-          <a:prstGeom prst="rect">
-            <a:avLst/>
-          </a:prstGeom>
-          <a:noFill/>
-          <a:ln/>
-        </p:spPr>
-        <p:txBody>
-          <a:bodyPr wrap="square" lIns="0" tIns="0" rIns="0" bIns="0" rtlCol="0" anchor="ctr"/>
-          <a:lstStyle/>
-          <a:p>
-            <a:pPr indent="0" marL="0">
-              <a:buNone/>
-            </a:pPr>
-            <a:r>
-              <a:rPr lang="en-US" sz="1400" b="1" dirty="0">
-                <a:solidFill>
-                  <a:srgbClr val="0E1C42"/>
-                </a:solidFill>
-                <a:latin typeface="Calibri" pitchFamily="34" charset="0"/>
-                <a:ea typeface="Calibri" pitchFamily="34" charset="-122"/>
-                <a:cs typeface="Calibri" pitchFamily="34" charset="-120"/>
-              </a:rPr>
-              <a:t>Type in the chat </a:t>
-            </a:r>
-            <a:pPr indent="0" marL="0">
-              <a:buNone/>
-            </a:pPr>
-            <a:r>
-              <a:rPr lang="en-US" sz="1400" dirty="0">
-                <a:solidFill>
-                  <a:srgbClr val="1E293B"/>
-                </a:solidFill>
-                <a:latin typeface="Calibri" pitchFamily="34" charset="0"/>
-                <a:ea typeface="Calibri" pitchFamily="34" charset="-122"/>
-                <a:cs typeface="Calibri" pitchFamily="34" charset="-120"/>
-              </a:rPr>
-              <a:t>or </a:t>
-            </a:r>
-            <a:pPr indent="0" marL="0">
-              <a:buNone/>
-            </a:pPr>
-            <a:r>
-              <a:rPr lang="en-US" sz="1400" b="1" dirty="0">
-                <a:solidFill>
-                  <a:srgbClr val="0E1C42"/>
-                </a:solidFill>
-                <a:latin typeface="Calibri" pitchFamily="34" charset="0"/>
-                <a:ea typeface="Calibri" pitchFamily="34" charset="-122"/>
-                <a:cs typeface="Calibri" pitchFamily="34" charset="-120"/>
-              </a:rPr>
-              <a:t>write on paper</a:t>
-            </a:r>
-            <a:pPr indent="0" marL="0">
-              <a:buNone/>
-            </a:pPr>
-            <a:r>
-              <a:rPr lang="en-US" sz="1400" dirty="0">
-                <a:solidFill>
-                  <a:srgbClr val="1E293B"/>
-                </a:solidFill>
-                <a:latin typeface="Calibri" pitchFamily="34" charset="0"/>
-                <a:ea typeface="Calibri" pitchFamily="34" charset="-122"/>
-                <a:cs typeface="Calibri" pitchFamily="34" charset="-120"/>
-              </a:rPr>
-              <a:t> to hold up when we share.</a:t>
-            </a:r>
-            <a:endParaRPr lang="en-US" sz="1400" dirty="0"/>
+            <a:off x="365760" y="3063240"/>
+            <a:ext cx="8412480" cy="365760"/>
+          </a:xfrm>
+          <a:prstGeom prst="rect">
+            <a:avLst/>
+          </a:prstGeom>
+          <a:noFill/>
+          <a:ln/>
+        </p:spPr>
+        <p:txBody>
+          <a:bodyPr wrap="square" lIns="0" tIns="0" rIns="0" bIns="0" rtlCol="0" anchor="ctr"/>
+          <a:lstStyle/>
+          <a:p>
+            <a:pPr indent="0" marL="0">
+              <a:buNone/>
+            </a:pPr>
+            <a:r>
+              <a:rPr lang="en-US" sz="1600" i="1" dirty="0">
+                <a:solidFill>
+                  <a:srgbClr val="64748B"/>
+                </a:solidFill>
+                <a:latin typeface="Calibri" pitchFamily="34" charset="0"/>
+                <a:ea typeface="Calibri" pitchFamily="34" charset="-122"/>
+                <a:cs typeface="Calibri" pitchFamily="34" charset="-120"/>
+              </a:rPr>
+              <a:t>Think first. You will have five minutes to write.</a:t>
+            </a:r>
+            <a:endParaRPr lang="en-US" sz="1600" dirty="0"/>
           </a:p>
         </p:txBody>
       </p:sp>
@@ -4560,30 +5319,89 @@
       </p:grpSpPr>
       <p:sp>
         <p:nvSpPr>
-          <p:cNvPr id="2" name="Text 0"/>
-          <p:cNvSpPr/>
-          <p:nvPr/>
-        </p:nvSpPr>
-        <p:spPr>
-          <a:xfrm>
-            <a:off x="457200" y="228600"/>
-            <a:ext cx="8229600" cy="640080"/>
-          </a:xfrm>
-          <a:prstGeom prst="rect">
-            <a:avLst/>
-          </a:prstGeom>
-          <a:noFill/>
-          <a:ln/>
-        </p:spPr>
-        <p:txBody>
-          <a:bodyPr wrap="square" lIns="0" tIns="0" rIns="0" bIns="0" rtlCol="0" anchor="ctr"/>
-          <a:lstStyle/>
-          <a:p>
-            <a:pPr algn="ctr" indent="0" marL="0">
-              <a:buNone/>
-            </a:pPr>
-            <a:r>
-              <a:rPr lang="en-US" sz="3200" b="1" dirty="0">
+          <p:cNvPr id="2" name="Shape 0"/>
+          <p:cNvSpPr/>
+          <p:nvPr/>
+        </p:nvSpPr>
+        <p:spPr>
+          <a:xfrm>
+            <a:off x="0" y="0"/>
+            <a:ext cx="9144000" cy="566928"/>
+          </a:xfrm>
+          <a:prstGeom prst="rect">
+            <a:avLst/>
+          </a:prstGeom>
+          <a:solidFill>
+            <a:srgbClr val="C7922C"/>
+          </a:solidFill>
+          <a:ln/>
+        </p:spPr>
+      </p:sp>
+      <p:sp>
+        <p:nvSpPr>
+          <p:cNvPr id="3" name="Text 1"/>
+          <p:cNvSpPr/>
+          <p:nvPr/>
+        </p:nvSpPr>
+        <p:spPr>
+          <a:xfrm>
+            <a:off x="365760" y="54864"/>
+            <a:ext cx="8412480" cy="457200"/>
+          </a:xfrm>
+          <a:prstGeom prst="rect">
+            <a:avLst/>
+          </a:prstGeom>
+          <a:noFill/>
+          <a:ln/>
+        </p:spPr>
+        <p:txBody>
+          <a:bodyPr wrap="square" lIns="0" tIns="0" rIns="0" bIns="0" rtlCol="0" anchor="ctr"/>
+          <a:lstStyle/>
+          <a:p>
+            <a:pPr indent="0" marL="0">
+              <a:buNone/>
+            </a:pPr>
+            <a:r>
+              <a:rPr lang="en-US" sz="2200" b="1" dirty="0">
+                <a:solidFill>
+                  <a:srgbClr val="FFFFFF"/>
+                </a:solidFill>
+                <a:latin typeface="Calibri" pitchFamily="34" charset="0"/>
+                <a:ea typeface="Calibri" pitchFamily="34" charset="-122"/>
+                <a:cs typeface="Calibri" pitchFamily="34" charset="-120"/>
+              </a:rPr>
+              <a:t>✍️  Writing Time</a:t>
+            </a:r>
+            <a:endParaRPr lang="en-US" sz="2200" dirty="0"/>
+          </a:p>
+        </p:txBody>
+      </p:sp>
+      <p:sp>
+        <p:nvSpPr>
+          <p:cNvPr id="4" name="Text 2"/>
+          <p:cNvSpPr/>
+          <p:nvPr/>
+        </p:nvSpPr>
+        <p:spPr>
+          <a:xfrm>
+            <a:off x="365760" y="868680"/>
+            <a:ext cx="8412480" cy="502920"/>
+          </a:xfrm>
+          <a:prstGeom prst="rect">
+            <a:avLst/>
+          </a:prstGeom>
+          <a:noFill/>
+          <a:ln/>
+        </p:spPr>
+        <p:txBody>
+          <a:bodyPr wrap="square" lIns="0" tIns="0" rIns="0" bIns="0" rtlCol="0" anchor="ctr"/>
+          <a:lstStyle/>
+          <a:p>
+            <a:pPr indent="0" marL="0">
+              <a:buNone/>
+            </a:pPr>
+            <a:r>
+              <a:rPr lang="en-US" sz="2600" b="1" dirty="0">
                 <a:solidFill>
                   <a:srgbClr val="0E1C42"/>
                 </a:solidFill>
@@ -4591,38 +5409,38 @@
                 <a:ea typeface="Calibri" pitchFamily="34" charset="-122"/>
                 <a:cs typeface="Calibri" pitchFamily="34" charset="-120"/>
               </a:rPr>
-              <a:t>✏️  Writing Time</a:t>
-            </a:r>
-            <a:endParaRPr lang="en-US" sz="3200" dirty="0"/>
-          </a:p>
-        </p:txBody>
-      </p:sp>
-      <p:sp>
-        <p:nvSpPr>
-          <p:cNvPr id="3" name="Text 1"/>
-          <p:cNvSpPr/>
-          <p:nvPr/>
-        </p:nvSpPr>
-        <p:spPr>
-          <a:xfrm>
-            <a:off x="914400" y="822960"/>
-            <a:ext cx="7315200" cy="365760"/>
-          </a:xfrm>
-          <a:prstGeom prst="rect">
-            <a:avLst/>
-          </a:prstGeom>
-          <a:noFill/>
-          <a:ln/>
-        </p:spPr>
-        <p:txBody>
-          <a:bodyPr wrap="square" lIns="0" tIns="0" rIns="0" bIns="0" rtlCol="0" anchor="ctr"/>
-          <a:lstStyle/>
-          <a:p>
-            <a:pPr algn="ctr" indent="0" marL="0">
-              <a:buNone/>
-            </a:pPr>
-            <a:r>
-              <a:rPr lang="en-US" sz="1600" dirty="0">
+              <a:t>5 minutes — keep your pencil moving!</a:t>
+            </a:r>
+            <a:endParaRPr lang="en-US" sz="2600" dirty="0"/>
+          </a:p>
+        </p:txBody>
+      </p:sp>
+      <p:sp>
+        <p:nvSpPr>
+          <p:cNvPr id="5" name="Text 3"/>
+          <p:cNvSpPr/>
+          <p:nvPr/>
+        </p:nvSpPr>
+        <p:spPr>
+          <a:xfrm>
+            <a:off x="365760" y="1463040"/>
+            <a:ext cx="8229600" cy="237744"/>
+          </a:xfrm>
+          <a:prstGeom prst="rect">
+            <a:avLst/>
+          </a:prstGeom>
+          <a:noFill/>
+          <a:ln/>
+        </p:spPr>
+        <p:txBody>
+          <a:bodyPr wrap="square" lIns="0" tIns="0" rIns="0" bIns="0" rtlCol="0" anchor="ctr"/>
+          <a:lstStyle/>
+          <a:p>
+            <a:pPr indent="0" marL="0">
+              <a:buNone/>
+            </a:pPr>
+            <a:r>
+              <a:rPr lang="en-US" sz="1100" b="1" spc="100" kern="0" dirty="0">
                 <a:solidFill>
                   <a:srgbClr val="C7922C"/>
                 </a:solidFill>
@@ -4630,32 +5448,32 @@
                 <a:ea typeface="Calibri" pitchFamily="34" charset="-122"/>
                 <a:cs typeface="Calibri" pitchFamily="34" charset="-120"/>
               </a:rPr>
-              <a:t>5 minutes — keep your pencil moving!</a:t>
-            </a:r>
-            <a:endParaRPr lang="en-US" sz="1600" dirty="0"/>
-          </a:p>
-        </p:txBody>
-      </p:sp>
-      <p:sp>
-        <p:nvSpPr>
-          <p:cNvPr id="4" name="Shape 2"/>
-          <p:cNvSpPr/>
-          <p:nvPr/>
-        </p:nvSpPr>
-        <p:spPr>
-          <a:xfrm>
-            <a:off x="457200" y="1371600"/>
-            <a:ext cx="8229600" cy="1280160"/>
+              <a:t>YOUR PROMPT</a:t>
+            </a:r>
+            <a:endParaRPr lang="en-US" sz="1100" dirty="0"/>
+          </a:p>
+        </p:txBody>
+      </p:sp>
+      <p:sp>
+        <p:nvSpPr>
+          <p:cNvPr id="6" name="Shape 4"/>
+          <p:cNvSpPr/>
+          <p:nvPr/>
+        </p:nvSpPr>
+        <p:spPr>
+          <a:xfrm>
+            <a:off x="365760" y="1737360"/>
+            <a:ext cx="8412480" cy="1417320"/>
           </a:xfrm>
           <a:prstGeom prst="roundRect">
             <a:avLst>
-              <a:gd name="adj" fmla="val 7143"/>
+              <a:gd name="adj" fmla="val 6452"/>
             </a:avLst>
           </a:prstGeom>
           <a:solidFill>
             <a:srgbClr val="FFFFFF"/>
           </a:solidFill>
-          <a:ln w="12700">
+          <a:ln w="19050">
             <a:solidFill>
               <a:srgbClr val="C7922C"/>
             </a:solidFill>
@@ -4672,44 +5490,30 @@
       </p:sp>
       <p:sp>
         <p:nvSpPr>
-          <p:cNvPr id="5" name="Text 3"/>
-          <p:cNvSpPr/>
-          <p:nvPr/>
-        </p:nvSpPr>
-        <p:spPr>
-          <a:xfrm>
-            <a:off x="640080" y="1417320"/>
-            <a:ext cx="7863840" cy="1188720"/>
-          </a:xfrm>
-          <a:prstGeom prst="rect">
-            <a:avLst/>
-          </a:prstGeom>
-          <a:noFill/>
-          <a:ln/>
-        </p:spPr>
-        <p:txBody>
-          <a:bodyPr wrap="square" lIns="0" tIns="0" rIns="0" bIns="0" rtlCol="0" anchor="t"/>
-          <a:lstStyle/>
-          <a:p>
-            <a:pPr indent="0" marL="0">
-              <a:buNone/>
-            </a:pPr>
-            <a:r>
-              <a:rPr lang="en-US" sz="1200" b="1" dirty="0">
-                <a:solidFill>
-                  <a:srgbClr val="C7922C"/>
-                </a:solidFill>
-                <a:latin typeface="Calibri" pitchFamily="34" charset="0"/>
-                <a:ea typeface="Calibri" pitchFamily="34" charset="-122"/>
-                <a:cs typeface="Calibri" pitchFamily="34" charset="-120"/>
-              </a:rPr>
-              <a:t>📖 Prompt: </a:t>
-            </a:r>
-            <a:pPr indent="0" marL="0">
-              <a:buNone/>
-            </a:pPr>
-            <a:r>
-              <a:rPr lang="en-US" sz="1200" i="1" dirty="0">
+          <p:cNvPr id="7" name="Text 5"/>
+          <p:cNvSpPr/>
+          <p:nvPr/>
+        </p:nvSpPr>
+        <p:spPr>
+          <a:xfrm>
+            <a:off x="594360" y="1865376"/>
+            <a:ext cx="7955280" cy="1161288"/>
+          </a:xfrm>
+          <a:prstGeom prst="rect">
+            <a:avLst/>
+          </a:prstGeom>
+          <a:noFill/>
+          <a:ln/>
+        </p:spPr>
+        <p:txBody>
+          <a:bodyPr wrap="square" lIns="0" tIns="0" rIns="0" bIns="0" rtlCol="0" anchor="ctr"/>
+          <a:lstStyle/>
+          <a:p>
+            <a:pPr indent="0" marL="0">
+              <a:buNone/>
+            </a:pPr>
+            <a:r>
+              <a:rPr lang="en-US" sz="1700" dirty="0">
                 <a:solidFill>
                   <a:srgbClr val="1E293B"/>
                 </a:solidFill>
@@ -4717,122 +5521,48 @@
                 <a:ea typeface="Calibri" pitchFamily="34" charset="-122"/>
                 <a:cs typeface="Calibri" pitchFamily="34" charset="-120"/>
               </a:rPr>
-              <a:t>If you could travel anywhere in the world and write about it, where would you go? What would you want to learn there? Start with: 'I would pack my bag and fly to... because I want to find out...'</a:t>
-            </a:r>
-            <a:endParaRPr lang="en-US" sz="1200" dirty="0"/>
-          </a:p>
-        </p:txBody>
-      </p:sp>
-      <p:sp>
-        <p:nvSpPr>
-          <p:cNvPr id="6" name="Shape 4"/>
-          <p:cNvSpPr/>
-          <p:nvPr/>
-        </p:nvSpPr>
-        <p:spPr>
-          <a:xfrm>
-            <a:off x="2286000" y="2926080"/>
-            <a:ext cx="4572000" cy="1280160"/>
-          </a:xfrm>
-          <a:prstGeom prst="roundRect">
-            <a:avLst>
-              <a:gd name="adj" fmla="val 8571"/>
-            </a:avLst>
-          </a:prstGeom>
-          <a:solidFill>
-            <a:srgbClr val="FFFFFF"/>
-          </a:solidFill>
-          <a:ln/>
-          <a:effectLst>
-            <a:outerShdw sx="100000" sy="100000" kx="0" ky="0" algn="bl" rotWithShape="0" blurRad="101600" dist="38100" dir="2700000">
-              <a:srgbClr val="000000">
-                <a:alpha val="12000"/>
-              </a:srgbClr>
-            </a:outerShdw>
-          </a:effectLst>
-        </p:spPr>
-      </p:sp>
-      <p:sp>
-        <p:nvSpPr>
-          <p:cNvPr id="7" name="Text 5"/>
-          <p:cNvSpPr/>
-          <p:nvPr/>
-        </p:nvSpPr>
-        <p:spPr>
-          <a:xfrm>
-            <a:off x="2468880" y="3017520"/>
-            <a:ext cx="4206240" cy="1097280"/>
-          </a:xfrm>
-          <a:prstGeom prst="rect">
-            <a:avLst/>
-          </a:prstGeom>
-          <a:noFill/>
-          <a:ln/>
-        </p:spPr>
-        <p:txBody>
-          <a:bodyPr wrap="square" lIns="0" tIns="0" rIns="0" bIns="0" rtlCol="0" anchor="t"/>
-          <a:lstStyle/>
-          <a:p>
-            <a:pPr indent="0" marL="0">
-              <a:buNone/>
-            </a:pPr>
-            <a:r>
-              <a:rPr lang="en-US" sz="1400" b="1" dirty="0">
-                <a:solidFill>
-                  <a:srgbClr val="0E1C42"/>
-                </a:solidFill>
-                <a:latin typeface="Calibri" pitchFamily="34" charset="0"/>
-                <a:ea typeface="Calibri" pitchFamily="34" charset="-122"/>
-                <a:cs typeface="Calibri" pitchFamily="34" charset="-120"/>
-              </a:rPr>
-              <a:t>If you get stuck:
-</a:t>
-            </a:r>
-            <a:pPr indent="0" marL="0">
-              <a:buNone/>
-            </a:pPr>
-            <a:r>
-              <a:rPr lang="en-US" sz="1300" dirty="0">
-                <a:solidFill>
-                  <a:srgbClr val="1E293B"/>
-                </a:solidFill>
-                <a:latin typeface="Calibri" pitchFamily="34" charset="0"/>
-                <a:ea typeface="Calibri" pitchFamily="34" charset="-122"/>
-                <a:cs typeface="Calibri" pitchFamily="34" charset="-120"/>
-              </a:rPr>
-              <a:t>• Reread the prompt above
-</a:t>
-            </a:r>
-            <a:pPr indent="0" marL="0">
-              <a:buNone/>
-            </a:pPr>
-            <a:r>
-              <a:rPr lang="en-US" sz="1300" dirty="0">
-                <a:solidFill>
-                  <a:srgbClr val="1E293B"/>
-                </a:solidFill>
-                <a:latin typeface="Calibri" pitchFamily="34" charset="0"/>
-                <a:ea typeface="Calibri" pitchFamily="34" charset="-122"/>
-                <a:cs typeface="Calibri" pitchFamily="34" charset="-120"/>
-              </a:rPr>
-              <a:t>• Write "I'm thinking..." until a new idea comes
-</a:t>
-            </a:r>
-            <a:pPr indent="0" marL="0">
-              <a:buNone/>
-            </a:pPr>
-            <a:r>
-              <a:rPr lang="en-US" sz="1300" dirty="0">
-                <a:solidFill>
-                  <a:srgbClr val="1E293B"/>
-                </a:solidFill>
-                <a:latin typeface="Calibri" pitchFamily="34" charset="0"/>
-                <a:ea typeface="Calibri" pitchFamily="34" charset="-122"/>
-                <a:cs typeface="Calibri" pitchFamily="34" charset="-120"/>
-              </a:rPr>
-              <a:t>• Keep going — don't erase!</a:t>
-            </a:r>
-            <a:endParaRPr lang="en-US" sz="1400" dirty="0"/>
+              <a:t>Write the opening of a travel guide for the place you live. Make someone want to come.</a:t>
+            </a:r>
+            <a:endParaRPr lang="en-US" sz="1700" dirty="0"/>
+          </a:p>
+        </p:txBody>
+      </p:sp>
+      <p:sp>
+        <p:nvSpPr>
+          <p:cNvPr id="8" name="Text 6"/>
+          <p:cNvSpPr/>
+          <p:nvPr/>
+        </p:nvSpPr>
+        <p:spPr>
+          <a:xfrm>
+            <a:off x="365760" y="3291840"/>
+            <a:ext cx="8412480" cy="365760"/>
+          </a:xfrm>
+          <a:prstGeom prst="rect">
+            <a:avLst/>
+          </a:prstGeom>
+          <a:noFill/>
+          <a:ln/>
+        </p:spPr>
+        <p:txBody>
+          <a:bodyPr wrap="square" lIns="0" tIns="0" rIns="0" bIns="0" rtlCol="0" anchor="ctr"/>
+          <a:lstStyle/>
+          <a:p>
+            <a:pPr indent="0" marL="0">
+              <a:buNone/>
+            </a:pPr>
+            <a:r>
+              <a:rPr lang="en-US" sz="1500" i="1" dirty="0">
+                <a:solidFill>
+                  <a:srgbClr val="64748B"/>
+                </a:solidFill>
+                <a:latin typeface="Calibri" pitchFamily="34" charset="0"/>
+                <a:ea typeface="Calibri" pitchFamily="34" charset="-122"/>
+                <a:cs typeface="Calibri" pitchFamily="34" charset="-120"/>
+              </a:rPr>
+              <a:t>Do not stop to erase. If you get stuck, write the last word again and keep going.</a:t>
+            </a:r>
+            <a:endParaRPr lang="en-US" sz="1500" dirty="0"/>
           </a:p>
         </p:txBody>
       </p:sp>
@@ -4870,39 +5600,23 @@
       </p:grpSpPr>
       <p:sp>
         <p:nvSpPr>
-          <p:cNvPr id="2" name="Text 0"/>
-          <p:cNvSpPr/>
-          <p:nvPr/>
-        </p:nvSpPr>
-        <p:spPr>
-          <a:xfrm>
-            <a:off x="3657600" y="365760"/>
-            <a:ext cx="1828800" cy="640080"/>
-          </a:xfrm>
-          <a:prstGeom prst="rect">
-            <a:avLst/>
-          </a:prstGeom>
-          <a:noFill/>
-          <a:ln/>
-        </p:spPr>
-        <p:txBody>
-          <a:bodyPr wrap="square" lIns="0" tIns="0" rIns="0" bIns="0" rtlCol="0" anchor="ctr"/>
-          <a:lstStyle/>
-          <a:p>
-            <a:pPr algn="ctr" indent="0" marL="0">
-              <a:buNone/>
-            </a:pPr>
-            <a:r>
-              <a:rPr lang="en-US" sz="4000" dirty="0">
-                <a:solidFill>
-                  <a:srgbClr val="000000"/>
-                </a:solidFill>
-              </a:rPr>
-              <a:t>🔍</a:t>
-            </a:r>
-            <a:endParaRPr lang="en-US" sz="4000" dirty="0"/>
-          </a:p>
-        </p:txBody>
+          <p:cNvPr id="2" name="Shape 0"/>
+          <p:cNvSpPr/>
+          <p:nvPr/>
+        </p:nvSpPr>
+        <p:spPr>
+          <a:xfrm>
+            <a:off x="0" y="0"/>
+            <a:ext cx="9144000" cy="566928"/>
+          </a:xfrm>
+          <a:prstGeom prst="rect">
+            <a:avLst/>
+          </a:prstGeom>
+          <a:solidFill>
+            <a:srgbClr val="34B76F"/>
+          </a:solidFill>
+          <a:ln/>
+        </p:spPr>
       </p:sp>
       <p:sp>
         <p:nvSpPr>
@@ -4912,24 +5626,63 @@
         </p:nvSpPr>
         <p:spPr>
           <a:xfrm>
-            <a:off x="914400" y="914400"/>
-            <a:ext cx="7315200" cy="640080"/>
-          </a:xfrm>
-          <a:prstGeom prst="rect">
-            <a:avLst/>
-          </a:prstGeom>
-          <a:noFill/>
-          <a:ln/>
-        </p:spPr>
-        <p:txBody>
-          <a:bodyPr wrap="square" lIns="0" tIns="0" rIns="0" bIns="0" rtlCol="0" anchor="ctr"/>
-          <a:lstStyle/>
-          <a:p>
-            <a:pPr algn="ctr" indent="0" marL="0">
-              <a:buNone/>
-            </a:pPr>
-            <a:r>
-              <a:rPr lang="en-US" sz="3200" b="1" dirty="0">
+            <a:off x="365760" y="54864"/>
+            <a:ext cx="8412480" cy="457200"/>
+          </a:xfrm>
+          <a:prstGeom prst="rect">
+            <a:avLst/>
+          </a:prstGeom>
+          <a:noFill/>
+          <a:ln/>
+        </p:spPr>
+        <p:txBody>
+          <a:bodyPr wrap="square" lIns="0" tIns="0" rIns="0" bIns="0" rtlCol="0" anchor="ctr"/>
+          <a:lstStyle/>
+          <a:p>
+            <a:pPr indent="0" marL="0">
+              <a:buNone/>
+            </a:pPr>
+            <a:r>
+              <a:rPr lang="en-US" sz="2200" b="1" dirty="0">
+                <a:solidFill>
+                  <a:srgbClr val="FFFFFF"/>
+                </a:solidFill>
+                <a:latin typeface="Calibri" pitchFamily="34" charset="0"/>
+                <a:ea typeface="Calibri" pitchFamily="34" charset="-122"/>
+                <a:cs typeface="Calibri" pitchFamily="34" charset="-120"/>
+              </a:rPr>
+              <a:t>🔍  Edit &amp; Revise</a:t>
+            </a:r>
+            <a:endParaRPr lang="en-US" sz="2200" dirty="0"/>
+          </a:p>
+        </p:txBody>
+      </p:sp>
+      <p:sp>
+        <p:nvSpPr>
+          <p:cNvPr id="4" name="Text 2"/>
+          <p:cNvSpPr/>
+          <p:nvPr/>
+        </p:nvSpPr>
+        <p:spPr>
+          <a:xfrm>
+            <a:off x="365760" y="868680"/>
+            <a:ext cx="8412480" cy="457200"/>
+          </a:xfrm>
+          <a:prstGeom prst="rect">
+            <a:avLst/>
+          </a:prstGeom>
+          <a:noFill/>
+          <a:ln/>
+        </p:spPr>
+        <p:txBody>
+          <a:bodyPr wrap="square" lIns="0" tIns="0" rIns="0" bIns="0" rtlCol="0" anchor="ctr"/>
+          <a:lstStyle/>
+          <a:p>
+            <a:pPr indent="0" marL="0">
+              <a:buNone/>
+            </a:pPr>
+            <a:r>
+              <a:rPr lang="en-US" sz="2400" b="1" dirty="0">
                 <a:solidFill>
                   <a:srgbClr val="0E1C42"/>
                 </a:solidFill>
@@ -4937,38 +5690,38 @@
                 <a:ea typeface="Calibri" pitchFamily="34" charset="-122"/>
                 <a:cs typeface="Calibri" pitchFamily="34" charset="-120"/>
               </a:rPr>
-              <a:t>Edit &amp; Revise</a:t>
-            </a:r>
-            <a:endParaRPr lang="en-US" sz="3200" dirty="0"/>
-          </a:p>
-        </p:txBody>
-      </p:sp>
-      <p:sp>
-        <p:nvSpPr>
-          <p:cNvPr id="4" name="Text 2"/>
-          <p:cNvSpPr/>
-          <p:nvPr/>
-        </p:nvSpPr>
-        <p:spPr>
-          <a:xfrm>
-            <a:off x="914400" y="1508760"/>
-            <a:ext cx="7315200" cy="457200"/>
-          </a:xfrm>
-          <a:prstGeom prst="rect">
-            <a:avLst/>
-          </a:prstGeom>
-          <a:noFill/>
-          <a:ln/>
-        </p:spPr>
-        <p:txBody>
-          <a:bodyPr wrap="square" lIns="0" tIns="0" rIns="0" bIns="0" rtlCol="0" anchor="ctr"/>
-          <a:lstStyle/>
-          <a:p>
-            <a:pPr algn="ctr" indent="0" marL="0">
-              <a:buNone/>
-            </a:pPr>
-            <a:r>
-              <a:rPr lang="en-US" sz="1600" dirty="0">
+              <a:t>1 minute — pick ONE thing to fix.</a:t>
+            </a:r>
+            <a:endParaRPr lang="en-US" sz="2400" dirty="0"/>
+          </a:p>
+        </p:txBody>
+      </p:sp>
+      <p:sp>
+        <p:nvSpPr>
+          <p:cNvPr id="5" name="Text 3"/>
+          <p:cNvSpPr/>
+          <p:nvPr/>
+        </p:nvSpPr>
+        <p:spPr>
+          <a:xfrm>
+            <a:off x="365760" y="1417320"/>
+            <a:ext cx="8229600" cy="237744"/>
+          </a:xfrm>
+          <a:prstGeom prst="rect">
+            <a:avLst/>
+          </a:prstGeom>
+          <a:noFill/>
+          <a:ln/>
+        </p:spPr>
+        <p:txBody>
+          <a:bodyPr wrap="square" lIns="0" tIns="0" rIns="0" bIns="0" rtlCol="0" anchor="ctr"/>
+          <a:lstStyle/>
+          <a:p>
+            <a:pPr indent="0" marL="0">
+              <a:buNone/>
+            </a:pPr>
+            <a:r>
+              <a:rPr lang="en-US" sz="1100" b="1" spc="100" kern="0" dirty="0">
                 <a:solidFill>
                   <a:srgbClr val="34B76F"/>
                 </a:solidFill>
@@ -4976,26 +5729,26 @@
                 <a:ea typeface="Calibri" pitchFamily="34" charset="-122"/>
                 <a:cs typeface="Calibri" pitchFamily="34" charset="-120"/>
               </a:rPr>
-              <a:t>1 minute — pick ONE thing to fix</a:t>
-            </a:r>
-            <a:endParaRPr lang="en-US" sz="1600" dirty="0"/>
-          </a:p>
-        </p:txBody>
-      </p:sp>
-      <p:sp>
-        <p:nvSpPr>
-          <p:cNvPr id="5" name="Shape 3"/>
-          <p:cNvSpPr/>
-          <p:nvPr/>
-        </p:nvSpPr>
-        <p:spPr>
-          <a:xfrm>
-            <a:off x="1371600" y="2103120"/>
-            <a:ext cx="6400800" cy="640080"/>
+              <a:t>TODAY'S EDIT FOCUS</a:t>
+            </a:r>
+            <a:endParaRPr lang="en-US" sz="1100" dirty="0"/>
+          </a:p>
+        </p:txBody>
+      </p:sp>
+      <p:sp>
+        <p:nvSpPr>
+          <p:cNvPr id="6" name="Shape 4"/>
+          <p:cNvSpPr/>
+          <p:nvPr/>
+        </p:nvSpPr>
+        <p:spPr>
+          <a:xfrm>
+            <a:off x="365760" y="1691640"/>
+            <a:ext cx="8412480" cy="777240"/>
           </a:xfrm>
           <a:prstGeom prst="roundRect">
             <a:avLst>
-              <a:gd name="adj" fmla="val 14286"/>
+              <a:gd name="adj" fmla="val 11765"/>
             </a:avLst>
           </a:prstGeom>
           <a:solidFill>
@@ -5018,44 +5771,30 @@
       </p:sp>
       <p:sp>
         <p:nvSpPr>
-          <p:cNvPr id="6" name="Text 4"/>
-          <p:cNvSpPr/>
-          <p:nvPr/>
-        </p:nvSpPr>
-        <p:spPr>
-          <a:xfrm>
-            <a:off x="1554480" y="2148840"/>
-            <a:ext cx="6035040" cy="548640"/>
-          </a:xfrm>
-          <a:prstGeom prst="rect">
-            <a:avLst/>
-          </a:prstGeom>
-          <a:noFill/>
-          <a:ln/>
-        </p:spPr>
-        <p:txBody>
-          <a:bodyPr wrap="square" lIns="0" tIns="0" rIns="0" bIns="0" rtlCol="0" anchor="ctr"/>
-          <a:lstStyle/>
-          <a:p>
-            <a:pPr indent="0" marL="0">
-              <a:buNone/>
-            </a:pPr>
-            <a:r>
-              <a:rPr lang="en-US" sz="1400" b="1" dirty="0">
-                <a:solidFill>
-                  <a:srgbClr val="34B76F"/>
-                </a:solidFill>
-                <a:latin typeface="Calibri" pitchFamily="34" charset="0"/>
-                <a:ea typeface="Calibri" pitchFamily="34" charset="-122"/>
-                <a:cs typeface="Calibri" pitchFamily="34" charset="-120"/>
-              </a:rPr>
-              <a:t>Today's check: </a:t>
-            </a:r>
-            <a:pPr indent="0" marL="0">
-              <a:buNone/>
-            </a:pPr>
-            <a:r>
-              <a:rPr lang="en-US" sz="1400" dirty="0">
+          <p:cNvPr id="7" name="Text 5"/>
+          <p:cNvSpPr/>
+          <p:nvPr/>
+        </p:nvSpPr>
+        <p:spPr>
+          <a:xfrm>
+            <a:off x="594360" y="1819656"/>
+            <a:ext cx="7955280" cy="521208"/>
+          </a:xfrm>
+          <a:prstGeom prst="rect">
+            <a:avLst/>
+          </a:prstGeom>
+          <a:noFill/>
+          <a:ln/>
+        </p:spPr>
+        <p:txBody>
+          <a:bodyPr wrap="square" lIns="0" tIns="0" rIns="0" bIns="0" rtlCol="0" anchor="ctr"/>
+          <a:lstStyle/>
+          <a:p>
+            <a:pPr indent="0" marL="0">
+              <a:buNone/>
+            </a:pPr>
+            <a:r>
+              <a:rPr lang="en-US" sz="1700" dirty="0">
                 <a:solidFill>
                   <a:srgbClr val="1E293B"/>
                 </a:solidFill>
@@ -5063,40 +5802,11 @@
                 <a:ea typeface="Calibri" pitchFamily="34" charset="-122"/>
                 <a:cs typeface="Calibri" pitchFamily="34" charset="-120"/>
               </a:rPr>
-              <a:t>Did I include what I want to LEARN, not just what I want to see?</a:t>
-            </a:r>
-            <a:endParaRPr lang="en-US" sz="1400" dirty="0"/>
-          </a:p>
-        </p:txBody>
-      </p:sp>
-      <p:sp>
-        <p:nvSpPr>
-          <p:cNvPr id="7" name="Shape 5"/>
-          <p:cNvSpPr/>
-          <p:nvPr/>
-        </p:nvSpPr>
-        <p:spPr>
-          <a:xfrm>
-            <a:off x="1371600" y="2926080"/>
-            <a:ext cx="6400800" cy="1463040"/>
-          </a:xfrm>
-          <a:prstGeom prst="roundRect">
-            <a:avLst>
-              <a:gd name="adj" fmla="val 6250"/>
-            </a:avLst>
-          </a:prstGeom>
-          <a:solidFill>
-            <a:srgbClr val="FFFFFF"/>
-          </a:solidFill>
-          <a:ln/>
-          <a:effectLst>
-            <a:outerShdw sx="100000" sy="100000" kx="0" ky="0" algn="bl" rotWithShape="0" blurRad="101600" dist="38100" dir="2700000">
-              <a:srgbClr val="000000">
-                <a:alpha val="12000"/>
-              </a:srgbClr>
-            </a:outerShdw>
-          </a:effectLst>
-        </p:spPr>
+              <a:t>Did I read my writing out loud to check that it makes sense?</a:t>
+            </a:r>
+            <a:endParaRPr lang="en-US" sz="1700" dirty="0"/>
+          </a:p>
+        </p:txBody>
       </p:sp>
       <p:sp>
         <p:nvSpPr>
@@ -5106,45 +5816,24 @@
         </p:nvSpPr>
         <p:spPr>
           <a:xfrm>
-            <a:off x="1554480" y="3017520"/>
-            <a:ext cx="6035040" cy="1280160"/>
-          </a:xfrm>
-          <a:prstGeom prst="rect">
-            <a:avLst/>
-          </a:prstGeom>
-          <a:noFill/>
-          <a:ln/>
-        </p:spPr>
-        <p:txBody>
-          <a:bodyPr wrap="square" lIns="0" tIns="0" rIns="0" bIns="0" rtlCol="0" anchor="t"/>
-          <a:lstStyle/>
-          <a:p>
-            <a:pPr indent="0" marL="0">
-              <a:spcAft>
-                <a:spcPts val="200"/>
-              </a:spcAft>
-              <a:buNone/>
-            </a:pPr>
-            <a:r>
-              <a:rPr lang="en-US" sz="1300" b="1" dirty="0">
-                <a:solidFill>
-                  <a:srgbClr val="0E1C42"/>
-                </a:solidFill>
-                <a:latin typeface="Calibri" pitchFamily="34" charset="0"/>
-                <a:ea typeface="Calibri" pitchFamily="34" charset="-122"/>
-                <a:cs typeface="Calibri" pitchFamily="34" charset="-120"/>
-              </a:rPr>
-              <a:t>Quick check:
-</a:t>
-            </a:r>
-            <a:pPr indent="0" marL="0">
-              <a:spcAft>
-                <a:spcPts val="200"/>
-              </a:spcAft>
-              <a:buNone/>
-            </a:pPr>
-            <a:r>
-              <a:rPr lang="en-US" sz="1200" dirty="0">
+            <a:off x="365760" y="2651760"/>
+            <a:ext cx="8412480" cy="365760"/>
+          </a:xfrm>
+          <a:prstGeom prst="rect">
+            <a:avLst/>
+          </a:prstGeom>
+          <a:noFill/>
+          <a:ln/>
+        </p:spPr>
+        <p:txBody>
+          <a:bodyPr wrap="square" lIns="0" tIns="0" rIns="0" bIns="0" rtlCol="0" anchor="ctr"/>
+          <a:lstStyle/>
+          <a:p>
+            <a:pPr indent="0" marL="0">
+              <a:buNone/>
+            </a:pPr>
+            <a:r>
+              <a:rPr lang="en-US" sz="1500" b="1" dirty="0">
                 <a:solidFill>
                   <a:srgbClr val="1E293B"/>
                 </a:solidFill>
@@ -5152,17 +5841,13 @@
                 <a:ea typeface="Calibri" pitchFamily="34" charset="-122"/>
                 <a:cs typeface="Calibri" pitchFamily="34" charset="-120"/>
               </a:rPr>
-              <a:t>□ Capital letters at the start of every sentence
-</a:t>
-            </a:r>
-            <a:pPr indent="0" marL="0">
-              <a:spcAft>
-                <a:spcPts val="200"/>
-              </a:spcAft>
-              <a:buNone/>
-            </a:pPr>
-            <a:r>
-              <a:rPr lang="en-US" sz="1200" dirty="0">
+              <a:t>Quick check:  </a:t>
+            </a:r>
+            <a:pPr indent="0" marL="0">
+              <a:buNone/>
+            </a:pPr>
+            <a:r>
+              <a:rPr lang="en-US" sz="1500" dirty="0">
                 <a:solidFill>
                   <a:srgbClr val="1E293B"/>
                 </a:solidFill>
@@ -5170,45 +5855,9 @@
                 <a:ea typeface="Calibri" pitchFamily="34" charset="-122"/>
                 <a:cs typeface="Calibri" pitchFamily="34" charset="-120"/>
               </a:rPr>
-              <a:t>□ End punctuation ( .  ?  ! )
-</a:t>
-            </a:r>
-            <a:pPr indent="0" marL="0">
-              <a:spcAft>
-                <a:spcPts val="200"/>
-              </a:spcAft>
-              <a:buNone/>
-            </a:pPr>
-            <a:r>
-              <a:rPr lang="en-US" sz="1200" dirty="0">
-                <a:solidFill>
-                  <a:srgbClr val="1E293B"/>
-                </a:solidFill>
-                <a:latin typeface="Calibri" pitchFamily="34" charset="0"/>
-                <a:ea typeface="Calibri" pitchFamily="34" charset="-122"/>
-                <a:cs typeface="Calibri" pitchFamily="34" charset="-120"/>
-              </a:rPr>
-              <a:t>□ Spelling — circle any words that look wrong
-</a:t>
-            </a:r>
-            <a:pPr indent="0" marL="0">
-              <a:spcAft>
-                <a:spcPts val="200"/>
-              </a:spcAft>
-              <a:buNone/>
-            </a:pPr>
-            <a:r>
-              <a:rPr lang="en-US" sz="1200" dirty="0">
-                <a:solidFill>
-                  <a:srgbClr val="1E293B"/>
-                </a:solidFill>
-                <a:latin typeface="Calibri" pitchFamily="34" charset="0"/>
-                <a:ea typeface="Calibri" pitchFamily="34" charset="-122"/>
-                <a:cs typeface="Calibri" pitchFamily="34" charset="-120"/>
-              </a:rPr>
-              <a:t>□ Read it quietly to yourself — does it sound right?</a:t>
-            </a:r>
-            <a:endParaRPr lang="en-US" sz="1300" dirty="0"/>
+              <a:t>capitals  ·  end punctuation  ·  circle a word you are unsure of  ·  read it aloud</a:t>
+            </a:r>
+            <a:endParaRPr lang="en-US" sz="1500" dirty="0"/>
           </a:p>
         </p:txBody>
       </p:sp>
@@ -5246,39 +5895,23 @@
       </p:grpSpPr>
       <p:sp>
         <p:nvSpPr>
-          <p:cNvPr id="2" name="Text 0"/>
-          <p:cNvSpPr/>
-          <p:nvPr/>
-        </p:nvSpPr>
-        <p:spPr>
-          <a:xfrm>
-            <a:off x="3657600" y="457200"/>
-            <a:ext cx="1828800" cy="731520"/>
-          </a:xfrm>
-          <a:prstGeom prst="rect">
-            <a:avLst/>
-          </a:prstGeom>
-          <a:noFill/>
-          <a:ln/>
-        </p:spPr>
-        <p:txBody>
-          <a:bodyPr wrap="square" lIns="0" tIns="0" rIns="0" bIns="0" rtlCol="0" anchor="ctr"/>
-          <a:lstStyle/>
-          <a:p>
-            <a:pPr algn="ctr" indent="0" marL="0">
-              <a:buNone/>
-            </a:pPr>
-            <a:r>
-              <a:rPr lang="en-US" sz="4400" dirty="0">
-                <a:solidFill>
-                  <a:srgbClr val="000000"/>
-                </a:solidFill>
-              </a:rPr>
-              <a:t>🗣️</a:t>
-            </a:r>
-            <a:endParaRPr lang="en-US" sz="4400" dirty="0"/>
-          </a:p>
-        </p:txBody>
+          <p:cNvPr id="2" name="Shape 0"/>
+          <p:cNvSpPr/>
+          <p:nvPr/>
+        </p:nvSpPr>
+        <p:spPr>
+          <a:xfrm>
+            <a:off x="0" y="0"/>
+            <a:ext cx="9144000" cy="566928"/>
+          </a:xfrm>
+          <a:prstGeom prst="rect">
+            <a:avLst/>
+          </a:prstGeom>
+          <a:solidFill>
+            <a:srgbClr val="55C8E8"/>
+          </a:solidFill>
+          <a:ln/>
+        </p:spPr>
       </p:sp>
       <p:sp>
         <p:nvSpPr>
@@ -5288,24 +5921,63 @@
         </p:nvSpPr>
         <p:spPr>
           <a:xfrm>
-            <a:off x="914400" y="1097280"/>
-            <a:ext cx="7315200" cy="640080"/>
-          </a:xfrm>
-          <a:prstGeom prst="rect">
-            <a:avLst/>
-          </a:prstGeom>
-          <a:noFill/>
-          <a:ln/>
-        </p:spPr>
-        <p:txBody>
-          <a:bodyPr wrap="square" lIns="0" tIns="0" rIns="0" bIns="0" rtlCol="0" anchor="ctr"/>
-          <a:lstStyle/>
-          <a:p>
-            <a:pPr algn="ctr" indent="0" marL="0">
-              <a:buNone/>
-            </a:pPr>
-            <a:r>
-              <a:rPr lang="en-US" sz="3400" b="1" dirty="0">
+            <a:off x="365760" y="54864"/>
+            <a:ext cx="8412480" cy="457200"/>
+          </a:xfrm>
+          <a:prstGeom prst="rect">
+            <a:avLst/>
+          </a:prstGeom>
+          <a:noFill/>
+          <a:ln/>
+        </p:spPr>
+        <p:txBody>
+          <a:bodyPr wrap="square" lIns="0" tIns="0" rIns="0" bIns="0" rtlCol="0" anchor="ctr"/>
+          <a:lstStyle/>
+          <a:p>
+            <a:pPr indent="0" marL="0">
+              <a:buNone/>
+            </a:pPr>
+            <a:r>
+              <a:rPr lang="en-US" sz="2200" b="1" dirty="0">
+                <a:solidFill>
+                  <a:srgbClr val="FFFFFF"/>
+                </a:solidFill>
+                <a:latin typeface="Calibri" pitchFamily="34" charset="0"/>
+                <a:ea typeface="Calibri" pitchFamily="34" charset="-122"/>
+                <a:cs typeface="Calibri" pitchFamily="34" charset="-120"/>
+              </a:rPr>
+              <a:t>🗣️  Share Time</a:t>
+            </a:r>
+            <a:endParaRPr lang="en-US" sz="2200" dirty="0"/>
+          </a:p>
+        </p:txBody>
+      </p:sp>
+      <p:sp>
+        <p:nvSpPr>
+          <p:cNvPr id="4" name="Text 2"/>
+          <p:cNvSpPr/>
+          <p:nvPr/>
+        </p:nvSpPr>
+        <p:spPr>
+          <a:xfrm>
+            <a:off x="365760" y="1005840"/>
+            <a:ext cx="8412480" cy="548640"/>
+          </a:xfrm>
+          <a:prstGeom prst="rect">
+            <a:avLst/>
+          </a:prstGeom>
+          <a:noFill/>
+          <a:ln/>
+        </p:spPr>
+        <p:txBody>
+          <a:bodyPr wrap="square" lIns="0" tIns="0" rIns="0" bIns="0" rtlCol="0" anchor="ctr"/>
+          <a:lstStyle/>
+          <a:p>
+            <a:pPr indent="0" marL="0">
+              <a:buNone/>
+            </a:pPr>
+            <a:r>
+              <a:rPr lang="en-US" sz="2600" b="1" dirty="0">
                 <a:solidFill>
                   <a:srgbClr val="0E1C42"/>
                 </a:solidFill>
@@ -5313,191 +5985,48 @@
                 <a:ea typeface="Calibri" pitchFamily="34" charset="-122"/>
                 <a:cs typeface="Calibri" pitchFamily="34" charset="-120"/>
               </a:rPr>
-              <a:t>Share Time</a:t>
-            </a:r>
-            <a:endParaRPr lang="en-US" sz="3400" dirty="0"/>
-          </a:p>
-        </p:txBody>
-      </p:sp>
-      <p:sp>
-        <p:nvSpPr>
-          <p:cNvPr id="4" name="Text 2"/>
-          <p:cNvSpPr/>
-          <p:nvPr/>
-        </p:nvSpPr>
-        <p:spPr>
-          <a:xfrm>
-            <a:off x="914400" y="1737360"/>
-            <a:ext cx="7315200" cy="457200"/>
-          </a:xfrm>
-          <a:prstGeom prst="rect">
-            <a:avLst/>
-          </a:prstGeom>
-          <a:noFill/>
-          <a:ln/>
-        </p:spPr>
-        <p:txBody>
-          <a:bodyPr wrap="square" lIns="0" tIns="0" rIns="0" bIns="0" rtlCol="0" anchor="ctr"/>
-          <a:lstStyle/>
-          <a:p>
-            <a:pPr algn="ctr" indent="0" marL="0">
+              <a:t>3 minutes — let's hear your writing!</a:t>
+            </a:r>
+            <a:endParaRPr lang="en-US" sz="2600" dirty="0"/>
+          </a:p>
+        </p:txBody>
+      </p:sp>
+      <p:sp>
+        <p:nvSpPr>
+          <p:cNvPr id="5" name="Text 3"/>
+          <p:cNvSpPr/>
+          <p:nvPr/>
+        </p:nvSpPr>
+        <p:spPr>
+          <a:xfrm>
+            <a:off x="365760" y="1691640"/>
+            <a:ext cx="8412480" cy="457200"/>
+          </a:xfrm>
+          <a:prstGeom prst="rect">
+            <a:avLst/>
+          </a:prstGeom>
+          <a:noFill/>
+          <a:ln/>
+        </p:spPr>
+        <p:txBody>
+          <a:bodyPr wrap="square" lIns="0" tIns="0" rIns="0" bIns="0" rtlCol="0" anchor="ctr"/>
+          <a:lstStyle/>
+          <a:p>
+            <a:pPr indent="0" marL="0">
               <a:buNone/>
             </a:pPr>
             <a:r>
               <a:rPr lang="en-US" sz="1700" dirty="0">
                 <a:solidFill>
-                  <a:srgbClr val="55C8E8"/>
-                </a:solidFill>
-                <a:latin typeface="Calibri" pitchFamily="34" charset="0"/>
-                <a:ea typeface="Calibri" pitchFamily="34" charset="-122"/>
-                <a:cs typeface="Calibri" pitchFamily="34" charset="-120"/>
-              </a:rPr>
-              <a:t>3 minutes — let's hear your writing!</a:t>
+                  <a:srgbClr val="1E293B"/>
+                </a:solidFill>
+                <a:latin typeface="Calibri" pitchFamily="34" charset="0"/>
+                <a:ea typeface="Calibri" pitchFamily="34" charset="-122"/>
+                <a:cs typeface="Calibri" pitchFamily="34" charset="-120"/>
+              </a:rPr>
+              <a:t>Raise your hand  ·  paste it in the chat  ·  or hold your paper up to the camera</a:t>
             </a:r>
             <a:endParaRPr lang="en-US" sz="1700" dirty="0"/>
-          </a:p>
-        </p:txBody>
-      </p:sp>
-      <p:sp>
-        <p:nvSpPr>
-          <p:cNvPr id="5" name="Shape 3"/>
-          <p:cNvSpPr/>
-          <p:nvPr/>
-        </p:nvSpPr>
-        <p:spPr>
-          <a:xfrm>
-            <a:off x="1828800" y="2468880"/>
-            <a:ext cx="5486400" cy="1645920"/>
-          </a:xfrm>
-          <a:prstGeom prst="roundRect">
-            <a:avLst>
-              <a:gd name="adj" fmla="val 6667"/>
-            </a:avLst>
-          </a:prstGeom>
-          <a:solidFill>
-            <a:srgbClr val="FFFFFF"/>
-          </a:solidFill>
-          <a:ln/>
-          <a:effectLst>
-            <a:outerShdw sx="100000" sy="100000" kx="0" ky="0" algn="bl" rotWithShape="0" blurRad="101600" dist="38100" dir="2700000">
-              <a:srgbClr val="000000">
-                <a:alpha val="12000"/>
-              </a:srgbClr>
-            </a:outerShdw>
-          </a:effectLst>
-        </p:spPr>
-      </p:sp>
-      <p:sp>
-        <p:nvSpPr>
-          <p:cNvPr id="6" name="Text 4"/>
-          <p:cNvSpPr/>
-          <p:nvPr/>
-        </p:nvSpPr>
-        <p:spPr>
-          <a:xfrm>
-            <a:off x="2103120" y="2560320"/>
-            <a:ext cx="4937760" cy="1463040"/>
-          </a:xfrm>
-          <a:prstGeom prst="rect">
-            <a:avLst/>
-          </a:prstGeom>
-          <a:noFill/>
-          <a:ln/>
-        </p:spPr>
-        <p:txBody>
-          <a:bodyPr wrap="square" lIns="0" tIns="0" rIns="0" bIns="0" rtlCol="0" anchor="t"/>
-          <a:lstStyle/>
-          <a:p>
-            <a:pPr indent="0" marL="0">
-              <a:spcAft>
-                <a:spcPts val="200"/>
-              </a:spcAft>
-              <a:buNone/>
-            </a:pPr>
-            <a:r>
-              <a:rPr lang="en-US" sz="1400" b="1" dirty="0">
-                <a:solidFill>
-                  <a:srgbClr val="0E1C42"/>
-                </a:solidFill>
-                <a:latin typeface="Calibri" pitchFamily="34" charset="0"/>
-                <a:ea typeface="Calibri" pitchFamily="34" charset="-122"/>
-                <a:cs typeface="Calibri" pitchFamily="34" charset="-120"/>
-              </a:rPr>
-              <a:t>How to share:
-</a:t>
-            </a:r>
-            <a:pPr indent="0" marL="0">
-              <a:spcAft>
-                <a:spcPts val="200"/>
-              </a:spcAft>
-              <a:buNone/>
-            </a:pPr>
-            <a:r>
-              <a:rPr lang="en-US" sz="1300" dirty="0">
-                <a:solidFill>
-                  <a:srgbClr val="1E293B"/>
-                </a:solidFill>
-                <a:latin typeface="Calibri" pitchFamily="34" charset="0"/>
-                <a:ea typeface="Calibri" pitchFamily="34" charset="-122"/>
-                <a:cs typeface="Calibri" pitchFamily="34" charset="-120"/>
-              </a:rPr>
-              <a:t>✋ Raise your hand if you want to read yours aloud
-</a:t>
-            </a:r>
-            <a:pPr indent="0" marL="0">
-              <a:spcAft>
-                <a:spcPts val="200"/>
-              </a:spcAft>
-              <a:buNone/>
-            </a:pPr>
-            <a:r>
-              <a:rPr lang="en-US" sz="1300" dirty="0">
-                <a:solidFill>
-                  <a:srgbClr val="1E293B"/>
-                </a:solidFill>
-                <a:latin typeface="Calibri" pitchFamily="34" charset="0"/>
-                <a:ea typeface="Calibri" pitchFamily="34" charset="-122"/>
-                <a:cs typeface="Calibri" pitchFamily="34" charset="-120"/>
-              </a:rPr>
-              <a:t>💬 Or paste your writing in the chat
-</a:t>
-            </a:r>
-            <a:pPr indent="0" marL="0">
-              <a:spcAft>
-                <a:spcPts val="200"/>
-              </a:spcAft>
-              <a:buNone/>
-            </a:pPr>
-            <a:r>
-              <a:rPr lang="en-US" sz="1300" dirty="0">
-                <a:solidFill>
-                  <a:srgbClr val="1E293B"/>
-                </a:solidFill>
-                <a:latin typeface="Calibri" pitchFamily="34" charset="0"/>
-                <a:ea typeface="Calibri" pitchFamily="34" charset="-122"/>
-                <a:cs typeface="Calibri" pitchFamily="34" charset="-120"/>
-              </a:rPr>
-              <a:t>👂 Listen respectfully when others share
-</a:t>
-            </a:r>
-            <a:pPr indent="0" marL="0">
-              <a:spcAft>
-                <a:spcPts val="200"/>
-              </a:spcAft>
-              <a:buNone/>
-            </a:pPr>
-            <a:r>
-              <a:rPr lang="en-US" sz="1200" i="1" dirty="0">
-                <a:solidFill>
-                  <a:srgbClr val="64748B"/>
-                </a:solidFill>
-                <a:latin typeface="Calibri" pitchFamily="34" charset="0"/>
-                <a:ea typeface="Calibri" pitchFamily="34" charset="-122"/>
-                <a:cs typeface="Calibri" pitchFamily="34" charset="-120"/>
-              </a:rPr>
-              <a:t>Every writer's ideas matter — there are no wrong answers.</a:t>
-            </a:r>
-            <a:endParaRPr lang="en-US" sz="1400" dirty="0"/>
           </a:p>
         </p:txBody>
       </p:sp>
@@ -5515,7 +6044,7 @@
     <p:bg>
       <p:bgPr>
         <a:solidFill>
-          <a:srgbClr val="E5F7FC"/>
+          <a:srgbClr val="F8FAFC"/>
         </a:solidFill>
       </p:bgPr>
     </p:bg>
@@ -5535,81 +6064,17 @@
       </p:grpSpPr>
       <p:sp>
         <p:nvSpPr>
-          <p:cNvPr id="2" name="Text 0"/>
-          <p:cNvSpPr/>
-          <p:nvPr/>
-        </p:nvSpPr>
-        <p:spPr>
-          <a:xfrm>
-            <a:off x="365760" y="164592"/>
-            <a:ext cx="5943600" cy="566928"/>
-          </a:xfrm>
-          <a:prstGeom prst="rect">
-            <a:avLst/>
-          </a:prstGeom>
-          <a:noFill/>
-          <a:ln/>
-        </p:spPr>
-        <p:txBody>
-          <a:bodyPr wrap="square" lIns="0" tIns="0" rIns="0" bIns="0" rtlCol="0" anchor="ctr"/>
-          <a:lstStyle/>
-          <a:p>
-            <a:pPr algn="l" indent="0" marL="0">
-              <a:buNone/>
-            </a:pPr>
-            <a:r>
-              <a:rPr lang="en-US" sz="2800" b="1" dirty="0">
-                <a:solidFill>
-                  <a:srgbClr val="0E1C42"/>
-                </a:solidFill>
-                <a:latin typeface="Calibri" pitchFamily="34" charset="0"/>
-                <a:ea typeface="Calibri" pitchFamily="34" charset="-122"/>
-                <a:cs typeface="Calibri" pitchFamily="34" charset="-120"/>
-              </a:rPr>
-              <a:t>💡 Today's Focus</a:t>
-            </a:r>
-            <a:endParaRPr lang="en-US" sz="2800" dirty="0"/>
-          </a:p>
-        </p:txBody>
-      </p:sp>
-      <p:sp>
-        <p:nvSpPr>
-          <p:cNvPr id="3" name="Shape 1"/>
-          <p:cNvSpPr/>
-          <p:nvPr/>
-        </p:nvSpPr>
-        <p:spPr>
-          <a:xfrm>
-            <a:off x="365760" y="749808"/>
-            <a:ext cx="8412480" cy="0"/>
-          </a:xfrm>
-          <a:prstGeom prst="line">
-            <a:avLst/>
-          </a:prstGeom>
-          <a:noFill/>
-          <a:ln w="19050">
-            <a:solidFill>
-              <a:srgbClr val="5CB85C"/>
-            </a:solidFill>
-            <a:prstDash val="solid"/>
-          </a:ln>
-        </p:spPr>
-      </p:sp>
-      <p:sp>
-        <p:nvSpPr>
-          <p:cNvPr id="4" name="Shape 2"/>
-          <p:cNvSpPr/>
-          <p:nvPr/>
-        </p:nvSpPr>
-        <p:spPr>
-          <a:xfrm>
-            <a:off x="6492240" y="173736"/>
-            <a:ext cx="2286000" cy="502920"/>
-          </a:xfrm>
-          <a:prstGeom prst="roundRect">
-            <a:avLst>
-              <a:gd name="adj" fmla="val 21818"/>
-            </a:avLst>
+          <p:cNvPr id="2" name="Shape 0"/>
+          <p:cNvSpPr/>
+          <p:nvPr/>
+        </p:nvSpPr>
+        <p:spPr>
+          <a:xfrm>
+            <a:off x="0" y="0"/>
+            <a:ext cx="9144000" cy="566928"/>
+          </a:xfrm>
+          <a:prstGeom prst="rect">
+            <a:avLst/>
           </a:prstGeom>
           <a:solidFill>
             <a:srgbClr val="5CB85C"/>
@@ -5619,30 +6084,108 @@
       </p:sp>
       <p:sp>
         <p:nvSpPr>
+          <p:cNvPr id="3" name="Text 1"/>
+          <p:cNvSpPr/>
+          <p:nvPr/>
+        </p:nvSpPr>
+        <p:spPr>
+          <a:xfrm>
+            <a:off x="365760" y="54864"/>
+            <a:ext cx="8412480" cy="457200"/>
+          </a:xfrm>
+          <a:prstGeom prst="rect">
+            <a:avLst/>
+          </a:prstGeom>
+          <a:noFill/>
+          <a:ln/>
+        </p:spPr>
+        <p:txBody>
+          <a:bodyPr wrap="square" lIns="0" tIns="0" rIns="0" bIns="0" rtlCol="0" anchor="ctr"/>
+          <a:lstStyle/>
+          <a:p>
+            <a:pPr indent="0" marL="0">
+              <a:buNone/>
+            </a:pPr>
+            <a:r>
+              <a:rPr lang="en-US" sz="2200" b="1" dirty="0">
+                <a:solidFill>
+                  <a:srgbClr val="FFFFFF"/>
+                </a:solidFill>
+                <a:latin typeface="Calibri" pitchFamily="34" charset="0"/>
+                <a:ea typeface="Calibri" pitchFamily="34" charset="-122"/>
+                <a:cs typeface="Calibri" pitchFamily="34" charset="-120"/>
+              </a:rPr>
+              <a:t>📖  Today</a:t>
+            </a:r>
+            <a:endParaRPr lang="en-US" sz="2200" dirty="0"/>
+          </a:p>
+        </p:txBody>
+      </p:sp>
+      <p:sp>
+        <p:nvSpPr>
+          <p:cNvPr id="4" name="Text 2"/>
+          <p:cNvSpPr/>
+          <p:nvPr/>
+        </p:nvSpPr>
+        <p:spPr>
+          <a:xfrm>
+            <a:off x="365760" y="777240"/>
+            <a:ext cx="8229600" cy="237744"/>
+          </a:xfrm>
+          <a:prstGeom prst="rect">
+            <a:avLst/>
+          </a:prstGeom>
+          <a:noFill/>
+          <a:ln/>
+        </p:spPr>
+        <p:txBody>
+          <a:bodyPr wrap="square" lIns="0" tIns="0" rIns="0" bIns="0" rtlCol="0" anchor="ctr"/>
+          <a:lstStyle/>
+          <a:p>
+            <a:pPr indent="0" marL="0">
+              <a:buNone/>
+            </a:pPr>
+            <a:r>
+              <a:rPr lang="en-US" sz="1100" b="1" spc="100" kern="0" dirty="0">
+                <a:solidFill>
+                  <a:srgbClr val="8B6FC0"/>
+                </a:solidFill>
+                <a:latin typeface="Calibri" pitchFamily="34" charset="0"/>
+                <a:ea typeface="Calibri" pitchFamily="34" charset="-122"/>
+                <a:cs typeface="Calibri" pitchFamily="34" charset="-120"/>
+              </a:rPr>
+              <a:t>READING</a:t>
+            </a:r>
+            <a:endParaRPr lang="en-US" sz="1100" dirty="0"/>
+          </a:p>
+        </p:txBody>
+      </p:sp>
+      <p:sp>
+        <p:nvSpPr>
           <p:cNvPr id="5" name="Text 3"/>
           <p:cNvSpPr/>
           <p:nvPr/>
         </p:nvSpPr>
         <p:spPr>
           <a:xfrm>
-            <a:off x="6492240" y="173736"/>
-            <a:ext cx="2286000" cy="502920"/>
-          </a:xfrm>
-          <a:prstGeom prst="rect">
-            <a:avLst/>
-          </a:prstGeom>
-          <a:noFill/>
-          <a:ln/>
-        </p:spPr>
-        <p:txBody>
-          <a:bodyPr wrap="square" lIns="0" tIns="0" rIns="0" bIns="0" rtlCol="0" anchor="ctr"/>
-          <a:lstStyle/>
-          <a:p>
-            <a:pPr algn="ctr" indent="0" marL="0">
-              <a:buNone/>
-            </a:pPr>
-            <a:r>
-              <a:rPr lang="en-US" sz="1100" b="1" dirty="0">
+            <a:off x="365760" y="1014984"/>
+            <a:ext cx="8412480" cy="365760"/>
+          </a:xfrm>
+          <a:prstGeom prst="rect">
+            <a:avLst/>
+          </a:prstGeom>
+          <a:noFill/>
+          <a:ln/>
+        </p:spPr>
+        <p:txBody>
+          <a:bodyPr wrap="square" lIns="0" tIns="0" rIns="0" bIns="0" rtlCol="0" anchor="ctr"/>
+          <a:lstStyle/>
+          <a:p>
+            <a:pPr indent="0" marL="0">
+              <a:buNone/>
+            </a:pPr>
+            <a:r>
+              <a:rPr lang="en-US" sz="2000" b="1" dirty="0">
                 <a:solidFill>
                   <a:srgbClr val="0E1C42"/>
                 </a:solidFill>
@@ -5650,7 +6193,46 @@
                 <a:ea typeface="Calibri" pitchFamily="34" charset="-122"/>
                 <a:cs typeface="Calibri" pitchFamily="34" charset="-120"/>
               </a:rPr>
-              <a:t>CHAT PROMPT</a:t>
+              <a:t>📰 Read: What Is a Travel Guide?</a:t>
+            </a:r>
+            <a:endParaRPr lang="en-US" sz="2000" dirty="0"/>
+          </a:p>
+        </p:txBody>
+      </p:sp>
+      <p:sp>
+        <p:nvSpPr>
+          <p:cNvPr id="6" name="Text 4"/>
+          <p:cNvSpPr/>
+          <p:nvPr/>
+        </p:nvSpPr>
+        <p:spPr>
+          <a:xfrm>
+            <a:off x="365760" y="1508760"/>
+            <a:ext cx="8229600" cy="237744"/>
+          </a:xfrm>
+          <a:prstGeom prst="rect">
+            <a:avLst/>
+          </a:prstGeom>
+          <a:noFill/>
+          <a:ln/>
+        </p:spPr>
+        <p:txBody>
+          <a:bodyPr wrap="square" lIns="0" tIns="0" rIns="0" bIns="0" rtlCol="0" anchor="ctr"/>
+          <a:lstStyle/>
+          <a:p>
+            <a:pPr indent="0" marL="0">
+              <a:buNone/>
+            </a:pPr>
+            <a:r>
+              <a:rPr lang="en-US" sz="1100" b="1" spc="100" kern="0" dirty="0">
+                <a:solidFill>
+                  <a:srgbClr val="C7922C"/>
+                </a:solidFill>
+                <a:latin typeface="Calibri" pitchFamily="34" charset="0"/>
+                <a:ea typeface="Calibri" pitchFamily="34" charset="-122"/>
+                <a:cs typeface="Calibri" pitchFamily="34" charset="-120"/>
+              </a:rPr>
+              <a:t>BIG QUESTION</a:t>
             </a:r>
             <a:endParaRPr lang="en-US" sz="1100" dirty="0"/>
           </a:p>
@@ -5658,63 +6240,24 @@
       </p:sp>
       <p:sp>
         <p:nvSpPr>
-          <p:cNvPr id="6" name="Text 4"/>
-          <p:cNvSpPr/>
-          <p:nvPr/>
-        </p:nvSpPr>
-        <p:spPr>
-          <a:xfrm>
-            <a:off x="457200" y="914400"/>
-            <a:ext cx="8046720" cy="292608"/>
-          </a:xfrm>
-          <a:prstGeom prst="rect">
-            <a:avLst/>
-          </a:prstGeom>
-          <a:noFill/>
-          <a:ln/>
-        </p:spPr>
-        <p:txBody>
-          <a:bodyPr wrap="square" lIns="0" tIns="0" rIns="0" bIns="0" rtlCol="0" anchor="ctr"/>
-          <a:lstStyle/>
-          <a:p>
-            <a:pPr indent="0" marL="0">
-              <a:buNone/>
-            </a:pPr>
-            <a:r>
-              <a:rPr lang="en-US" sz="1100" b="1" spc="200" kern="0" dirty="0">
-                <a:solidFill>
-                  <a:srgbClr val="C7922C"/>
-                </a:solidFill>
-                <a:latin typeface="Calibri" pitchFamily="34" charset="0"/>
-                <a:ea typeface="Calibri" pitchFamily="34" charset="-122"/>
-                <a:cs typeface="Calibri" pitchFamily="34" charset="-120"/>
-              </a:rPr>
-              <a:t>BIG QUESTION</a:t>
-            </a:r>
-            <a:endParaRPr lang="en-US" sz="1100" dirty="0"/>
-          </a:p>
-        </p:txBody>
-      </p:sp>
-      <p:sp>
-        <p:nvSpPr>
           <p:cNvPr id="7" name="Shape 5"/>
           <p:cNvSpPr/>
           <p:nvPr/>
         </p:nvSpPr>
         <p:spPr>
           <a:xfrm>
-            <a:off x="457200" y="1234440"/>
-            <a:ext cx="8229600" cy="640080"/>
+            <a:off x="365760" y="1746504"/>
+            <a:ext cx="8412480" cy="731520"/>
           </a:xfrm>
           <a:prstGeom prst="roundRect">
             <a:avLst>
-              <a:gd name="adj" fmla="val 14286"/>
+              <a:gd name="adj" fmla="val 12500"/>
             </a:avLst>
           </a:prstGeom>
           <a:solidFill>
             <a:srgbClr val="FEF6E8"/>
           </a:solidFill>
-          <a:ln w="12700">
+          <a:ln w="19050">
             <a:solidFill>
               <a:srgbClr val="C7922C"/>
             </a:solidFill>
@@ -5737,24 +6280,24 @@
         </p:nvSpPr>
         <p:spPr>
           <a:xfrm>
-            <a:off x="640080" y="1344168"/>
-            <a:ext cx="7863840" cy="411480"/>
-          </a:xfrm>
-          <a:prstGeom prst="rect">
-            <a:avLst/>
-          </a:prstGeom>
-          <a:noFill/>
-          <a:ln/>
-        </p:spPr>
-        <p:txBody>
-          <a:bodyPr wrap="square" lIns="0" tIns="0" rIns="0" bIns="0" rtlCol="0" anchor="ctr"/>
-          <a:lstStyle/>
-          <a:p>
-            <a:pPr indent="0" marL="0">
-              <a:buNone/>
-            </a:pPr>
-            <a:r>
-              <a:rPr lang="en-US" sz="1800" i="1" dirty="0">
+            <a:off x="594360" y="1874520"/>
+            <a:ext cx="7955280" cy="475488"/>
+          </a:xfrm>
+          <a:prstGeom prst="rect">
+            <a:avLst/>
+          </a:prstGeom>
+          <a:noFill/>
+          <a:ln/>
+        </p:spPr>
+        <p:txBody>
+          <a:bodyPr wrap="square" lIns="0" tIns="0" rIns="0" bIns="0" rtlCol="0" anchor="ctr"/>
+          <a:lstStyle/>
+          <a:p>
+            <a:pPr indent="0" marL="0">
+              <a:buNone/>
+            </a:pPr>
+            <a:r>
+              <a:rPr lang="en-US" sz="1700" dirty="0">
                 <a:solidFill>
                   <a:srgbClr val="1E293B"/>
                 </a:solidFill>
@@ -5764,7 +6307,85 @@
               </a:rPr>
               <a:t>The text says a well-written travel guide makes you feel like you’re already there. What kind of details create that feeling?</a:t>
             </a:r>
-            <a:endParaRPr lang="en-US" sz="1800" dirty="0"/>
+            <a:endParaRPr lang="en-US" sz="1700" dirty="0"/>
+          </a:p>
+        </p:txBody>
+      </p:sp>
+      <p:sp>
+        <p:nvSpPr>
+          <p:cNvPr id="9" name="Text 7"/>
+          <p:cNvSpPr/>
+          <p:nvPr/>
+        </p:nvSpPr>
+        <p:spPr>
+          <a:xfrm>
+            <a:off x="365760" y="2606040"/>
+            <a:ext cx="8229600" cy="237744"/>
+          </a:xfrm>
+          <a:prstGeom prst="rect">
+            <a:avLst/>
+          </a:prstGeom>
+          <a:noFill/>
+          <a:ln/>
+        </p:spPr>
+        <p:txBody>
+          <a:bodyPr wrap="square" lIns="0" tIns="0" rIns="0" bIns="0" rtlCol="0" anchor="ctr"/>
+          <a:lstStyle/>
+          <a:p>
+            <a:pPr indent="0" marL="0">
+              <a:buNone/>
+            </a:pPr>
+            <a:r>
+              <a:rPr lang="en-US" sz="1100" b="1" spc="100" kern="0" dirty="0">
+                <a:solidFill>
+                  <a:srgbClr val="55C8E8"/>
+                </a:solidFill>
+                <a:latin typeface="Calibri" pitchFamily="34" charset="0"/>
+                <a:ea typeface="Calibri" pitchFamily="34" charset="-122"/>
+                <a:cs typeface="Calibri" pitchFamily="34" charset="-120"/>
+              </a:rPr>
+              <a:t>READING LENS</a:t>
+            </a:r>
+            <a:endParaRPr lang="en-US" sz="1100" dirty="0"/>
+          </a:p>
+        </p:txBody>
+      </p:sp>
+      <p:sp>
+        <p:nvSpPr>
+          <p:cNvPr id="10" name="Text 8"/>
+          <p:cNvSpPr/>
+          <p:nvPr/>
+        </p:nvSpPr>
+        <p:spPr>
+          <a:xfrm>
+            <a:off x="365760" y="2843784"/>
+            <a:ext cx="8412480" cy="914400"/>
+          </a:xfrm>
+          <a:prstGeom prst="rect">
+            <a:avLst/>
+          </a:prstGeom>
+          <a:noFill/>
+          <a:ln/>
+        </p:spPr>
+        <p:txBody>
+          <a:bodyPr wrap="square" lIns="0" tIns="0" rIns="0" bIns="0" rtlCol="0" anchor="ctr"/>
+          <a:lstStyle/>
+          <a:p>
+            <a:pPr indent="0" marL="0">
+              <a:buNone/>
+            </a:pPr>
+            <a:r>
+              <a:rPr lang="en-US" sz="1500" dirty="0">
+                <a:solidFill>
+                  <a:srgbClr val="1E293B"/>
+                </a:solidFill>
+                <a:latin typeface="Calibri" pitchFamily="34" charset="0"/>
+                <a:ea typeface="Calibri" pitchFamily="34" charset="-122"/>
+                <a:cs typeface="Calibri" pitchFamily="34" charset="-120"/>
+              </a:rPr>
+              <a:t>Today, practice: Use text features to understand information.</a:t>
+            </a:r>
+            <a:endParaRPr lang="en-US" sz="1500" dirty="0"/>
           </a:p>
         </p:txBody>
       </p:sp>
@@ -5779,6 +6400,749 @@
 <file path=ppt/slides/slide7.xml><?xml version="1.0" encoding="utf-8"?>
 <p:sld xmlns:a="http://schemas.openxmlformats.org/drawingml/2006/main" xmlns:r="http://schemas.openxmlformats.org/officeDocument/2006/relationships" xmlns:p="http://schemas.openxmlformats.org/presentationml/2006/main">
   <p:cSld name="Slide 7">
+    <p:bg>
+      <p:bgPr>
+        <a:solidFill>
+          <a:srgbClr val="F8FAFC"/>
+        </a:solidFill>
+      </p:bgPr>
+    </p:bg>
+    <p:spTree>
+      <p:nvGrpSpPr>
+        <p:cNvPr id="1" name=""/>
+        <p:cNvGrpSpPr/>
+        <p:nvPr/>
+      </p:nvGrpSpPr>
+      <p:grpSpPr>
+        <a:xfrm>
+          <a:off x="0" y="0"/>
+          <a:ext cx="0" cy="0"/>
+          <a:chOff x="0" y="0"/>
+          <a:chExt cx="0" cy="0"/>
+        </a:xfrm>
+      </p:grpSpPr>
+      <p:sp>
+        <p:nvSpPr>
+          <p:cNvPr id="2" name="Shape 0"/>
+          <p:cNvSpPr/>
+          <p:nvPr/>
+        </p:nvSpPr>
+        <p:spPr>
+          <a:xfrm>
+            <a:off x="0" y="0"/>
+            <a:ext cx="9144000" cy="566928"/>
+          </a:xfrm>
+          <a:prstGeom prst="rect">
+            <a:avLst/>
+          </a:prstGeom>
+          <a:solidFill>
+            <a:srgbClr val="55C8E8"/>
+          </a:solidFill>
+          <a:ln/>
+        </p:spPr>
+      </p:sp>
+      <p:sp>
+        <p:nvSpPr>
+          <p:cNvPr id="3" name="Text 1"/>
+          <p:cNvSpPr/>
+          <p:nvPr/>
+        </p:nvSpPr>
+        <p:spPr>
+          <a:xfrm>
+            <a:off x="365760" y="54864"/>
+            <a:ext cx="8412480" cy="457200"/>
+          </a:xfrm>
+          <a:prstGeom prst="rect">
+            <a:avLst/>
+          </a:prstGeom>
+          <a:noFill/>
+          <a:ln/>
+        </p:spPr>
+        <p:txBody>
+          <a:bodyPr wrap="square" lIns="0" tIns="0" rIns="0" bIns="0" rtlCol="0" anchor="ctr"/>
+          <a:lstStyle/>
+          <a:p>
+            <a:pPr indent="0" marL="0">
+              <a:buNone/>
+            </a:pPr>
+            <a:r>
+              <a:rPr lang="en-US" sz="2200" b="1" dirty="0">
+                <a:solidFill>
+                  <a:srgbClr val="FFFFFF"/>
+                </a:solidFill>
+                <a:latin typeface="Calibri" pitchFamily="34" charset="0"/>
+                <a:ea typeface="Calibri" pitchFamily="34" charset="-122"/>
+                <a:cs typeface="Calibri" pitchFamily="34" charset="-120"/>
+              </a:rPr>
+              <a:t>✏️  Daily Oral Language</a:t>
+            </a:r>
+            <a:endParaRPr lang="en-US" sz="2200" dirty="0"/>
+          </a:p>
+        </p:txBody>
+      </p:sp>
+      <p:sp>
+        <p:nvSpPr>
+          <p:cNvPr id="4" name="Text 2"/>
+          <p:cNvSpPr/>
+          <p:nvPr/>
+        </p:nvSpPr>
+        <p:spPr>
+          <a:xfrm>
+            <a:off x="365760" y="749808"/>
+            <a:ext cx="8229600" cy="237744"/>
+          </a:xfrm>
+          <a:prstGeom prst="rect">
+            <a:avLst/>
+          </a:prstGeom>
+          <a:noFill/>
+          <a:ln/>
+        </p:spPr>
+        <p:txBody>
+          <a:bodyPr wrap="square" lIns="0" tIns="0" rIns="0" bIns="0" rtlCol="0" anchor="ctr"/>
+          <a:lstStyle/>
+          <a:p>
+            <a:pPr indent="0" marL="0">
+              <a:buNone/>
+            </a:pPr>
+            <a:r>
+              <a:rPr lang="en-US" sz="1100" b="1" spc="100" kern="0" dirty="0">
+                <a:solidFill>
+                  <a:srgbClr val="55C8E8"/>
+                </a:solidFill>
+                <a:latin typeface="Calibri" pitchFamily="34" charset="0"/>
+                <a:ea typeface="Calibri" pitchFamily="34" charset="-122"/>
+                <a:cs typeface="Calibri" pitchFamily="34" charset="-120"/>
+              </a:rPr>
+              <a:t>FIX THESE SENTENCES</a:t>
+            </a:r>
+            <a:endParaRPr lang="en-US" sz="1100" dirty="0"/>
+          </a:p>
+        </p:txBody>
+      </p:sp>
+      <p:sp>
+        <p:nvSpPr>
+          <p:cNvPr id="5" name="Shape 3"/>
+          <p:cNvSpPr/>
+          <p:nvPr/>
+        </p:nvSpPr>
+        <p:spPr>
+          <a:xfrm>
+            <a:off x="365760" y="1024128"/>
+            <a:ext cx="8412480" cy="777240"/>
+          </a:xfrm>
+          <a:prstGeom prst="roundRect">
+            <a:avLst>
+              <a:gd name="adj" fmla="val 11765"/>
+            </a:avLst>
+          </a:prstGeom>
+          <a:solidFill>
+            <a:srgbClr val="FFFFFF"/>
+          </a:solidFill>
+          <a:ln w="19050">
+            <a:solidFill>
+              <a:srgbClr val="55C8E8"/>
+            </a:solidFill>
+            <a:prstDash val="solid"/>
+          </a:ln>
+          <a:effectLst>
+            <a:outerShdw sx="100000" sy="100000" kx="0" ky="0" algn="bl" rotWithShape="0" blurRad="101600" dist="38100" dir="2700000">
+              <a:srgbClr val="000000">
+                <a:alpha val="12000"/>
+              </a:srgbClr>
+            </a:outerShdw>
+          </a:effectLst>
+        </p:spPr>
+      </p:sp>
+      <p:sp>
+        <p:nvSpPr>
+          <p:cNvPr id="6" name="Text 4"/>
+          <p:cNvSpPr/>
+          <p:nvPr/>
+        </p:nvSpPr>
+        <p:spPr>
+          <a:xfrm>
+            <a:off x="594360" y="1152144"/>
+            <a:ext cx="7955280" cy="521208"/>
+          </a:xfrm>
+          <a:prstGeom prst="rect">
+            <a:avLst/>
+          </a:prstGeom>
+          <a:noFill/>
+          <a:ln/>
+        </p:spPr>
+        <p:txBody>
+          <a:bodyPr wrap="square" lIns="0" tIns="0" rIns="0" bIns="0" rtlCol="0" anchor="ctr"/>
+          <a:lstStyle/>
+          <a:p>
+            <a:pPr indent="0" marL="0">
+              <a:buNone/>
+            </a:pPr>
+            <a:r>
+              <a:rPr lang="en-US" sz="1700" dirty="0">
+                <a:solidFill>
+                  <a:srgbClr val="1E293B"/>
+                </a:solidFill>
+                <a:latin typeface="Calibri" pitchFamily="34" charset="0"/>
+                <a:ea typeface="Calibri" pitchFamily="34" charset="-122"/>
+                <a:cs typeface="Calibri" pitchFamily="34" charset="-120"/>
+              </a:rPr>
+              <a:t>A travel guide uses vivid details to paint a picture of the place.</a:t>
+            </a:r>
+            <a:endParaRPr lang="en-US" sz="1700" dirty="0"/>
+          </a:p>
+        </p:txBody>
+      </p:sp>
+      <p:sp>
+        <p:nvSpPr>
+          <p:cNvPr id="7" name="Shape 5"/>
+          <p:cNvSpPr/>
+          <p:nvPr/>
+        </p:nvSpPr>
+        <p:spPr>
+          <a:xfrm>
+            <a:off x="365760" y="1874520"/>
+            <a:ext cx="8412480" cy="777240"/>
+          </a:xfrm>
+          <a:prstGeom prst="roundRect">
+            <a:avLst>
+              <a:gd name="adj" fmla="val 11765"/>
+            </a:avLst>
+          </a:prstGeom>
+          <a:solidFill>
+            <a:srgbClr val="FFFFFF"/>
+          </a:solidFill>
+          <a:ln w="19050">
+            <a:solidFill>
+              <a:srgbClr val="55C8E8"/>
+            </a:solidFill>
+            <a:prstDash val="solid"/>
+          </a:ln>
+          <a:effectLst>
+            <a:outerShdw sx="100000" sy="100000" kx="0" ky="0" algn="bl" rotWithShape="0" blurRad="101600" dist="38100" dir="2700000">
+              <a:srgbClr val="000000">
+                <a:alpha val="12000"/>
+              </a:srgbClr>
+            </a:outerShdw>
+          </a:effectLst>
+        </p:spPr>
+      </p:sp>
+      <p:sp>
+        <p:nvSpPr>
+          <p:cNvPr id="8" name="Text 6"/>
+          <p:cNvSpPr/>
+          <p:nvPr/>
+        </p:nvSpPr>
+        <p:spPr>
+          <a:xfrm>
+            <a:off x="594360" y="2002536"/>
+            <a:ext cx="7955280" cy="521208"/>
+          </a:xfrm>
+          <a:prstGeom prst="rect">
+            <a:avLst/>
+          </a:prstGeom>
+          <a:noFill/>
+          <a:ln/>
+        </p:spPr>
+        <p:txBody>
+          <a:bodyPr wrap="square" lIns="0" tIns="0" rIns="0" bIns="0" rtlCol="0" anchor="ctr"/>
+          <a:lstStyle/>
+          <a:p>
+            <a:pPr indent="0" marL="0">
+              <a:buNone/>
+            </a:pPr>
+            <a:r>
+              <a:rPr lang="en-US" sz="1700" dirty="0">
+                <a:solidFill>
+                  <a:srgbClr val="1E293B"/>
+                </a:solidFill>
+                <a:latin typeface="Calibri" pitchFamily="34" charset="0"/>
+                <a:ea typeface="Calibri" pitchFamily="34" charset="-122"/>
+                <a:cs typeface="Calibri" pitchFamily="34" charset="-120"/>
+              </a:rPr>
+              <a:t>when a travel guide is well written you can almost feel like you are already there in that place</a:t>
+            </a:r>
+            <a:endParaRPr lang="en-US" sz="1700" dirty="0"/>
+          </a:p>
+        </p:txBody>
+      </p:sp>
+      <p:sp>
+        <p:nvSpPr>
+          <p:cNvPr id="9" name="Text 7"/>
+          <p:cNvSpPr/>
+          <p:nvPr/>
+        </p:nvSpPr>
+        <p:spPr>
+          <a:xfrm>
+            <a:off x="365760" y="2788920"/>
+            <a:ext cx="8412480" cy="365760"/>
+          </a:xfrm>
+          <a:prstGeom prst="rect">
+            <a:avLst/>
+          </a:prstGeom>
+          <a:noFill/>
+          <a:ln/>
+        </p:spPr>
+        <p:txBody>
+          <a:bodyPr wrap="square" lIns="0" tIns="0" rIns="0" bIns="0" rtlCol="0" anchor="ctr"/>
+          <a:lstStyle/>
+          <a:p>
+            <a:pPr indent="0" marL="0">
+              <a:buNone/>
+            </a:pPr>
+            <a:r>
+              <a:rPr lang="en-US" sz="1600" b="1" dirty="0">
+                <a:solidFill>
+                  <a:srgbClr val="0E1C42"/>
+                </a:solidFill>
+                <a:latin typeface="Calibri" pitchFamily="34" charset="0"/>
+                <a:ea typeface="Calibri" pitchFamily="34" charset="-122"/>
+                <a:cs typeface="Calibri" pitchFamily="34" charset="-120"/>
+              </a:rPr>
+              <a:t>Rewrite both sentences correctly in your notebook.</a:t>
+            </a:r>
+            <a:endParaRPr lang="en-US" sz="1600" dirty="0"/>
+          </a:p>
+        </p:txBody>
+      </p:sp>
+    </p:spTree>
+  </p:cSld>
+  <p:clrMapOvr>
+    <a:masterClrMapping/>
+  </p:clrMapOvr>
+</p:sld>
+</file>
+
+<file path=ppt/slides/slide8.xml><?xml version="1.0" encoding="utf-8"?>
+<p:sld xmlns:a="http://schemas.openxmlformats.org/drawingml/2006/main" xmlns:r="http://schemas.openxmlformats.org/officeDocument/2006/relationships" xmlns:p="http://schemas.openxmlformats.org/presentationml/2006/main">
+  <p:cSld name="Slide 8">
+    <p:bg>
+      <p:bgPr>
+        <a:solidFill>
+          <a:srgbClr val="F8FAFC"/>
+        </a:solidFill>
+      </p:bgPr>
+    </p:bg>
+    <p:spTree>
+      <p:nvGrpSpPr>
+        <p:cNvPr id="1" name=""/>
+        <p:cNvGrpSpPr/>
+        <p:nvPr/>
+      </p:nvGrpSpPr>
+      <p:grpSpPr>
+        <a:xfrm>
+          <a:off x="0" y="0"/>
+          <a:ext cx="0" cy="0"/>
+          <a:chOff x="0" y="0"/>
+          <a:chExt cx="0" cy="0"/>
+        </a:xfrm>
+      </p:grpSpPr>
+      <p:sp>
+        <p:nvSpPr>
+          <p:cNvPr id="2" name="Shape 0"/>
+          <p:cNvSpPr/>
+          <p:nvPr/>
+        </p:nvSpPr>
+        <p:spPr>
+          <a:xfrm>
+            <a:off x="0" y="0"/>
+            <a:ext cx="9144000" cy="566928"/>
+          </a:xfrm>
+          <a:prstGeom prst="rect">
+            <a:avLst/>
+          </a:prstGeom>
+          <a:solidFill>
+            <a:srgbClr val="55C8E8"/>
+          </a:solidFill>
+          <a:ln/>
+        </p:spPr>
+      </p:sp>
+      <p:sp>
+        <p:nvSpPr>
+          <p:cNvPr id="3" name="Text 1"/>
+          <p:cNvSpPr/>
+          <p:nvPr/>
+        </p:nvSpPr>
+        <p:spPr>
+          <a:xfrm>
+            <a:off x="365760" y="54864"/>
+            <a:ext cx="8412480" cy="457200"/>
+          </a:xfrm>
+          <a:prstGeom prst="rect">
+            <a:avLst/>
+          </a:prstGeom>
+          <a:noFill/>
+          <a:ln/>
+        </p:spPr>
+        <p:txBody>
+          <a:bodyPr wrap="square" lIns="0" tIns="0" rIns="0" bIns="0" rtlCol="0" anchor="ctr"/>
+          <a:lstStyle/>
+          <a:p>
+            <a:pPr indent="0" marL="0">
+              <a:buNone/>
+            </a:pPr>
+            <a:r>
+              <a:rPr lang="en-US" sz="2200" b="1" dirty="0">
+                <a:solidFill>
+                  <a:srgbClr val="FFFFFF"/>
+                </a:solidFill>
+                <a:latin typeface="Calibri" pitchFamily="34" charset="0"/>
+                <a:ea typeface="Calibri" pitchFamily="34" charset="-122"/>
+                <a:cs typeface="Calibri" pitchFamily="34" charset="-120"/>
+              </a:rPr>
+              <a:t>✏️  Daily Oral Language</a:t>
+            </a:r>
+            <a:endParaRPr lang="en-US" sz="2200" dirty="0"/>
+          </a:p>
+        </p:txBody>
+      </p:sp>
+      <p:sp>
+        <p:nvSpPr>
+          <p:cNvPr id="4" name="Text 2"/>
+          <p:cNvSpPr/>
+          <p:nvPr/>
+        </p:nvSpPr>
+        <p:spPr>
+          <a:xfrm>
+            <a:off x="365760" y="749808"/>
+            <a:ext cx="8229600" cy="237744"/>
+          </a:xfrm>
+          <a:prstGeom prst="rect">
+            <a:avLst/>
+          </a:prstGeom>
+          <a:noFill/>
+          <a:ln/>
+        </p:spPr>
+        <p:txBody>
+          <a:bodyPr wrap="square" lIns="0" tIns="0" rIns="0" bIns="0" rtlCol="0" anchor="ctr"/>
+          <a:lstStyle/>
+          <a:p>
+            <a:pPr indent="0" marL="0">
+              <a:buNone/>
+            </a:pPr>
+            <a:r>
+              <a:rPr lang="en-US" sz="1100" b="1" spc="100" kern="0" dirty="0">
+                <a:solidFill>
+                  <a:srgbClr val="55C8E8"/>
+                </a:solidFill>
+                <a:latin typeface="Calibri" pitchFamily="34" charset="0"/>
+                <a:ea typeface="Calibri" pitchFamily="34" charset="-122"/>
+                <a:cs typeface="Calibri" pitchFamily="34" charset="-120"/>
+              </a:rPr>
+              <a:t>FIX THESE SENTENCES</a:t>
+            </a:r>
+            <a:endParaRPr lang="en-US" sz="1100" dirty="0"/>
+          </a:p>
+        </p:txBody>
+      </p:sp>
+      <p:sp>
+        <p:nvSpPr>
+          <p:cNvPr id="5" name="Shape 3"/>
+          <p:cNvSpPr/>
+          <p:nvPr/>
+        </p:nvSpPr>
+        <p:spPr>
+          <a:xfrm>
+            <a:off x="365760" y="1024128"/>
+            <a:ext cx="8412480" cy="777240"/>
+          </a:xfrm>
+          <a:prstGeom prst="roundRect">
+            <a:avLst>
+              <a:gd name="adj" fmla="val 11765"/>
+            </a:avLst>
+          </a:prstGeom>
+          <a:solidFill>
+            <a:srgbClr val="FFFFFF"/>
+          </a:solidFill>
+          <a:ln w="19050">
+            <a:solidFill>
+              <a:srgbClr val="55C8E8"/>
+            </a:solidFill>
+            <a:prstDash val="solid"/>
+          </a:ln>
+          <a:effectLst>
+            <a:outerShdw sx="100000" sy="100000" kx="0" ky="0" algn="bl" rotWithShape="0" blurRad="101600" dist="38100" dir="2700000">
+              <a:srgbClr val="000000">
+                <a:alpha val="12000"/>
+              </a:srgbClr>
+            </a:outerShdw>
+          </a:effectLst>
+        </p:spPr>
+      </p:sp>
+      <p:sp>
+        <p:nvSpPr>
+          <p:cNvPr id="6" name="Text 4"/>
+          <p:cNvSpPr/>
+          <p:nvPr/>
+        </p:nvSpPr>
+        <p:spPr>
+          <a:xfrm>
+            <a:off x="594360" y="1152144"/>
+            <a:ext cx="7955280" cy="521208"/>
+          </a:xfrm>
+          <a:prstGeom prst="rect">
+            <a:avLst/>
+          </a:prstGeom>
+          <a:noFill/>
+          <a:ln/>
+        </p:spPr>
+        <p:txBody>
+          <a:bodyPr wrap="square" lIns="0" tIns="0" rIns="0" bIns="0" rtlCol="0" anchor="ctr"/>
+          <a:lstStyle/>
+          <a:p>
+            <a:pPr indent="0" marL="0">
+              <a:buNone/>
+            </a:pPr>
+            <a:r>
+              <a:rPr lang="en-US" sz="1700" dirty="0">
+                <a:solidFill>
+                  <a:srgbClr val="1E293B"/>
+                </a:solidFill>
+                <a:latin typeface="Calibri" pitchFamily="34" charset="0"/>
+                <a:ea typeface="Calibri" pitchFamily="34" charset="-122"/>
+                <a:cs typeface="Calibri" pitchFamily="34" charset="-120"/>
+              </a:rPr>
+              <a:t>A travel guide uses vivid details to paint a picture of the place.</a:t>
+            </a:r>
+            <a:endParaRPr lang="en-US" sz="1700" dirty="0"/>
+          </a:p>
+        </p:txBody>
+      </p:sp>
+      <p:sp>
+        <p:nvSpPr>
+          <p:cNvPr id="7" name="Shape 5"/>
+          <p:cNvSpPr/>
+          <p:nvPr/>
+        </p:nvSpPr>
+        <p:spPr>
+          <a:xfrm>
+            <a:off x="365760" y="1874520"/>
+            <a:ext cx="8412480" cy="777240"/>
+          </a:xfrm>
+          <a:prstGeom prst="roundRect">
+            <a:avLst>
+              <a:gd name="adj" fmla="val 11765"/>
+            </a:avLst>
+          </a:prstGeom>
+          <a:solidFill>
+            <a:srgbClr val="FFFFFF"/>
+          </a:solidFill>
+          <a:ln w="19050">
+            <a:solidFill>
+              <a:srgbClr val="55C8E8"/>
+            </a:solidFill>
+            <a:prstDash val="solid"/>
+          </a:ln>
+          <a:effectLst>
+            <a:outerShdw sx="100000" sy="100000" kx="0" ky="0" algn="bl" rotWithShape="0" blurRad="101600" dist="38100" dir="2700000">
+              <a:srgbClr val="000000">
+                <a:alpha val="12000"/>
+              </a:srgbClr>
+            </a:outerShdw>
+          </a:effectLst>
+        </p:spPr>
+      </p:sp>
+      <p:sp>
+        <p:nvSpPr>
+          <p:cNvPr id="8" name="Text 6"/>
+          <p:cNvSpPr/>
+          <p:nvPr/>
+        </p:nvSpPr>
+        <p:spPr>
+          <a:xfrm>
+            <a:off x="594360" y="2002536"/>
+            <a:ext cx="7955280" cy="521208"/>
+          </a:xfrm>
+          <a:prstGeom prst="rect">
+            <a:avLst/>
+          </a:prstGeom>
+          <a:noFill/>
+          <a:ln/>
+        </p:spPr>
+        <p:txBody>
+          <a:bodyPr wrap="square" lIns="0" tIns="0" rIns="0" bIns="0" rtlCol="0" anchor="ctr"/>
+          <a:lstStyle/>
+          <a:p>
+            <a:pPr indent="0" marL="0">
+              <a:buNone/>
+            </a:pPr>
+            <a:r>
+              <a:rPr lang="en-US" sz="1700" dirty="0">
+                <a:solidFill>
+                  <a:srgbClr val="1E293B"/>
+                </a:solidFill>
+                <a:latin typeface="Calibri" pitchFamily="34" charset="0"/>
+                <a:ea typeface="Calibri" pitchFamily="34" charset="-122"/>
+                <a:cs typeface="Calibri" pitchFamily="34" charset="-120"/>
+              </a:rPr>
+              <a:t>when a travel guide is well written you can almost feel like you are already there in that place</a:t>
+            </a:r>
+            <a:endParaRPr lang="en-US" sz="1700" dirty="0"/>
+          </a:p>
+        </p:txBody>
+      </p:sp>
+      <p:sp>
+        <p:nvSpPr>
+          <p:cNvPr id="9" name="Shape 7"/>
+          <p:cNvSpPr/>
+          <p:nvPr/>
+        </p:nvSpPr>
+        <p:spPr>
+          <a:xfrm>
+            <a:off x="365760" y="2743200"/>
+            <a:ext cx="8412480" cy="1417320"/>
+          </a:xfrm>
+          <a:prstGeom prst="roundRect">
+            <a:avLst>
+              <a:gd name="adj" fmla="val 6452"/>
+            </a:avLst>
+          </a:prstGeom>
+          <a:solidFill>
+            <a:srgbClr val="E8F8EF"/>
+          </a:solidFill>
+          <a:ln/>
+          <a:effectLst>
+            <a:outerShdw sx="100000" sy="100000" kx="0" ky="0" algn="bl" rotWithShape="0" blurRad="101600" dist="38100" dir="2700000">
+              <a:srgbClr val="000000">
+                <a:alpha val="12000"/>
+              </a:srgbClr>
+            </a:outerShdw>
+          </a:effectLst>
+        </p:spPr>
+      </p:sp>
+      <p:sp>
+        <p:nvSpPr>
+          <p:cNvPr id="10" name="Text 8"/>
+          <p:cNvSpPr/>
+          <p:nvPr/>
+        </p:nvSpPr>
+        <p:spPr>
+          <a:xfrm>
+            <a:off x="566928" y="2816352"/>
+            <a:ext cx="8229600" cy="237744"/>
+          </a:xfrm>
+          <a:prstGeom prst="rect">
+            <a:avLst/>
+          </a:prstGeom>
+          <a:noFill/>
+          <a:ln/>
+        </p:spPr>
+        <p:txBody>
+          <a:bodyPr wrap="square" lIns="0" tIns="0" rIns="0" bIns="0" rtlCol="0" anchor="ctr"/>
+          <a:lstStyle/>
+          <a:p>
+            <a:pPr indent="0" marL="0">
+              <a:buNone/>
+            </a:pPr>
+            <a:r>
+              <a:rPr lang="en-US" sz="1100" b="1" spc="100" kern="0" dirty="0">
+                <a:solidFill>
+                  <a:srgbClr val="34B76F"/>
+                </a:solidFill>
+                <a:latin typeface="Calibri" pitchFamily="34" charset="0"/>
+                <a:ea typeface="Calibri" pitchFamily="34" charset="-122"/>
+                <a:cs typeface="Calibri" pitchFamily="34" charset="-120"/>
+              </a:rPr>
+              <a:t>✅  CORRECTED</a:t>
+            </a:r>
+            <a:endParaRPr lang="en-US" sz="1100" dirty="0"/>
+          </a:p>
+        </p:txBody>
+      </p:sp>
+      <p:sp>
+        <p:nvSpPr>
+          <p:cNvPr id="11" name="Text 9"/>
+          <p:cNvSpPr/>
+          <p:nvPr/>
+        </p:nvSpPr>
+        <p:spPr>
+          <a:xfrm>
+            <a:off x="566928" y="3072384"/>
+            <a:ext cx="8010144" cy="685800"/>
+          </a:xfrm>
+          <a:prstGeom prst="rect">
+            <a:avLst/>
+          </a:prstGeom>
+          <a:noFill/>
+          <a:ln/>
+        </p:spPr>
+        <p:txBody>
+          <a:bodyPr wrap="square" lIns="0" tIns="0" rIns="0" bIns="0" rtlCol="0" anchor="ctr"/>
+          <a:lstStyle/>
+          <a:p>
+            <a:pPr indent="0" marL="0">
+              <a:buNone/>
+            </a:pPr>
+            <a:r>
+              <a:rPr lang="en-US" sz="1400" i="1" dirty="0">
+                <a:solidFill>
+                  <a:srgbClr val="1E293B"/>
+                </a:solidFill>
+                <a:latin typeface="Calibri" pitchFamily="34" charset="0"/>
+                <a:ea typeface="Calibri" pitchFamily="34" charset="-122"/>
+                <a:cs typeface="Calibri" pitchFamily="34" charset="-120"/>
+              </a:rPr>
+              <a:t>Corrected:</a:t>
+            </a:r>
+            <a:endParaRPr lang="en-US" sz="1400" dirty="0"/>
+          </a:p>
+          <a:p>
+            <a:pPr indent="0" marL="0">
+              <a:buNone/>
+            </a:pPr>
+            <a:endParaRPr lang="en-US" sz="1400" dirty="0"/>
+          </a:p>
+        </p:txBody>
+      </p:sp>
+      <p:sp>
+        <p:nvSpPr>
+          <p:cNvPr id="12" name="Text 10"/>
+          <p:cNvSpPr/>
+          <p:nvPr/>
+        </p:nvSpPr>
+        <p:spPr>
+          <a:xfrm>
+            <a:off x="566928" y="3767328"/>
+            <a:ext cx="8010144" cy="320040"/>
+          </a:xfrm>
+          <a:prstGeom prst="rect">
+            <a:avLst/>
+          </a:prstGeom>
+          <a:noFill/>
+          <a:ln/>
+        </p:spPr>
+        <p:txBody>
+          <a:bodyPr wrap="square" lIns="0" tIns="0" rIns="0" bIns="0" rtlCol="0" anchor="ctr"/>
+          <a:lstStyle/>
+          <a:p>
+            <a:pPr indent="0" marL="0">
+              <a:buNone/>
+            </a:pPr>
+            <a:r>
+              <a:rPr lang="en-US" sz="1200" dirty="0">
+                <a:solidFill>
+                  <a:srgbClr val="64748B"/>
+                </a:solidFill>
+                <a:latin typeface="Calibri" pitchFamily="34" charset="0"/>
+                <a:ea typeface="Calibri" pitchFamily="34" charset="-122"/>
+                <a:cs typeface="Calibri" pitchFamily="34" charset="-120"/>
+              </a:rPr>
+              <a:t>When a travel guide is well written , you can almost feel like you are already there in that place .</a:t>
+            </a:r>
+            <a:endParaRPr lang="en-US" sz="1200" dirty="0"/>
+          </a:p>
+        </p:txBody>
+      </p:sp>
+    </p:spTree>
+  </p:cSld>
+  <p:clrMapOvr>
+    <a:masterClrMapping/>
+  </p:clrMapOvr>
+</p:sld>
+</file>
+
+<file path=ppt/slides/slide9.xml><?xml version="1.0" encoding="utf-8"?>
+<p:sld xmlns:a="http://schemas.openxmlformats.org/drawingml/2006/main" xmlns:r="http://schemas.openxmlformats.org/officeDocument/2006/relationships" xmlns:p="http://schemas.openxmlformats.org/presentationml/2006/main">
+  <p:cSld name="Slide 9">
     <p:bg>
       <p:bgPr>
         <a:solidFill>
@@ -5802,91 +7166,122 @@
       </p:grpSpPr>
       <p:sp>
         <p:nvSpPr>
-          <p:cNvPr id="2" name="Text 0"/>
-          <p:cNvSpPr/>
-          <p:nvPr/>
-        </p:nvSpPr>
-        <p:spPr>
-          <a:xfrm>
-            <a:off x="365760" y="164592"/>
-            <a:ext cx="8412480" cy="566928"/>
-          </a:xfrm>
-          <a:prstGeom prst="rect">
-            <a:avLst/>
-          </a:prstGeom>
-          <a:noFill/>
-          <a:ln/>
-        </p:spPr>
-        <p:txBody>
-          <a:bodyPr wrap="square" lIns="0" tIns="0" rIns="0" bIns="0" rtlCol="0" anchor="ctr"/>
-          <a:lstStyle/>
-          <a:p>
-            <a:pPr algn="l" indent="0" marL="0">
-              <a:buNone/>
-            </a:pPr>
-            <a:r>
-              <a:rPr lang="en-US" sz="2800" b="1" dirty="0">
-                <a:solidFill>
-                  <a:srgbClr val="0E1C42"/>
-                </a:solidFill>
-                <a:latin typeface="Calibri" pitchFamily="34" charset="0"/>
-                <a:ea typeface="Calibri" pitchFamily="34" charset="-122"/>
-                <a:cs typeface="Calibri" pitchFamily="34" charset="-120"/>
-              </a:rPr>
-              <a:t>✅ Model Sentence — Study What's Right</a:t>
-            </a:r>
-            <a:endParaRPr lang="en-US" sz="2800" dirty="0"/>
-          </a:p>
-        </p:txBody>
-      </p:sp>
-      <p:sp>
-        <p:nvSpPr>
-          <p:cNvPr id="3" name="Shape 1"/>
-          <p:cNvSpPr/>
-          <p:nvPr/>
-        </p:nvSpPr>
-        <p:spPr>
-          <a:xfrm>
-            <a:off x="365760" y="749808"/>
-            <a:ext cx="8412480" cy="0"/>
-          </a:xfrm>
-          <a:prstGeom prst="line">
-            <a:avLst/>
-          </a:prstGeom>
-          <a:noFill/>
-          <a:ln w="19050">
-            <a:solidFill>
-              <a:srgbClr val="34B76F"/>
-            </a:solidFill>
-            <a:prstDash val="solid"/>
-          </a:ln>
-        </p:spPr>
-      </p:sp>
-      <p:sp>
-        <p:nvSpPr>
-          <p:cNvPr id="4" name="Shape 2"/>
-          <p:cNvSpPr/>
-          <p:nvPr/>
-        </p:nvSpPr>
-        <p:spPr>
-          <a:xfrm>
-            <a:off x="457200" y="1097280"/>
-            <a:ext cx="8229600" cy="914400"/>
+          <p:cNvPr id="2" name="Shape 0"/>
+          <p:cNvSpPr/>
+          <p:nvPr/>
+        </p:nvSpPr>
+        <p:spPr>
+          <a:xfrm>
+            <a:off x="0" y="0"/>
+            <a:ext cx="9144000" cy="566928"/>
+          </a:xfrm>
+          <a:prstGeom prst="rect">
+            <a:avLst/>
+          </a:prstGeom>
+          <a:solidFill>
+            <a:srgbClr val="5CB85C"/>
+          </a:solidFill>
+          <a:ln/>
+        </p:spPr>
+      </p:sp>
+      <p:sp>
+        <p:nvSpPr>
+          <p:cNvPr id="3" name="Text 1"/>
+          <p:cNvSpPr/>
+          <p:nvPr/>
+        </p:nvSpPr>
+        <p:spPr>
+          <a:xfrm>
+            <a:off x="365760" y="54864"/>
+            <a:ext cx="8412480" cy="457200"/>
+          </a:xfrm>
+          <a:prstGeom prst="rect">
+            <a:avLst/>
+          </a:prstGeom>
+          <a:noFill/>
+          <a:ln/>
+        </p:spPr>
+        <p:txBody>
+          <a:bodyPr wrap="square" lIns="0" tIns="0" rIns="0" bIns="0" rtlCol="0" anchor="ctr"/>
+          <a:lstStyle/>
+          <a:p>
+            <a:pPr indent="0" marL="0">
+              <a:buNone/>
+            </a:pPr>
+            <a:r>
+              <a:rPr lang="en-US" sz="2200" b="1" dirty="0">
+                <a:solidFill>
+                  <a:srgbClr val="FFFFFF"/>
+                </a:solidFill>
+                <a:latin typeface="Calibri" pitchFamily="34" charset="0"/>
+                <a:ea typeface="Calibri" pitchFamily="34" charset="-122"/>
+                <a:cs typeface="Calibri" pitchFamily="34" charset="-120"/>
+              </a:rPr>
+              <a:t>🌱  Morphology</a:t>
+            </a:r>
+            <a:endParaRPr lang="en-US" sz="2200" dirty="0"/>
+          </a:p>
+        </p:txBody>
+      </p:sp>
+      <p:sp>
+        <p:nvSpPr>
+          <p:cNvPr id="4" name="Text 2"/>
+          <p:cNvSpPr/>
+          <p:nvPr/>
+        </p:nvSpPr>
+        <p:spPr>
+          <a:xfrm>
+            <a:off x="365760" y="804672"/>
+            <a:ext cx="8229600" cy="237744"/>
+          </a:xfrm>
+          <a:prstGeom prst="rect">
+            <a:avLst/>
+          </a:prstGeom>
+          <a:noFill/>
+          <a:ln/>
+        </p:spPr>
+        <p:txBody>
+          <a:bodyPr wrap="square" lIns="0" tIns="0" rIns="0" bIns="0" rtlCol="0" anchor="ctr"/>
+          <a:lstStyle/>
+          <a:p>
+            <a:pPr indent="0" marL="0">
+              <a:buNone/>
+            </a:pPr>
+            <a:r>
+              <a:rPr lang="en-US" sz="1100" b="1" spc="100" kern="0" dirty="0">
+                <a:solidFill>
+                  <a:srgbClr val="8B6FC0"/>
+                </a:solidFill>
+                <a:latin typeface="Calibri" pitchFamily="34" charset="0"/>
+                <a:ea typeface="Calibri" pitchFamily="34" charset="-122"/>
+                <a:cs typeface="Calibri" pitchFamily="34" charset="-120"/>
+              </a:rPr>
+              <a:t>SUFFIX -ING SHOWS ACTION HAPPENING</a:t>
+            </a:r>
+            <a:endParaRPr lang="en-US" sz="1100" dirty="0"/>
+          </a:p>
+        </p:txBody>
+      </p:sp>
+      <p:sp>
+        <p:nvSpPr>
+          <p:cNvPr id="5" name="Shape 3"/>
+          <p:cNvSpPr/>
+          <p:nvPr/>
+        </p:nvSpPr>
+        <p:spPr>
+          <a:xfrm>
+            <a:off x="365760" y="1097280"/>
+            <a:ext cx="8412480" cy="621792"/>
           </a:xfrm>
           <a:prstGeom prst="roundRect">
             <a:avLst>
-              <a:gd name="adj" fmla="val 10000"/>
+              <a:gd name="adj" fmla="val 14706"/>
             </a:avLst>
           </a:prstGeom>
           <a:solidFill>
-            <a:srgbClr val="E8F8EF"/>
+            <a:srgbClr val="F0E8FF"/>
           </a:solidFill>
-          <a:ln w="12700">
-            <a:solidFill>
-              <a:srgbClr val="34B76F"/>
-            </a:solidFill>
-            <a:prstDash val="solid"/>
-          </a:ln>
+          <a:ln/>
           <a:effectLst>
             <a:outerShdw sx="100000" sy="100000" kx="0" ky="0" algn="bl" rotWithShape="0" blurRad="101600" dist="38100" dir="2700000">
               <a:srgbClr val="000000">
@@ -5898,30 +7293,30 @@
       </p:sp>
       <p:sp>
         <p:nvSpPr>
-          <p:cNvPr id="5" name="Text 3"/>
-          <p:cNvSpPr/>
-          <p:nvPr/>
-        </p:nvSpPr>
-        <p:spPr>
-          <a:xfrm>
-            <a:off x="640080" y="1207008"/>
-            <a:ext cx="7863840" cy="685800"/>
-          </a:xfrm>
-          <a:prstGeom prst="rect">
-            <a:avLst/>
-          </a:prstGeom>
-          <a:noFill/>
-          <a:ln/>
-        </p:spPr>
-        <p:txBody>
-          <a:bodyPr wrap="square" lIns="0" tIns="0" rIns="0" bIns="0" rtlCol="0" anchor="ctr"/>
-          <a:lstStyle/>
-          <a:p>
-            <a:pPr indent="0" marL="0">
-              <a:buNone/>
-            </a:pPr>
-            <a:r>
-              <a:rPr lang="en-US" sz="1800" i="1" dirty="0">
+          <p:cNvPr id="6" name="Text 4"/>
+          <p:cNvSpPr/>
+          <p:nvPr/>
+        </p:nvSpPr>
+        <p:spPr>
+          <a:xfrm>
+            <a:off x="594360" y="1216152"/>
+            <a:ext cx="7863840" cy="384048"/>
+          </a:xfrm>
+          <a:prstGeom prst="rect">
+            <a:avLst/>
+          </a:prstGeom>
+          <a:noFill/>
+          <a:ln/>
+        </p:spPr>
+        <p:txBody>
+          <a:bodyPr wrap="square" lIns="0" tIns="0" rIns="0" bIns="0" rtlCol="0" anchor="ctr"/>
+          <a:lstStyle/>
+          <a:p>
+            <a:pPr indent="0" marL="0">
+              <a:buNone/>
+            </a:pPr>
+            <a:r>
+              <a:rPr lang="en-US" sz="1500" dirty="0">
                 <a:solidFill>
                   <a:srgbClr val="1E293B"/>
                 </a:solidFill>
@@ -5929,192 +7324,32 @@
                 <a:ea typeface="Calibri" pitchFamily="34" charset="-122"/>
                 <a:cs typeface="Calibri" pitchFamily="34" charset="-120"/>
               </a:rPr>
-              <a:t>A travel guide uses vivid details to paint a picture of the place.</a:t>
-            </a:r>
-            <a:endParaRPr lang="en-US" sz="1800" dirty="0"/>
-          </a:p>
-        </p:txBody>
-      </p:sp>
-    </p:spTree>
-  </p:cSld>
-  <p:clrMapOvr>
-    <a:masterClrMapping/>
-  </p:clrMapOvr>
-</p:sld>
-</file>
-
-<file path=ppt/slides/slide8.xml><?xml version="1.0" encoding="utf-8"?>
-<p:sld xmlns:a="http://schemas.openxmlformats.org/drawingml/2006/main" xmlns:r="http://schemas.openxmlformats.org/officeDocument/2006/relationships" xmlns:p="http://schemas.openxmlformats.org/presentationml/2006/main">
-  <p:cSld name="Slide 8">
-    <p:bg>
-      <p:bgPr>
-        <a:solidFill>
-          <a:srgbClr val="E5F7FC"/>
-        </a:solidFill>
-      </p:bgPr>
-    </p:bg>
-    <p:spTree>
-      <p:nvGrpSpPr>
-        <p:cNvPr id="1" name=""/>
-        <p:cNvGrpSpPr/>
-        <p:nvPr/>
-      </p:nvGrpSpPr>
-      <p:grpSpPr>
-        <a:xfrm>
-          <a:off x="0" y="0"/>
-          <a:ext cx="0" cy="0"/>
-          <a:chOff x="0" y="0"/>
-          <a:chExt cx="0" cy="0"/>
-        </a:xfrm>
-      </p:grpSpPr>
-      <p:sp>
-        <p:nvSpPr>
-          <p:cNvPr id="2" name="Text 0"/>
-          <p:cNvSpPr/>
-          <p:nvPr/>
-        </p:nvSpPr>
-        <p:spPr>
-          <a:xfrm>
-            <a:off x="365760" y="164592"/>
-            <a:ext cx="5943600" cy="566928"/>
-          </a:xfrm>
-          <a:prstGeom prst="rect">
-            <a:avLst/>
-          </a:prstGeom>
-          <a:noFill/>
-          <a:ln/>
-        </p:spPr>
-        <p:txBody>
-          <a:bodyPr wrap="square" lIns="0" tIns="0" rIns="0" bIns="0" rtlCol="0" anchor="ctr"/>
-          <a:lstStyle/>
-          <a:p>
-            <a:pPr algn="l" indent="0" marL="0">
-              <a:buNone/>
-            </a:pPr>
-            <a:r>
-              <a:rPr lang="en-US" sz="2800" b="1" dirty="0">
-                <a:solidFill>
-                  <a:srgbClr val="0E1C42"/>
-                </a:solidFill>
-                <a:latin typeface="Calibri" pitchFamily="34" charset="0"/>
-                <a:ea typeface="Calibri" pitchFamily="34" charset="-122"/>
-                <a:cs typeface="Calibri" pitchFamily="34" charset="-120"/>
-              </a:rPr>
-              <a:t>🔧 Fix-It Sentence — Now You Try</a:t>
-            </a:r>
-            <a:endParaRPr lang="en-US" sz="2800" dirty="0"/>
-          </a:p>
-        </p:txBody>
-      </p:sp>
-      <p:sp>
-        <p:nvSpPr>
-          <p:cNvPr id="3" name="Shape 1"/>
-          <p:cNvSpPr/>
-          <p:nvPr/>
-        </p:nvSpPr>
-        <p:spPr>
-          <a:xfrm>
-            <a:off x="365760" y="749808"/>
-            <a:ext cx="8412480" cy="0"/>
-          </a:xfrm>
-          <a:prstGeom prst="line">
-            <a:avLst/>
-          </a:prstGeom>
-          <a:noFill/>
-          <a:ln w="19050">
-            <a:solidFill>
-              <a:srgbClr val="5CB85C"/>
-            </a:solidFill>
-            <a:prstDash val="solid"/>
-          </a:ln>
-        </p:spPr>
-      </p:sp>
-      <p:sp>
-        <p:nvSpPr>
-          <p:cNvPr id="4" name="Shape 2"/>
-          <p:cNvSpPr/>
-          <p:nvPr/>
-        </p:nvSpPr>
-        <p:spPr>
-          <a:xfrm>
-            <a:off x="6492240" y="173736"/>
-            <a:ext cx="2286000" cy="502920"/>
+              <a:t>🌱  -ing review — add -ing: mailing, reading, sending</a:t>
+            </a:r>
+            <a:endParaRPr lang="en-US" sz="1500" dirty="0"/>
+          </a:p>
+        </p:txBody>
+      </p:sp>
+      <p:sp>
+        <p:nvSpPr>
+          <p:cNvPr id="7" name="Shape 5"/>
+          <p:cNvSpPr/>
+          <p:nvPr/>
+        </p:nvSpPr>
+        <p:spPr>
+          <a:xfrm>
+            <a:off x="365760" y="1792224"/>
+            <a:ext cx="8412480" cy="621792"/>
           </a:xfrm>
           <a:prstGeom prst="roundRect">
             <a:avLst>
-              <a:gd name="adj" fmla="val 21818"/>
+              <a:gd name="adj" fmla="val 14706"/>
             </a:avLst>
           </a:prstGeom>
           <a:solidFill>
-            <a:srgbClr val="5CB85C"/>
+            <a:srgbClr val="F8F4FF"/>
           </a:solidFill>
           <a:ln/>
-        </p:spPr>
-      </p:sp>
-      <p:sp>
-        <p:nvSpPr>
-          <p:cNvPr id="5" name="Text 3"/>
-          <p:cNvSpPr/>
-          <p:nvPr/>
-        </p:nvSpPr>
-        <p:spPr>
-          <a:xfrm>
-            <a:off x="6492240" y="173736"/>
-            <a:ext cx="2286000" cy="502920"/>
-          </a:xfrm>
-          <a:prstGeom prst="rect">
-            <a:avLst/>
-          </a:prstGeom>
-          <a:noFill/>
-          <a:ln/>
-        </p:spPr>
-        <p:txBody>
-          <a:bodyPr wrap="square" lIns="0" tIns="0" rIns="0" bIns="0" rtlCol="0" anchor="ctr"/>
-          <a:lstStyle/>
-          <a:p>
-            <a:pPr algn="ctr" indent="0" marL="0">
-              <a:buNone/>
-            </a:pPr>
-            <a:r>
-              <a:rPr lang="en-US" sz="1100" b="1" dirty="0">
-                <a:solidFill>
-                  <a:srgbClr val="0E1C42"/>
-                </a:solidFill>
-                <a:latin typeface="Calibri" pitchFamily="34" charset="0"/>
-                <a:ea typeface="Calibri" pitchFamily="34" charset="-122"/>
-                <a:cs typeface="Calibri" pitchFamily="34" charset="-120"/>
-              </a:rPr>
-              <a:t>CHAT PROMPT</a:t>
-            </a:r>
-            <a:endParaRPr lang="en-US" sz="1100" dirty="0"/>
-          </a:p>
-        </p:txBody>
-      </p:sp>
-      <p:sp>
-        <p:nvSpPr>
-          <p:cNvPr id="6" name="Shape 4"/>
-          <p:cNvSpPr/>
-          <p:nvPr/>
-        </p:nvSpPr>
-        <p:spPr>
-          <a:xfrm>
-            <a:off x="457200" y="1005840"/>
-            <a:ext cx="8229600" cy="640080"/>
-          </a:xfrm>
-          <a:prstGeom prst="roundRect">
-            <a:avLst>
-              <a:gd name="adj" fmla="val 14286"/>
-            </a:avLst>
-          </a:prstGeom>
-          <a:solidFill>
-            <a:srgbClr val="F8FAFC"/>
-          </a:solidFill>
-          <a:ln w="12700">
-            <a:solidFill>
-              <a:srgbClr val="C7922C"/>
-            </a:solidFill>
-            <a:prstDash val="solid"/>
-          </a:ln>
           <a:effectLst>
             <a:outerShdw sx="100000" sy="100000" kx="0" ky="0" algn="bl" rotWithShape="0" blurRad="101600" dist="38100" dir="2700000">
               <a:srgbClr val="000000">
@@ -6126,30 +7361,30 @@
       </p:sp>
       <p:sp>
         <p:nvSpPr>
-          <p:cNvPr id="7" name="Text 5"/>
-          <p:cNvSpPr/>
-          <p:nvPr/>
-        </p:nvSpPr>
-        <p:spPr>
-          <a:xfrm>
-            <a:off x="640080" y="1115568"/>
-            <a:ext cx="7863840" cy="411480"/>
-          </a:xfrm>
-          <a:prstGeom prst="rect">
-            <a:avLst/>
-          </a:prstGeom>
-          <a:noFill/>
-          <a:ln/>
-        </p:spPr>
-        <p:txBody>
-          <a:bodyPr wrap="square" lIns="0" tIns="0" rIns="0" bIns="0" rtlCol="0" anchor="ctr"/>
-          <a:lstStyle/>
-          <a:p>
-            <a:pPr indent="0" marL="0">
-              <a:buNone/>
-            </a:pPr>
-            <a:r>
-              <a:rPr lang="en-US" sz="1800" i="1" dirty="0">
+          <p:cNvPr id="8" name="Text 6"/>
+          <p:cNvSpPr/>
+          <p:nvPr/>
+        </p:nvSpPr>
+        <p:spPr>
+          <a:xfrm>
+            <a:off x="594360" y="1911096"/>
+            <a:ext cx="7863840" cy="384048"/>
+          </a:xfrm>
+          <a:prstGeom prst="rect">
+            <a:avLst/>
+          </a:prstGeom>
+          <a:noFill/>
+          <a:ln/>
+        </p:spPr>
+        <p:txBody>
+          <a:bodyPr wrap="square" lIns="0" tIns="0" rIns="0" bIns="0" rtlCol="0" anchor="ctr"/>
+          <a:lstStyle/>
+          <a:p>
+            <a:pPr indent="0" marL="0">
+              <a:buNone/>
+            </a:pPr>
+            <a:r>
+              <a:rPr lang="en-US" sz="1500" dirty="0">
                 <a:solidFill>
                   <a:srgbClr val="1E293B"/>
                 </a:solidFill>
@@ -6157,192 +7392,32 @@
                 <a:ea typeface="Calibri" pitchFamily="34" charset="-122"/>
                 <a:cs typeface="Calibri" pitchFamily="34" charset="-120"/>
               </a:rPr>
-              <a:t>when a travel guide is well written you can almost feel like you are already there in that place</a:t>
-            </a:r>
-            <a:endParaRPr lang="en-US" sz="1800" dirty="0"/>
-          </a:p>
-        </p:txBody>
-      </p:sp>
-    </p:spTree>
-  </p:cSld>
-  <p:clrMapOvr>
-    <a:masterClrMapping/>
-  </p:clrMapOvr>
-</p:sld>
-</file>
-
-<file path=ppt/slides/slide9.xml><?xml version="1.0" encoding="utf-8"?>
-<p:sld xmlns:a="http://schemas.openxmlformats.org/drawingml/2006/main" xmlns:r="http://schemas.openxmlformats.org/officeDocument/2006/relationships" xmlns:p="http://schemas.openxmlformats.org/presentationml/2006/main">
-  <p:cSld name="Slide 9">
-    <p:bg>
-      <p:bgPr>
-        <a:solidFill>
-          <a:srgbClr val="E5F7FC"/>
-        </a:solidFill>
-      </p:bgPr>
-    </p:bg>
-    <p:spTree>
-      <p:nvGrpSpPr>
-        <p:cNvPr id="1" name=""/>
-        <p:cNvGrpSpPr/>
-        <p:nvPr/>
-      </p:nvGrpSpPr>
-      <p:grpSpPr>
-        <a:xfrm>
-          <a:off x="0" y="0"/>
-          <a:ext cx="0" cy="0"/>
-          <a:chOff x="0" y="0"/>
-          <a:chExt cx="0" cy="0"/>
-        </a:xfrm>
-      </p:grpSpPr>
-      <p:sp>
-        <p:nvSpPr>
-          <p:cNvPr id="2" name="Text 0"/>
-          <p:cNvSpPr/>
-          <p:nvPr/>
-        </p:nvSpPr>
-        <p:spPr>
-          <a:xfrm>
-            <a:off x="365760" y="164592"/>
-            <a:ext cx="5943600" cy="566928"/>
-          </a:xfrm>
-          <a:prstGeom prst="rect">
-            <a:avLst/>
-          </a:prstGeom>
-          <a:noFill/>
-          <a:ln/>
-        </p:spPr>
-        <p:txBody>
-          <a:bodyPr wrap="square" lIns="0" tIns="0" rIns="0" bIns="0" rtlCol="0" anchor="ctr"/>
-          <a:lstStyle/>
-          <a:p>
-            <a:pPr algn="l" indent="0" marL="0">
-              <a:buNone/>
-            </a:pPr>
-            <a:r>
-              <a:rPr lang="en-US" sz="2800" b="1" dirty="0">
-                <a:solidFill>
-                  <a:srgbClr val="0E1C42"/>
-                </a:solidFill>
-                <a:latin typeface="Calibri" pitchFamily="34" charset="0"/>
-                <a:ea typeface="Calibri" pitchFamily="34" charset="-122"/>
-                <a:cs typeface="Calibri" pitchFamily="34" charset="-120"/>
-              </a:rPr>
-              <a:t>🔧 Fix-It Sentence — Answer Revealed</a:t>
-            </a:r>
-            <a:endParaRPr lang="en-US" sz="2800" dirty="0"/>
-          </a:p>
-        </p:txBody>
-      </p:sp>
-      <p:sp>
-        <p:nvSpPr>
-          <p:cNvPr id="3" name="Shape 1"/>
-          <p:cNvSpPr/>
-          <p:nvPr/>
-        </p:nvSpPr>
-        <p:spPr>
-          <a:xfrm>
-            <a:off x="365760" y="749808"/>
-            <a:ext cx="8412480" cy="0"/>
-          </a:xfrm>
-          <a:prstGeom prst="line">
-            <a:avLst/>
-          </a:prstGeom>
-          <a:noFill/>
-          <a:ln w="19050">
-            <a:solidFill>
-              <a:srgbClr val="5CB85C"/>
-            </a:solidFill>
-            <a:prstDash val="solid"/>
-          </a:ln>
-        </p:spPr>
-      </p:sp>
-      <p:sp>
-        <p:nvSpPr>
-          <p:cNvPr id="4" name="Shape 2"/>
-          <p:cNvSpPr/>
-          <p:nvPr/>
-        </p:nvSpPr>
-        <p:spPr>
-          <a:xfrm>
-            <a:off x="6492240" y="173736"/>
-            <a:ext cx="2286000" cy="502920"/>
+              <a:t>🌱  -ing with spelling change — write → writing (drop e); map → mapping (double p)</a:t>
+            </a:r>
+            <a:endParaRPr lang="en-US" sz="1500" dirty="0"/>
+          </a:p>
+        </p:txBody>
+      </p:sp>
+      <p:sp>
+        <p:nvSpPr>
+          <p:cNvPr id="9" name="Shape 7"/>
+          <p:cNvSpPr/>
+          <p:nvPr/>
+        </p:nvSpPr>
+        <p:spPr>
+          <a:xfrm>
+            <a:off x="365760" y="2487168"/>
+            <a:ext cx="8412480" cy="621792"/>
           </a:xfrm>
           <a:prstGeom prst="roundRect">
             <a:avLst>
-              <a:gd name="adj" fmla="val 21818"/>
+              <a:gd name="adj" fmla="val 14706"/>
             </a:avLst>
           </a:prstGeom>
           <a:solidFill>
-            <a:srgbClr val="5CB85C"/>
+            <a:srgbClr val="F0E8FF"/>
           </a:solidFill>
           <a:ln/>
-        </p:spPr>
-      </p:sp>
-      <p:sp>
-        <p:nvSpPr>
-          <p:cNvPr id="5" name="Text 3"/>
-          <p:cNvSpPr/>
-          <p:nvPr/>
-        </p:nvSpPr>
-        <p:spPr>
-          <a:xfrm>
-            <a:off x="6492240" y="173736"/>
-            <a:ext cx="2286000" cy="502920"/>
-          </a:xfrm>
-          <a:prstGeom prst="rect">
-            <a:avLst/>
-          </a:prstGeom>
-          <a:noFill/>
-          <a:ln/>
-        </p:spPr>
-        <p:txBody>
-          <a:bodyPr wrap="square" lIns="0" tIns="0" rIns="0" bIns="0" rtlCol="0" anchor="ctr"/>
-          <a:lstStyle/>
-          <a:p>
-            <a:pPr algn="ctr" indent="0" marL="0">
-              <a:buNone/>
-            </a:pPr>
-            <a:r>
-              <a:rPr lang="en-US" sz="1100" b="1" dirty="0">
-                <a:solidFill>
-                  <a:srgbClr val="0E1C42"/>
-                </a:solidFill>
-                <a:latin typeface="Calibri" pitchFamily="34" charset="0"/>
-                <a:ea typeface="Calibri" pitchFamily="34" charset="-122"/>
-                <a:cs typeface="Calibri" pitchFamily="34" charset="-120"/>
-              </a:rPr>
-              <a:t>CHAT PROMPT</a:t>
-            </a:r>
-            <a:endParaRPr lang="en-US" sz="1100" dirty="0"/>
-          </a:p>
-        </p:txBody>
-      </p:sp>
-      <p:sp>
-        <p:nvSpPr>
-          <p:cNvPr id="6" name="Shape 4"/>
-          <p:cNvSpPr/>
-          <p:nvPr/>
-        </p:nvSpPr>
-        <p:spPr>
-          <a:xfrm>
-            <a:off x="457200" y="1005840"/>
-            <a:ext cx="8229600" cy="640080"/>
-          </a:xfrm>
-          <a:prstGeom prst="roundRect">
-            <a:avLst>
-              <a:gd name="adj" fmla="val 14286"/>
-            </a:avLst>
-          </a:prstGeom>
-          <a:solidFill>
-            <a:srgbClr val="F8FAFC"/>
-          </a:solidFill>
-          <a:ln w="12700">
-            <a:solidFill>
-              <a:srgbClr val="C7922C"/>
-            </a:solidFill>
-            <a:prstDash val="solid"/>
-          </a:ln>
           <a:effectLst>
             <a:outerShdw sx="100000" sy="100000" kx="0" ky="0" algn="bl" rotWithShape="0" blurRad="101600" dist="38100" dir="2700000">
               <a:srgbClr val="000000">
@@ -6354,30 +7429,30 @@
       </p:sp>
       <p:sp>
         <p:nvSpPr>
-          <p:cNvPr id="7" name="Text 5"/>
-          <p:cNvSpPr/>
-          <p:nvPr/>
-        </p:nvSpPr>
-        <p:spPr>
-          <a:xfrm>
-            <a:off x="640080" y="1115568"/>
-            <a:ext cx="7863840" cy="411480"/>
-          </a:xfrm>
-          <a:prstGeom prst="rect">
-            <a:avLst/>
-          </a:prstGeom>
-          <a:noFill/>
-          <a:ln/>
-        </p:spPr>
-        <p:txBody>
-          <a:bodyPr wrap="square" lIns="0" tIns="0" rIns="0" bIns="0" rtlCol="0" anchor="ctr"/>
-          <a:lstStyle/>
-          <a:p>
-            <a:pPr indent="0" marL="0">
-              <a:buNone/>
-            </a:pPr>
-            <a:r>
-              <a:rPr lang="en-US" sz="1800" i="1" dirty="0">
+          <p:cNvPr id="10" name="Text 8"/>
+          <p:cNvSpPr/>
+          <p:nvPr/>
+        </p:nvSpPr>
+        <p:spPr>
+          <a:xfrm>
+            <a:off x="594360" y="2606040"/>
+            <a:ext cx="7863840" cy="384048"/>
+          </a:xfrm>
+          <a:prstGeom prst="rect">
+            <a:avLst/>
+          </a:prstGeom>
+          <a:noFill/>
+          <a:ln/>
+        </p:spPr>
+        <p:txBody>
+          <a:bodyPr wrap="square" lIns="0" tIns="0" rIns="0" bIns="0" rtlCol="0" anchor="ctr"/>
+          <a:lstStyle/>
+          <a:p>
+            <a:pPr indent="0" marL="0">
+              <a:buNone/>
+            </a:pPr>
+            <a:r>
+              <a:rPr lang="en-US" sz="1500" dirty="0">
                 <a:solidFill>
                   <a:srgbClr val="1E293B"/>
                 </a:solidFill>
@@ -6385,87 +7460,9 @@
                 <a:ea typeface="Calibri" pitchFamily="34" charset="-122"/>
                 <a:cs typeface="Calibri" pitchFamily="34" charset="-120"/>
               </a:rPr>
-              <a:t>when a travel guide is well written you can almost feel like you are already there in that place</a:t>
-            </a:r>
-            <a:endParaRPr lang="en-US" sz="1800" dirty="0"/>
-          </a:p>
-        </p:txBody>
-      </p:sp>
-      <p:sp>
-        <p:nvSpPr>
-          <p:cNvPr id="8" name="Text 6"/>
-          <p:cNvSpPr/>
-          <p:nvPr/>
-        </p:nvSpPr>
-        <p:spPr>
-          <a:xfrm>
-            <a:off x="457200" y="1737360"/>
-            <a:ext cx="8046720" cy="292608"/>
-          </a:xfrm>
-          <a:prstGeom prst="rect">
-            <a:avLst/>
-          </a:prstGeom>
-          <a:noFill/>
-          <a:ln/>
-        </p:spPr>
-        <p:txBody>
-          <a:bodyPr wrap="square" lIns="0" tIns="0" rIns="0" bIns="0" rtlCol="0" anchor="ctr"/>
-          <a:lstStyle/>
-          <a:p>
-            <a:pPr indent="0" marL="0">
-              <a:buNone/>
-            </a:pPr>
-            <a:r>
-              <a:rPr lang="en-US" sz="1100" b="1" spc="200" kern="0" dirty="0">
-                <a:solidFill>
-                  <a:srgbClr val="64748B"/>
-                </a:solidFill>
-                <a:latin typeface="Calibri" pitchFamily="34" charset="0"/>
-                <a:ea typeface="Calibri" pitchFamily="34" charset="-122"/>
-                <a:cs typeface="Calibri" pitchFamily="34" charset="-120"/>
-              </a:rPr>
-              <a:t>WHY</a:t>
-            </a:r>
-            <a:endParaRPr lang="en-US" sz="1100" dirty="0"/>
-          </a:p>
-        </p:txBody>
-      </p:sp>
-      <p:sp>
-        <p:nvSpPr>
-          <p:cNvPr id="9" name="Text 7"/>
-          <p:cNvSpPr/>
-          <p:nvPr/>
-        </p:nvSpPr>
-        <p:spPr>
-          <a:xfrm>
-            <a:off x="640080" y="2011680"/>
-            <a:ext cx="7863840" cy="502920"/>
-          </a:xfrm>
-          <a:prstGeom prst="rect">
-            <a:avLst/>
-          </a:prstGeom>
-          <a:noFill/>
-          <a:ln/>
-        </p:spPr>
-        <p:txBody>
-          <a:bodyPr wrap="square" lIns="0" tIns="0" rIns="0" bIns="0" rtlCol="0" anchor="ctr"/>
-          <a:lstStyle/>
-          <a:p>
-            <a:pPr indent="0" marL="0">
-              <a:buNone/>
-            </a:pPr>
-            <a:r>
-              <a:rPr lang="en-US" sz="1300" i="1" dirty="0">
-                <a:solidFill>
-                  <a:srgbClr val="64748B"/>
-                </a:solidFill>
-                <a:latin typeface="Calibri" pitchFamily="34" charset="0"/>
-                <a:ea typeface="Calibri" pitchFamily="34" charset="-122"/>
-                <a:cs typeface="Calibri" pitchFamily="34" charset="-120"/>
-              </a:rPr>
-              <a:t>When a travel guide is well written , you can almost feel like you are already there in that place .</a:t>
-            </a:r>
-            <a:endParaRPr lang="en-US" sz="1300" dirty="0"/>
+              <a:t>🌱  Practice: Match the word to its base!</a:t>
+            </a:r>
+            <a:endParaRPr lang="en-US" sz="1500" dirty="0"/>
           </a:p>
         </p:txBody>
       </p:sp>

--- a/Planning docs/Slides/lesson-7-4-teacher-slides.pptx
+++ b/Planning docs/Slides/lesson-7-4-teacher-slides.pptx
@@ -516,7 +516,7 @@
           <a:p>
             <a:r>
               <a:rPr lang="en-US" dirty="0"/>
-              <a:t>Lesson 7.4. Reading: 📰 Read: What Is a Travel Guide?.</a:t>
+              <a:t>Lesson 7.4. Reading: What Is a Travel Guide?.</a:t>
             </a:r>
             <a:endParaRPr lang="en-US" dirty="0"/>
           </a:p>
@@ -2231,7 +2231,7 @@
                 <a:ea typeface="Calibri" pitchFamily="34" charset="-122"/>
                 <a:cs typeface="Calibri" pitchFamily="34" charset="-120"/>
               </a:rPr>
-              <a:t>Lesson 7.4  ·  📰 Read: What Is a Travel Guide?</a:t>
+              <a:t>Lesson 7.4  ·  What Is a Travel Guide?</a:t>
             </a:r>
             <a:endParaRPr lang="en-US" sz="2000" dirty="0"/>
           </a:p>
@@ -4959,7 +4959,7 @@
                 <a:ea typeface="Calibri" pitchFamily="34" charset="-122"/>
                 <a:cs typeface="Calibri" pitchFamily="34" charset="-120"/>
               </a:rPr>
-              <a:t>📰 Read: What Is a Travel Guide?</a:t>
+              <a:t>What Is a Travel Guide?</a:t>
             </a:r>
             <a:endParaRPr lang="en-US" sz="2600" dirty="0"/>
           </a:p>
@@ -5037,7 +5037,7 @@
                 <a:ea typeface="Calibri" pitchFamily="34" charset="-122"/>
                 <a:cs typeface="Calibri" pitchFamily="34" charset="-120"/>
               </a:rPr>
-              <a:t>•  The text says a well-written travel guide makes you feel like you’re already there. What kind of details create that feeling?</a:t>
+              <a:t>•  Stop after the article names the third thing a good travel guide has. The article says travel guides use headings so readers can find what they need quickly. Look at the guide you are writing: where would a heading help your reader most?</a:t>
             </a:r>
             <a:endParaRPr lang="en-US" sz="1500" dirty="0"/>
           </a:p>
@@ -6193,7 +6193,7 @@
                 <a:ea typeface="Calibri" pitchFamily="34" charset="-122"/>
                 <a:cs typeface="Calibri" pitchFamily="34" charset="-120"/>
               </a:rPr>
-              <a:t>📰 Read: What Is a Travel Guide?</a:t>
+              <a:t>What Is a Travel Guide?</a:t>
             </a:r>
             <a:endParaRPr lang="en-US" sz="2000" dirty="0"/>
           </a:p>
@@ -6305,7 +6305,7 @@
                 <a:ea typeface="Calibri" pitchFamily="34" charset="-122"/>
                 <a:cs typeface="Calibri" pitchFamily="34" charset="-120"/>
               </a:rPr>
-              <a:t>The text says a well-written travel guide makes you feel like you’re already there. What kind of details create that feeling?</a:t>
+              <a:t>Stop after the article names the third thing a good travel guide has. The article says travel guides use headings so readers can find what they need quickly. Look at the guide you are writing: where would a heading help your reader most?</a:t>
             </a:r>
             <a:endParaRPr lang="en-US" sz="1700" dirty="0"/>
           </a:p>
